--- a/PPT/methodology.pptx
+++ b/PPT/methodology.pptx
@@ -2,7 +2,7 @@
 <file path=ppt/presentation.xml><?xml version="1.0" encoding="utf-8"?>
 <p:presentation xmlns:a="http://schemas.openxmlformats.org/drawingml/2006/main" xmlns:r="http://schemas.openxmlformats.org/officeDocument/2006/relationships" xmlns:p="http://schemas.openxmlformats.org/presentationml/2006/main" saveSubsetFonts="1" autoCompressPictures="0">
   <p:sldMasterIdLst>
-    <p:sldMasterId id="2147484344" r:id="rId1"/>
+    <p:sldMasterId id="2147484404" r:id="rId1"/>
   </p:sldMasterIdLst>
   <p:notesMasterIdLst>
     <p:notesMasterId r:id="rId3"/>
@@ -10,7 +10,7 @@
   <p:sldIdLst>
     <p:sldId id="257" r:id="rId2"/>
   </p:sldIdLst>
-  <p:sldSz cx="3240088" cy="2520950"/>
+  <p:sldSz cx="3240088" cy="2844800"/>
   <p:notesSz cx="6858000" cy="9144000"/>
   <p:defaultTextStyle>
     <a:defPPr>
@@ -197,7 +197,7 @@
           <a:p>
             <a:fld id="{201994AD-D3EC-9C41-A2CB-19052A38E74B}" type="datetimeFigureOut">
               <a:rPr lang="en-CN" smtClean="0"/>
-              <a:t>2023/9/12</a:t>
+              <a:t>2024/3/10</a:t>
             </a:fld>
             <a:endParaRPr lang="en-CN"/>
           </a:p>
@@ -215,8 +215,8 @@
         </p:nvSpPr>
         <p:spPr>
           <a:xfrm>
-            <a:off x="1446213" y="1143000"/>
-            <a:ext cx="3965575" cy="3086100"/>
+            <a:off x="1671638" y="1143000"/>
+            <a:ext cx="3514725" cy="3086100"/>
           </a:xfrm>
           <a:prstGeom prst="rect">
             <a:avLst/>
@@ -494,8 +494,8 @@
         </p:nvSpPr>
         <p:spPr>
           <a:xfrm>
-            <a:off x="1446213" y="1143000"/>
-            <a:ext cx="3965575" cy="3086100"/>
+            <a:off x="1671638" y="1143000"/>
+            <a:ext cx="3514725" cy="3086100"/>
           </a:xfrm>
         </p:spPr>
       </p:sp>
@@ -583,8 +583,8 @@
         </p:nvSpPr>
         <p:spPr>
           <a:xfrm>
-            <a:off x="243007" y="412572"/>
-            <a:ext cx="2754075" cy="877664"/>
+            <a:off x="243007" y="465573"/>
+            <a:ext cx="2754075" cy="990412"/>
           </a:xfrm>
         </p:spPr>
         <p:txBody>
@@ -615,8 +615,8 @@
         </p:nvSpPr>
         <p:spPr>
           <a:xfrm>
-            <a:off x="405011" y="1324082"/>
-            <a:ext cx="2430066" cy="608646"/>
+            <a:off x="405011" y="1494179"/>
+            <a:ext cx="2430066" cy="686835"/>
           </a:xfrm>
         </p:spPr>
         <p:txBody>
@@ -685,7 +685,7 @@
           <a:p>
             <a:fld id="{2CBB2836-764F-9D4C-84C9-D966FF3832BD}" type="datetimeFigureOut">
               <a:rPr lang="en-CN" smtClean="0"/>
-              <a:t>2023/9/12</a:t>
+              <a:t>2024/3/10</a:t>
             </a:fld>
             <a:endParaRPr lang="en-CN"/>
           </a:p>
@@ -736,7 +736,7 @@
     </p:spTree>
     <p:extLst>
       <p:ext uri="{BB962C8B-B14F-4D97-AF65-F5344CB8AC3E}">
-        <p14:creationId xmlns:p14="http://schemas.microsoft.com/office/powerpoint/2010/main" val="4248813482"/>
+        <p14:creationId xmlns:p14="http://schemas.microsoft.com/office/powerpoint/2010/main" val="1886653471"/>
       </p:ext>
     </p:extLst>
   </p:cSld>
@@ -855,7 +855,7 @@
           <a:p>
             <a:fld id="{2CBB2836-764F-9D4C-84C9-D966FF3832BD}" type="datetimeFigureOut">
               <a:rPr lang="en-CN" smtClean="0"/>
-              <a:t>2023/9/12</a:t>
+              <a:t>2024/3/10</a:t>
             </a:fld>
             <a:endParaRPr lang="en-CN"/>
           </a:p>
@@ -906,7 +906,7 @@
     </p:spTree>
     <p:extLst>
       <p:ext uri="{BB962C8B-B14F-4D97-AF65-F5344CB8AC3E}">
-        <p14:creationId xmlns:p14="http://schemas.microsoft.com/office/powerpoint/2010/main" val="93097438"/>
+        <p14:creationId xmlns:p14="http://schemas.microsoft.com/office/powerpoint/2010/main" val="26210429"/>
       </p:ext>
     </p:extLst>
   </p:cSld>
@@ -945,8 +945,8 @@
         </p:nvSpPr>
         <p:spPr>
           <a:xfrm>
-            <a:off x="2318688" y="134217"/>
-            <a:ext cx="698644" cy="2136389"/>
+            <a:off x="2318688" y="151459"/>
+            <a:ext cx="698644" cy="2410837"/>
           </a:xfrm>
         </p:spPr>
         <p:txBody>
@@ -973,8 +973,8 @@
         </p:nvSpPr>
         <p:spPr>
           <a:xfrm>
-            <a:off x="222756" y="134217"/>
-            <a:ext cx="2055431" cy="2136389"/>
+            <a:off x="222756" y="151459"/>
+            <a:ext cx="2055431" cy="2410837"/>
           </a:xfrm>
         </p:spPr>
         <p:txBody>
@@ -1035,7 +1035,7 @@
           <a:p>
             <a:fld id="{2CBB2836-764F-9D4C-84C9-D966FF3832BD}" type="datetimeFigureOut">
               <a:rPr lang="en-CN" smtClean="0"/>
-              <a:t>2023/9/12</a:t>
+              <a:t>2024/3/10</a:t>
             </a:fld>
             <a:endParaRPr lang="en-CN"/>
           </a:p>
@@ -1086,7 +1086,7 @@
     </p:spTree>
     <p:extLst>
       <p:ext uri="{BB962C8B-B14F-4D97-AF65-F5344CB8AC3E}">
-        <p14:creationId xmlns:p14="http://schemas.microsoft.com/office/powerpoint/2010/main" val="1260978386"/>
+        <p14:creationId xmlns:p14="http://schemas.microsoft.com/office/powerpoint/2010/main" val="2860284232"/>
       </p:ext>
     </p:extLst>
   </p:cSld>
@@ -1205,7 +1205,7 @@
           <a:p>
             <a:fld id="{2CBB2836-764F-9D4C-84C9-D966FF3832BD}" type="datetimeFigureOut">
               <a:rPr lang="en-CN" smtClean="0"/>
-              <a:t>2023/9/12</a:t>
+              <a:t>2024/3/10</a:t>
             </a:fld>
             <a:endParaRPr lang="en-CN"/>
           </a:p>
@@ -1256,7 +1256,7 @@
     </p:spTree>
     <p:extLst>
       <p:ext uri="{BB962C8B-B14F-4D97-AF65-F5344CB8AC3E}">
-        <p14:creationId xmlns:p14="http://schemas.microsoft.com/office/powerpoint/2010/main" val="664160305"/>
+        <p14:creationId xmlns:p14="http://schemas.microsoft.com/office/powerpoint/2010/main" val="3059321215"/>
       </p:ext>
     </p:extLst>
   </p:cSld>
@@ -1295,8 +1295,8 @@
         </p:nvSpPr>
         <p:spPr>
           <a:xfrm>
-            <a:off x="221069" y="628488"/>
-            <a:ext cx="2794576" cy="1048645"/>
+            <a:off x="221069" y="709225"/>
+            <a:ext cx="2794576" cy="1183358"/>
           </a:xfrm>
         </p:spPr>
         <p:txBody>
@@ -1327,8 +1327,8 @@
         </p:nvSpPr>
         <p:spPr>
           <a:xfrm>
-            <a:off x="221069" y="1687053"/>
-            <a:ext cx="2794576" cy="551458"/>
+            <a:off x="221069" y="1903778"/>
+            <a:ext cx="2794576" cy="622300"/>
           </a:xfrm>
         </p:spPr>
         <p:txBody>
@@ -1449,7 +1449,7 @@
           <a:p>
             <a:fld id="{2CBB2836-764F-9D4C-84C9-D966FF3832BD}" type="datetimeFigureOut">
               <a:rPr lang="en-CN" smtClean="0"/>
-              <a:t>2023/9/12</a:t>
+              <a:t>2024/3/10</a:t>
             </a:fld>
             <a:endParaRPr lang="en-CN"/>
           </a:p>
@@ -1500,7 +1500,7 @@
     </p:spTree>
     <p:extLst>
       <p:ext uri="{BB962C8B-B14F-4D97-AF65-F5344CB8AC3E}">
-        <p14:creationId xmlns:p14="http://schemas.microsoft.com/office/powerpoint/2010/main" val="3959442947"/>
+        <p14:creationId xmlns:p14="http://schemas.microsoft.com/office/powerpoint/2010/main" val="2190131558"/>
       </p:ext>
     </p:extLst>
   </p:cSld>
@@ -1562,8 +1562,8 @@
         </p:nvSpPr>
         <p:spPr>
           <a:xfrm>
-            <a:off x="222756" y="671086"/>
-            <a:ext cx="1377037" cy="1599520"/>
+            <a:off x="222756" y="757297"/>
+            <a:ext cx="1377037" cy="1804999"/>
           </a:xfrm>
         </p:spPr>
         <p:txBody>
@@ -1619,8 +1619,8 @@
         </p:nvSpPr>
         <p:spPr>
           <a:xfrm>
-            <a:off x="1640295" y="671086"/>
-            <a:ext cx="1377037" cy="1599520"/>
+            <a:off x="1640295" y="757297"/>
+            <a:ext cx="1377037" cy="1804999"/>
           </a:xfrm>
         </p:spPr>
         <p:txBody>
@@ -1681,7 +1681,7 @@
           <a:p>
             <a:fld id="{2CBB2836-764F-9D4C-84C9-D966FF3832BD}" type="datetimeFigureOut">
               <a:rPr lang="en-CN" smtClean="0"/>
-              <a:t>2023/9/12</a:t>
+              <a:t>2024/3/10</a:t>
             </a:fld>
             <a:endParaRPr lang="en-CN"/>
           </a:p>
@@ -1732,7 +1732,7 @@
     </p:spTree>
     <p:extLst>
       <p:ext uri="{BB962C8B-B14F-4D97-AF65-F5344CB8AC3E}">
-        <p14:creationId xmlns:p14="http://schemas.microsoft.com/office/powerpoint/2010/main" val="2224525862"/>
+        <p14:creationId xmlns:p14="http://schemas.microsoft.com/office/powerpoint/2010/main" val="569746998"/>
       </p:ext>
     </p:extLst>
   </p:cSld>
@@ -1771,8 +1771,8 @@
         </p:nvSpPr>
         <p:spPr>
           <a:xfrm>
-            <a:off x="223178" y="134218"/>
-            <a:ext cx="2794576" cy="487267"/>
+            <a:off x="223178" y="151460"/>
+            <a:ext cx="2794576" cy="549863"/>
           </a:xfrm>
         </p:spPr>
         <p:txBody>
@@ -1799,8 +1799,8 @@
         </p:nvSpPr>
         <p:spPr>
           <a:xfrm>
-            <a:off x="223178" y="617983"/>
-            <a:ext cx="1370709" cy="302864"/>
+            <a:off x="223178" y="697371"/>
+            <a:ext cx="1370709" cy="341771"/>
           </a:xfrm>
         </p:spPr>
         <p:txBody>
@@ -1864,8 +1864,8 @@
         </p:nvSpPr>
         <p:spPr>
           <a:xfrm>
-            <a:off x="223178" y="920847"/>
-            <a:ext cx="1370709" cy="1354427"/>
+            <a:off x="223178" y="1039142"/>
+            <a:ext cx="1370709" cy="1528422"/>
           </a:xfrm>
         </p:spPr>
         <p:txBody>
@@ -1921,8 +1921,8 @@
         </p:nvSpPr>
         <p:spPr>
           <a:xfrm>
-            <a:off x="1640295" y="617983"/>
-            <a:ext cx="1377459" cy="302864"/>
+            <a:off x="1640295" y="697371"/>
+            <a:ext cx="1377459" cy="341771"/>
           </a:xfrm>
         </p:spPr>
         <p:txBody>
@@ -1986,8 +1986,8 @@
         </p:nvSpPr>
         <p:spPr>
           <a:xfrm>
-            <a:off x="1640295" y="920847"/>
-            <a:ext cx="1377459" cy="1354427"/>
+            <a:off x="1640295" y="1039142"/>
+            <a:ext cx="1377459" cy="1528422"/>
           </a:xfrm>
         </p:spPr>
         <p:txBody>
@@ -2048,7 +2048,7 @@
           <a:p>
             <a:fld id="{2CBB2836-764F-9D4C-84C9-D966FF3832BD}" type="datetimeFigureOut">
               <a:rPr lang="en-CN" smtClean="0"/>
-              <a:t>2023/9/12</a:t>
+              <a:t>2024/3/10</a:t>
             </a:fld>
             <a:endParaRPr lang="en-CN"/>
           </a:p>
@@ -2099,7 +2099,7 @@
     </p:spTree>
     <p:extLst>
       <p:ext uri="{BB962C8B-B14F-4D97-AF65-F5344CB8AC3E}">
-        <p14:creationId xmlns:p14="http://schemas.microsoft.com/office/powerpoint/2010/main" val="2560915618"/>
+        <p14:creationId xmlns:p14="http://schemas.microsoft.com/office/powerpoint/2010/main" val="1044993742"/>
       </p:ext>
     </p:extLst>
   </p:cSld>
@@ -2166,7 +2166,7 @@
           <a:p>
             <a:fld id="{2CBB2836-764F-9D4C-84C9-D966FF3832BD}" type="datetimeFigureOut">
               <a:rPr lang="en-CN" smtClean="0"/>
-              <a:t>2023/9/12</a:t>
+              <a:t>2024/3/10</a:t>
             </a:fld>
             <a:endParaRPr lang="en-CN"/>
           </a:p>
@@ -2217,7 +2217,7 @@
     </p:spTree>
     <p:extLst>
       <p:ext uri="{BB962C8B-B14F-4D97-AF65-F5344CB8AC3E}">
-        <p14:creationId xmlns:p14="http://schemas.microsoft.com/office/powerpoint/2010/main" val="2165001751"/>
+        <p14:creationId xmlns:p14="http://schemas.microsoft.com/office/powerpoint/2010/main" val="1596167565"/>
       </p:ext>
     </p:extLst>
   </p:cSld>
@@ -2261,7 +2261,7 @@
           <a:p>
             <a:fld id="{2CBB2836-764F-9D4C-84C9-D966FF3832BD}" type="datetimeFigureOut">
               <a:rPr lang="en-CN" smtClean="0"/>
-              <a:t>2023/9/12</a:t>
+              <a:t>2024/3/10</a:t>
             </a:fld>
             <a:endParaRPr lang="en-CN"/>
           </a:p>
@@ -2312,7 +2312,7 @@
     </p:spTree>
     <p:extLst>
       <p:ext uri="{BB962C8B-B14F-4D97-AF65-F5344CB8AC3E}">
-        <p14:creationId xmlns:p14="http://schemas.microsoft.com/office/powerpoint/2010/main" val="111238053"/>
+        <p14:creationId xmlns:p14="http://schemas.microsoft.com/office/powerpoint/2010/main" val="1925845378"/>
       </p:ext>
     </p:extLst>
   </p:cSld>
@@ -2351,8 +2351,8 @@
         </p:nvSpPr>
         <p:spPr>
           <a:xfrm>
-            <a:off x="223178" y="168063"/>
-            <a:ext cx="1045013" cy="588222"/>
+            <a:off x="223178" y="189653"/>
+            <a:ext cx="1045013" cy="663787"/>
           </a:xfrm>
         </p:spPr>
         <p:txBody>
@@ -2383,8 +2383,8 @@
         </p:nvSpPr>
         <p:spPr>
           <a:xfrm>
-            <a:off x="1377459" y="362971"/>
-            <a:ext cx="1640295" cy="1791508"/>
+            <a:off x="1377459" y="409599"/>
+            <a:ext cx="1640295" cy="2021652"/>
           </a:xfrm>
         </p:spPr>
         <p:txBody>
@@ -2468,8 +2468,8 @@
         </p:nvSpPr>
         <p:spPr>
           <a:xfrm>
-            <a:off x="223178" y="756285"/>
-            <a:ext cx="1045013" cy="1401112"/>
+            <a:off x="223178" y="853440"/>
+            <a:ext cx="1045013" cy="1581103"/>
           </a:xfrm>
         </p:spPr>
         <p:txBody>
@@ -2538,7 +2538,7 @@
           <a:p>
             <a:fld id="{2CBB2836-764F-9D4C-84C9-D966FF3832BD}" type="datetimeFigureOut">
               <a:rPr lang="en-CN" smtClean="0"/>
-              <a:t>2023/9/12</a:t>
+              <a:t>2024/3/10</a:t>
             </a:fld>
             <a:endParaRPr lang="en-CN"/>
           </a:p>
@@ -2589,7 +2589,7 @@
     </p:spTree>
     <p:extLst>
       <p:ext uri="{BB962C8B-B14F-4D97-AF65-F5344CB8AC3E}">
-        <p14:creationId xmlns:p14="http://schemas.microsoft.com/office/powerpoint/2010/main" val="2599098723"/>
+        <p14:creationId xmlns:p14="http://schemas.microsoft.com/office/powerpoint/2010/main" val="1139674698"/>
       </p:ext>
     </p:extLst>
   </p:cSld>
@@ -2628,8 +2628,8 @@
         </p:nvSpPr>
         <p:spPr>
           <a:xfrm>
-            <a:off x="223178" y="168063"/>
-            <a:ext cx="1045013" cy="588222"/>
+            <a:off x="223178" y="189653"/>
+            <a:ext cx="1045013" cy="663787"/>
           </a:xfrm>
         </p:spPr>
         <p:txBody>
@@ -2660,8 +2660,8 @@
         </p:nvSpPr>
         <p:spPr>
           <a:xfrm>
-            <a:off x="1377459" y="362971"/>
-            <a:ext cx="1640295" cy="1791508"/>
+            <a:off x="1377459" y="409599"/>
+            <a:ext cx="1640295" cy="2021652"/>
           </a:xfrm>
         </p:spPr>
         <p:txBody>
@@ -2725,8 +2725,8 @@
         </p:nvSpPr>
         <p:spPr>
           <a:xfrm>
-            <a:off x="223178" y="756285"/>
-            <a:ext cx="1045013" cy="1401112"/>
+            <a:off x="223178" y="853440"/>
+            <a:ext cx="1045013" cy="1581103"/>
           </a:xfrm>
         </p:spPr>
         <p:txBody>
@@ -2795,7 +2795,7 @@
           <a:p>
             <a:fld id="{2CBB2836-764F-9D4C-84C9-D966FF3832BD}" type="datetimeFigureOut">
               <a:rPr lang="en-CN" smtClean="0"/>
-              <a:t>2023/9/12</a:t>
+              <a:t>2024/3/10</a:t>
             </a:fld>
             <a:endParaRPr lang="en-CN"/>
           </a:p>
@@ -2846,7 +2846,7 @@
     </p:spTree>
     <p:extLst>
       <p:ext uri="{BB962C8B-B14F-4D97-AF65-F5344CB8AC3E}">
-        <p14:creationId xmlns:p14="http://schemas.microsoft.com/office/powerpoint/2010/main" val="1836093052"/>
+        <p14:creationId xmlns:p14="http://schemas.microsoft.com/office/powerpoint/2010/main" val="291026354"/>
       </p:ext>
     </p:extLst>
   </p:cSld>
@@ -2890,8 +2890,8 @@
         </p:nvSpPr>
         <p:spPr>
           <a:xfrm>
-            <a:off x="222756" y="134218"/>
-            <a:ext cx="2794576" cy="487267"/>
+            <a:off x="222756" y="151460"/>
+            <a:ext cx="2794576" cy="549863"/>
           </a:xfrm>
           <a:prstGeom prst="rect">
             <a:avLst/>
@@ -2923,8 +2923,8 @@
         </p:nvSpPr>
         <p:spPr>
           <a:xfrm>
-            <a:off x="222756" y="671086"/>
-            <a:ext cx="2794576" cy="1599520"/>
+            <a:off x="222756" y="757297"/>
+            <a:ext cx="2794576" cy="1804999"/>
           </a:xfrm>
           <a:prstGeom prst="rect">
             <a:avLst/>
@@ -2985,8 +2985,8 @@
         </p:nvSpPr>
         <p:spPr>
           <a:xfrm>
-            <a:off x="222756" y="2336548"/>
-            <a:ext cx="729020" cy="134217"/>
+            <a:off x="222756" y="2636709"/>
+            <a:ext cx="729020" cy="151459"/>
           </a:xfrm>
           <a:prstGeom prst="rect">
             <a:avLst/>
@@ -3008,7 +3008,7 @@
           <a:p>
             <a:fld id="{2CBB2836-764F-9D4C-84C9-D966FF3832BD}" type="datetimeFigureOut">
               <a:rPr lang="en-CN" smtClean="0"/>
-              <a:t>2023/9/12</a:t>
+              <a:t>2024/3/10</a:t>
             </a:fld>
             <a:endParaRPr lang="en-CN"/>
           </a:p>
@@ -3026,8 +3026,8 @@
         </p:nvSpPr>
         <p:spPr>
           <a:xfrm>
-            <a:off x="1073279" y="2336548"/>
-            <a:ext cx="1093530" cy="134217"/>
+            <a:off x="1073279" y="2636709"/>
+            <a:ext cx="1093530" cy="151459"/>
           </a:xfrm>
           <a:prstGeom prst="rect">
             <a:avLst/>
@@ -3063,8 +3063,8 @@
         </p:nvSpPr>
         <p:spPr>
           <a:xfrm>
-            <a:off x="2288312" y="2336548"/>
-            <a:ext cx="729020" cy="134217"/>
+            <a:off x="2288312" y="2636709"/>
+            <a:ext cx="729020" cy="151459"/>
           </a:xfrm>
           <a:prstGeom prst="rect">
             <a:avLst/>
@@ -3095,23 +3095,23 @@
     </p:spTree>
     <p:extLst>
       <p:ext uri="{BB962C8B-B14F-4D97-AF65-F5344CB8AC3E}">
-        <p14:creationId xmlns:p14="http://schemas.microsoft.com/office/powerpoint/2010/main" val="2625455796"/>
+        <p14:creationId xmlns:p14="http://schemas.microsoft.com/office/powerpoint/2010/main" val="2601614126"/>
       </p:ext>
     </p:extLst>
   </p:cSld>
   <p:clrMap bg1="lt1" tx1="dk1" bg2="lt2" tx2="dk2" accent1="accent1" accent2="accent2" accent3="accent3" accent4="accent4" accent5="accent5" accent6="accent6" hlink="hlink" folHlink="folHlink"/>
   <p:sldLayoutIdLst>
-    <p:sldLayoutId id="2147484345" r:id="rId1"/>
-    <p:sldLayoutId id="2147484346" r:id="rId2"/>
-    <p:sldLayoutId id="2147484347" r:id="rId3"/>
-    <p:sldLayoutId id="2147484348" r:id="rId4"/>
-    <p:sldLayoutId id="2147484349" r:id="rId5"/>
-    <p:sldLayoutId id="2147484350" r:id="rId6"/>
-    <p:sldLayoutId id="2147484351" r:id="rId7"/>
-    <p:sldLayoutId id="2147484352" r:id="rId8"/>
-    <p:sldLayoutId id="2147484353" r:id="rId9"/>
-    <p:sldLayoutId id="2147484354" r:id="rId10"/>
-    <p:sldLayoutId id="2147484355" r:id="rId11"/>
+    <p:sldLayoutId id="2147484405" r:id="rId1"/>
+    <p:sldLayoutId id="2147484406" r:id="rId2"/>
+    <p:sldLayoutId id="2147484407" r:id="rId3"/>
+    <p:sldLayoutId id="2147484408" r:id="rId4"/>
+    <p:sldLayoutId id="2147484409" r:id="rId5"/>
+    <p:sldLayoutId id="2147484410" r:id="rId6"/>
+    <p:sldLayoutId id="2147484411" r:id="rId7"/>
+    <p:sldLayoutId id="2147484412" r:id="rId8"/>
+    <p:sldLayoutId id="2147484413" r:id="rId9"/>
+    <p:sldLayoutId id="2147484414" r:id="rId10"/>
+    <p:sldLayoutId id="2147484415" r:id="rId11"/>
   </p:sldLayoutIdLst>
   <p:txStyles>
     <p:titleStyle>
@@ -3427,7 +3427,7 @@
         </p:nvSpPr>
         <p:spPr>
           <a:xfrm>
-            <a:off x="19225" y="613889"/>
+            <a:off x="6828" y="1695535"/>
             <a:ext cx="2246906" cy="200055"/>
           </a:xfrm>
           <a:prstGeom prst="rect">
@@ -3447,17 +3447,17 @@
                 <a:ea typeface="JetBrains Mono" panose="02000009000000000000" pitchFamily="49" charset="0"/>
                 <a:cs typeface="Arial" panose="020B0604020202020204" pitchFamily="34" charset="0"/>
               </a:rPr>
-              <a:t>(b) Knowledge Distillation from GPT-4 and ChatGPT</a:t>
-            </a:r>
-          </a:p>
-        </p:txBody>
-      </p:sp>
-      <p:sp>
-        <p:nvSpPr>
-          <p:cNvPr id="47" name="TextBox 46">
+              <a:t>(c) Knowledge Distillation of GPT-4</a:t>
+            </a:r>
+          </a:p>
+        </p:txBody>
+      </p:sp>
+      <p:sp>
+        <p:nvSpPr>
+          <p:cNvPr id="14" name="TextBox 13">
             <a:extLst>
               <a:ext uri="{FF2B5EF4-FFF2-40B4-BE49-F238E27FC236}">
-                <a16:creationId xmlns:a16="http://schemas.microsoft.com/office/drawing/2014/main" id="{9D0868AF-A43D-5576-A2E1-A7C10AAA79EB}"/>
+                <a16:creationId xmlns:a16="http://schemas.microsoft.com/office/drawing/2014/main" id="{7B2EE884-0B2F-C686-79AA-EE6EE5C2A199}"/>
               </a:ext>
             </a:extLst>
           </p:cNvPr>
@@ -3466,8 +3466,8 @@
         </p:nvSpPr>
         <p:spPr>
           <a:xfrm>
-            <a:off x="19223" y="1761026"/>
-            <a:ext cx="2590496" cy="200055"/>
+            <a:off x="2136756" y="10413"/>
+            <a:ext cx="577844" cy="184666"/>
           </a:xfrm>
           <a:prstGeom prst="rect">
             <a:avLst/>
@@ -3481,22 +3481,166 @@
           <a:lstStyle/>
           <a:p>
             <a:r>
+              <a:rPr lang="en-CN" sz="600" dirty="0">
+                <a:latin typeface="Arial" panose="020B0604020202020204" pitchFamily="34" charset="0"/>
+                <a:ea typeface="JetBrains Mono" panose="02000009000000000000" pitchFamily="49" charset="0"/>
+                <a:cs typeface="Arial" panose="020B0604020202020204" pitchFamily="34" charset="0"/>
+              </a:rPr>
+              <a:t>ChatGPT</a:t>
+            </a:r>
+          </a:p>
+        </p:txBody>
+      </p:sp>
+      <p:pic>
+        <p:nvPicPr>
+          <p:cNvPr id="17" name="Graphic 16">
+            <a:extLst>
+              <a:ext uri="{FF2B5EF4-FFF2-40B4-BE49-F238E27FC236}">
+                <a16:creationId xmlns:a16="http://schemas.microsoft.com/office/drawing/2014/main" id="{D431A92F-3B27-827F-D2F0-517F7492E026}"/>
+              </a:ext>
+            </a:extLst>
+          </p:cNvPr>
+          <p:cNvPicPr>
+            <a:picLocks noChangeAspect="1"/>
+          </p:cNvPicPr>
+          <p:nvPr/>
+        </p:nvPicPr>
+        <p:blipFill>
+          <a:blip r:embed="rId3">
+            <a:extLst>
+              <a:ext uri="{96DAC541-7B7A-43D3-8B79-37D633B846F1}">
+                <asvg:svgBlip xmlns:asvg="http://schemas.microsoft.com/office/drawing/2016/SVG/main" r:embed="rId4"/>
+              </a:ext>
+            </a:extLst>
+          </a:blip>
+          <a:stretch>
+            <a:fillRect/>
+          </a:stretch>
+        </p:blipFill>
+        <p:spPr>
+          <a:xfrm>
+            <a:off x="2060111" y="30746"/>
+            <a:ext cx="144000" cy="144000"/>
+          </a:xfrm>
+          <a:prstGeom prst="rect">
+            <a:avLst/>
+          </a:prstGeom>
+        </p:spPr>
+      </p:pic>
+      <p:pic>
+        <p:nvPicPr>
+          <p:cNvPr id="123" name="Picture 122">
+            <a:extLst>
+              <a:ext uri="{FF2B5EF4-FFF2-40B4-BE49-F238E27FC236}">
+                <a16:creationId xmlns:a16="http://schemas.microsoft.com/office/drawing/2014/main" id="{2E7FCA1A-3086-7A49-D69C-FD7AC40FE3C2}"/>
+              </a:ext>
+            </a:extLst>
+          </p:cNvPr>
+          <p:cNvPicPr>
+            <a:picLocks noChangeAspect="1"/>
+          </p:cNvPicPr>
+          <p:nvPr/>
+        </p:nvPicPr>
+        <p:blipFill>
+          <a:blip r:embed="rId5"/>
+          <a:stretch>
+            <a:fillRect/>
+          </a:stretch>
+        </p:blipFill>
+        <p:spPr>
+          <a:xfrm>
+            <a:off x="2728967" y="30746"/>
+            <a:ext cx="142059" cy="144000"/>
+          </a:xfrm>
+          <a:prstGeom prst="rect">
+            <a:avLst/>
+          </a:prstGeom>
+        </p:spPr>
+      </p:pic>
+      <p:sp>
+        <p:nvSpPr>
+          <p:cNvPr id="125" name="TextBox 124">
+            <a:extLst>
+              <a:ext uri="{FF2B5EF4-FFF2-40B4-BE49-F238E27FC236}">
+                <a16:creationId xmlns:a16="http://schemas.microsoft.com/office/drawing/2014/main" id="{E67B0E66-E160-7F16-614C-FC60339F445E}"/>
+              </a:ext>
+            </a:extLst>
+          </p:cNvPr>
+          <p:cNvSpPr txBox="1"/>
+          <p:nvPr/>
+        </p:nvSpPr>
+        <p:spPr>
+          <a:xfrm>
+            <a:off x="2812717" y="10413"/>
+            <a:ext cx="472775" cy="184666"/>
+          </a:xfrm>
+          <a:prstGeom prst="rect">
+            <a:avLst/>
+          </a:prstGeom>
+          <a:noFill/>
+        </p:spPr>
+        <p:txBody>
+          <a:bodyPr wrap="square" rtlCol="0">
+            <a:spAutoFit/>
+          </a:bodyPr>
+          <a:lstStyle/>
+          <a:p>
+            <a:r>
+              <a:rPr lang="en-CN" sz="600" dirty="0">
+                <a:latin typeface="Arial" panose="020B0604020202020204" pitchFamily="34" charset="0"/>
+                <a:ea typeface="JetBrains Mono" panose="02000009000000000000" pitchFamily="49" charset="0"/>
+                <a:cs typeface="Arial" panose="020B0604020202020204" pitchFamily="34" charset="0"/>
+              </a:rPr>
+              <a:t>GPT-4</a:t>
+            </a:r>
+          </a:p>
+        </p:txBody>
+      </p:sp>
+      <p:sp>
+        <p:nvSpPr>
+          <p:cNvPr id="126" name="TextBox 125">
+            <a:extLst>
+              <a:ext uri="{FF2B5EF4-FFF2-40B4-BE49-F238E27FC236}">
+                <a16:creationId xmlns:a16="http://schemas.microsoft.com/office/drawing/2014/main" id="{E1CD5ED1-74D0-63AB-75DB-EDE42DDCDA27}"/>
+              </a:ext>
+            </a:extLst>
+          </p:cNvPr>
+          <p:cNvSpPr txBox="1"/>
+          <p:nvPr/>
+        </p:nvSpPr>
+        <p:spPr>
+          <a:xfrm>
+            <a:off x="6828" y="256012"/>
+            <a:ext cx="2453677" cy="200055"/>
+          </a:xfrm>
+          <a:prstGeom prst="rect">
+            <a:avLst/>
+          </a:prstGeom>
+          <a:noFill/>
+        </p:spPr>
+        <p:txBody>
+          <a:bodyPr wrap="square" rtlCol="0">
+            <a:spAutoFit/>
+          </a:bodyPr>
+          <a:lstStyle/>
+          <a:p>
+            <a:r>
               <a:rPr lang="en-CN" sz="700" dirty="0">
                 <a:latin typeface="Arial" panose="020B0604020202020204" pitchFamily="34" charset="0"/>
                 <a:ea typeface="JetBrains Mono" panose="02000009000000000000" pitchFamily="49" charset="0"/>
                 <a:cs typeface="Arial" panose="020B0604020202020204" pitchFamily="34" charset="0"/>
               </a:rPr>
-              <a:t>(c) Text Classification with BERT Model</a:t>
+              <a:t>(a) Knowledge Distillation of Large Language Models</a:t>
             </a:r>
           </a:p>
         </p:txBody>
       </p:sp>
       <p:cxnSp>
         <p:nvCxnSpPr>
-          <p:cNvPr id="64" name="Straight Arrow Connector 63">
+          <p:cNvPr id="20" name="Straight Arrow Connector 19">
             <a:extLst>
               <a:ext uri="{FF2B5EF4-FFF2-40B4-BE49-F238E27FC236}">
-                <a16:creationId xmlns:a16="http://schemas.microsoft.com/office/drawing/2014/main" id="{1A95E048-D7D5-6FEE-04DF-33C9EDA90FED}"/>
+                <a16:creationId xmlns:a16="http://schemas.microsoft.com/office/drawing/2014/main" id="{D117FCD0-7F4C-5907-F77B-9A0675AD7EE2}"/>
               </a:ext>
             </a:extLst>
           </p:cNvPr>
@@ -3506,9 +3650,9 @@
           <p:nvPr/>
         </p:nvCxnSpPr>
         <p:spPr>
-          <a:xfrm flipV="1">
-            <a:off x="636329" y="2219197"/>
-            <a:ext cx="187526" cy="2"/>
+          <a:xfrm>
+            <a:off x="413675" y="625562"/>
+            <a:ext cx="333161" cy="0"/>
           </a:xfrm>
           <a:prstGeom prst="straightConnector1">
             <a:avLst/>
@@ -3537,23 +3681,22 @@
       </p:cxnSp>
       <p:cxnSp>
         <p:nvCxnSpPr>
-          <p:cNvPr id="68" name="Straight Arrow Connector 67">
+          <p:cNvPr id="27" name="Straight Arrow Connector 26">
             <a:extLst>
               <a:ext uri="{FF2B5EF4-FFF2-40B4-BE49-F238E27FC236}">
-                <a16:creationId xmlns:a16="http://schemas.microsoft.com/office/drawing/2014/main" id="{B0B75AE1-1F8E-826F-DDC8-B95B43912744}"/>
+                <a16:creationId xmlns:a16="http://schemas.microsoft.com/office/drawing/2014/main" id="{E5CA9B38-90FF-5DB6-A1C4-F039D02F6F24}"/>
               </a:ext>
             </a:extLst>
           </p:cNvPr>
           <p:cNvCxnSpPr>
             <a:cxnSpLocks/>
-            <a:endCxn id="95" idx="1"/>
           </p:cNvCxnSpPr>
           <p:nvPr/>
         </p:nvCxnSpPr>
         <p:spPr>
           <a:xfrm>
-            <a:off x="1255856" y="2218806"/>
-            <a:ext cx="211636" cy="397"/>
+            <a:off x="926836" y="625562"/>
+            <a:ext cx="378207" cy="0"/>
           </a:xfrm>
           <a:prstGeom prst="straightConnector1">
             <a:avLst/>
@@ -3580,2356 +3723,12 @@
           </a:fontRef>
         </p:style>
       </p:cxnSp>
-      <p:grpSp>
-        <p:nvGrpSpPr>
-          <p:cNvPr id="85" name="Group 84">
+      <p:pic>
+        <p:nvPicPr>
+          <p:cNvPr id="4" name="Picture 3">
             <a:extLst>
               <a:ext uri="{FF2B5EF4-FFF2-40B4-BE49-F238E27FC236}">
-                <a16:creationId xmlns:a16="http://schemas.microsoft.com/office/drawing/2014/main" id="{9C332104-86C1-9952-34FA-63229A391D45}"/>
-              </a:ext>
-            </a:extLst>
-          </p:cNvPr>
-          <p:cNvGrpSpPr/>
-          <p:nvPr/>
-        </p:nvGrpSpPr>
-        <p:grpSpPr>
-          <a:xfrm>
-            <a:off x="23357" y="1942076"/>
-            <a:ext cx="612977" cy="554255"/>
-            <a:chOff x="22148" y="1171749"/>
-            <a:chExt cx="612977" cy="554255"/>
-          </a:xfrm>
-        </p:grpSpPr>
-        <p:sp>
-          <p:nvSpPr>
-            <p:cNvPr id="49" name="Rectangle 48">
-              <a:extLst>
-                <a:ext uri="{FF2B5EF4-FFF2-40B4-BE49-F238E27FC236}">
-                  <a16:creationId xmlns:a16="http://schemas.microsoft.com/office/drawing/2014/main" id="{90115DCC-B211-A6B5-B86A-9763E597174F}"/>
-                </a:ext>
-              </a:extLst>
-            </p:cNvPr>
-            <p:cNvSpPr/>
-            <p:nvPr/>
-          </p:nvSpPr>
-          <p:spPr>
-            <a:xfrm>
-              <a:off x="22148" y="1171749"/>
-              <a:ext cx="612977" cy="554255"/>
-            </a:xfrm>
-            <a:prstGeom prst="rect">
-              <a:avLst/>
-            </a:prstGeom>
-            <a:noFill/>
-            <a:ln w="6350">
-              <a:prstDash val="dash"/>
-            </a:ln>
-          </p:spPr>
-          <p:style>
-            <a:lnRef idx="2">
-              <a:schemeClr val="accent1">
-                <a:shade val="15000"/>
-              </a:schemeClr>
-            </a:lnRef>
-            <a:fillRef idx="1">
-              <a:schemeClr val="accent1"/>
-            </a:fillRef>
-            <a:effectRef idx="0">
-              <a:schemeClr val="accent1"/>
-            </a:effectRef>
-            <a:fontRef idx="minor">
-              <a:schemeClr val="lt1"/>
-            </a:fontRef>
-          </p:style>
-          <p:txBody>
-            <a:bodyPr rtlCol="0" anchor="ctr"/>
-            <a:lstStyle/>
-            <a:p>
-              <a:pPr algn="ctr"/>
-              <a:endParaRPr lang="en-CN"/>
-            </a:p>
-          </p:txBody>
-        </p:sp>
-        <p:grpSp>
-          <p:nvGrpSpPr>
-            <p:cNvPr id="84" name="Group 83">
-              <a:extLst>
-                <a:ext uri="{FF2B5EF4-FFF2-40B4-BE49-F238E27FC236}">
-                  <a16:creationId xmlns:a16="http://schemas.microsoft.com/office/drawing/2014/main" id="{4DFDCA4B-545C-A3C0-6C6D-EE621A9583D0}"/>
-                </a:ext>
-              </a:extLst>
-            </p:cNvPr>
-            <p:cNvGrpSpPr/>
-            <p:nvPr/>
-          </p:nvGrpSpPr>
-          <p:grpSpPr>
-            <a:xfrm>
-              <a:off x="99558" y="1221564"/>
-              <a:ext cx="458156" cy="454624"/>
-              <a:chOff x="116835" y="1245428"/>
-              <a:chExt cx="458156" cy="454624"/>
-            </a:xfrm>
-          </p:grpSpPr>
-          <p:pic>
-            <p:nvPicPr>
-              <p:cNvPr id="80" name="Picture 79">
-                <a:extLst>
-                  <a:ext uri="{FF2B5EF4-FFF2-40B4-BE49-F238E27FC236}">
-                    <a16:creationId xmlns:a16="http://schemas.microsoft.com/office/drawing/2014/main" id="{F79A0C4E-56EA-FF1E-FE37-216088BCED55}"/>
-                  </a:ext>
-                </a:extLst>
-              </p:cNvPr>
-              <p:cNvPicPr>
-                <a:picLocks noChangeAspect="1"/>
-              </p:cNvPicPr>
-              <p:nvPr/>
-            </p:nvPicPr>
-            <p:blipFill>
-              <a:blip r:embed="rId3"/>
-              <a:stretch>
-                <a:fillRect/>
-              </a:stretch>
-            </p:blipFill>
-            <p:spPr>
-              <a:xfrm>
-                <a:off x="116835" y="1245428"/>
-                <a:ext cx="180000" cy="180000"/>
-              </a:xfrm>
-              <a:prstGeom prst="rect">
-                <a:avLst/>
-              </a:prstGeom>
-            </p:spPr>
-          </p:pic>
-          <p:pic>
-            <p:nvPicPr>
-              <p:cNvPr id="81" name="Picture 80">
-                <a:extLst>
-                  <a:ext uri="{FF2B5EF4-FFF2-40B4-BE49-F238E27FC236}">
-                    <a16:creationId xmlns:a16="http://schemas.microsoft.com/office/drawing/2014/main" id="{DCA5788D-C28A-0482-947E-E5A0A3FB3226}"/>
-                  </a:ext>
-                </a:extLst>
-              </p:cNvPr>
-              <p:cNvPicPr>
-                <a:picLocks noChangeAspect="1"/>
-              </p:cNvPicPr>
-              <p:nvPr/>
-            </p:nvPicPr>
-            <p:blipFill>
-              <a:blip r:embed="rId3"/>
-              <a:stretch>
-                <a:fillRect/>
-              </a:stretch>
-            </p:blipFill>
-            <p:spPr>
-              <a:xfrm>
-                <a:off x="394991" y="1245428"/>
-                <a:ext cx="180000" cy="180000"/>
-              </a:xfrm>
-              <a:prstGeom prst="rect">
-                <a:avLst/>
-              </a:prstGeom>
-            </p:spPr>
-          </p:pic>
-          <p:pic>
-            <p:nvPicPr>
-              <p:cNvPr id="82" name="Picture 81">
-                <a:extLst>
-                  <a:ext uri="{FF2B5EF4-FFF2-40B4-BE49-F238E27FC236}">
-                    <a16:creationId xmlns:a16="http://schemas.microsoft.com/office/drawing/2014/main" id="{84DA8E98-811B-4532-24FA-F12D07259B8A}"/>
-                  </a:ext>
-                </a:extLst>
-              </p:cNvPr>
-              <p:cNvPicPr>
-                <a:picLocks noChangeAspect="1"/>
-              </p:cNvPicPr>
-              <p:nvPr/>
-            </p:nvPicPr>
-            <p:blipFill>
-              <a:blip r:embed="rId3"/>
-              <a:stretch>
-                <a:fillRect/>
-              </a:stretch>
-            </p:blipFill>
-            <p:spPr>
-              <a:xfrm>
-                <a:off x="116835" y="1520052"/>
-                <a:ext cx="180000" cy="180000"/>
-              </a:xfrm>
-              <a:prstGeom prst="rect">
-                <a:avLst/>
-              </a:prstGeom>
-            </p:spPr>
-          </p:pic>
-          <p:pic>
-            <p:nvPicPr>
-              <p:cNvPr id="83" name="Picture 82">
-                <a:extLst>
-                  <a:ext uri="{FF2B5EF4-FFF2-40B4-BE49-F238E27FC236}">
-                    <a16:creationId xmlns:a16="http://schemas.microsoft.com/office/drawing/2014/main" id="{4C69A494-C37B-AF9E-F751-3884242346F5}"/>
-                  </a:ext>
-                </a:extLst>
-              </p:cNvPr>
-              <p:cNvPicPr>
-                <a:picLocks noChangeAspect="1"/>
-              </p:cNvPicPr>
-              <p:nvPr/>
-            </p:nvPicPr>
-            <p:blipFill>
-              <a:blip r:embed="rId3"/>
-              <a:stretch>
-                <a:fillRect/>
-              </a:stretch>
-            </p:blipFill>
-            <p:spPr>
-              <a:xfrm>
-                <a:off x="394991" y="1520052"/>
-                <a:ext cx="180000" cy="180000"/>
-              </a:xfrm>
-              <a:prstGeom prst="rect">
-                <a:avLst/>
-              </a:prstGeom>
-            </p:spPr>
-          </p:pic>
-        </p:grpSp>
-      </p:grpSp>
-      <p:sp>
-        <p:nvSpPr>
-          <p:cNvPr id="93" name="TextBox 92">
-            <a:extLst>
-              <a:ext uri="{FF2B5EF4-FFF2-40B4-BE49-F238E27FC236}">
-                <a16:creationId xmlns:a16="http://schemas.microsoft.com/office/drawing/2014/main" id="{B99EB89D-37D8-89B1-E188-B9524E7F28C3}"/>
-              </a:ext>
-            </a:extLst>
-          </p:cNvPr>
-          <p:cNvSpPr txBox="1"/>
-          <p:nvPr/>
-        </p:nvSpPr>
-        <p:spPr>
-          <a:xfrm>
-            <a:off x="824635" y="2119176"/>
-            <a:ext cx="437702" cy="200055"/>
-          </a:xfrm>
-          <a:prstGeom prst="rect">
-            <a:avLst/>
-          </a:prstGeom>
-          <a:noFill/>
-        </p:spPr>
-        <p:txBody>
-          <a:bodyPr wrap="square" rtlCol="0">
-            <a:spAutoFit/>
-          </a:bodyPr>
-          <a:lstStyle/>
-          <a:p>
-            <a:pPr algn="ctr"/>
-            <a:r>
-              <a:rPr lang="en-CN" sz="700" dirty="0">
-                <a:latin typeface="Arial" panose="020B0604020202020204" pitchFamily="34" charset="0"/>
-                <a:ea typeface="JetBrains Mono" panose="02000009000000000000" pitchFamily="49" charset="0"/>
-                <a:cs typeface="Arial" panose="020B0604020202020204" pitchFamily="34" charset="0"/>
-              </a:rPr>
-              <a:t>BERT</a:t>
-            </a:r>
-          </a:p>
-        </p:txBody>
-      </p:sp>
-      <p:sp>
-        <p:nvSpPr>
-          <p:cNvPr id="92" name="Rectangle 91">
-            <a:extLst>
-              <a:ext uri="{FF2B5EF4-FFF2-40B4-BE49-F238E27FC236}">
-                <a16:creationId xmlns:a16="http://schemas.microsoft.com/office/drawing/2014/main" id="{AB65FF44-5E9C-28BE-B771-6D6DBC99D00B}"/>
-              </a:ext>
-            </a:extLst>
-          </p:cNvPr>
-          <p:cNvSpPr/>
-          <p:nvPr/>
-        </p:nvSpPr>
-        <p:spPr>
-          <a:xfrm>
-            <a:off x="827486" y="2003199"/>
-            <a:ext cx="432000" cy="432000"/>
-          </a:xfrm>
-          <a:prstGeom prst="rect">
-            <a:avLst/>
-          </a:prstGeom>
-          <a:noFill/>
-          <a:ln w="6350">
-            <a:solidFill>
-              <a:schemeClr val="tx1"/>
-            </a:solidFill>
-          </a:ln>
-        </p:spPr>
-        <p:style>
-          <a:lnRef idx="2">
-            <a:schemeClr val="accent1">
-              <a:shade val="15000"/>
-            </a:schemeClr>
-          </a:lnRef>
-          <a:fillRef idx="1">
-            <a:schemeClr val="accent1"/>
-          </a:fillRef>
-          <a:effectRef idx="0">
-            <a:schemeClr val="accent1"/>
-          </a:effectRef>
-          <a:fontRef idx="minor">
-            <a:schemeClr val="lt1"/>
-          </a:fontRef>
-        </p:style>
-        <p:txBody>
-          <a:bodyPr rtlCol="0" anchor="ctr"/>
-          <a:lstStyle/>
-          <a:p>
-            <a:pPr algn="ctr"/>
-            <a:endParaRPr lang="en-CN"/>
-          </a:p>
-        </p:txBody>
-      </p:sp>
-      <p:sp>
-        <p:nvSpPr>
-          <p:cNvPr id="94" name="TextBox 93">
-            <a:extLst>
-              <a:ext uri="{FF2B5EF4-FFF2-40B4-BE49-F238E27FC236}">
-                <a16:creationId xmlns:a16="http://schemas.microsoft.com/office/drawing/2014/main" id="{87A4C32E-A68C-7517-1411-38A7D5328AA0}"/>
-              </a:ext>
-            </a:extLst>
-          </p:cNvPr>
-          <p:cNvSpPr txBox="1"/>
-          <p:nvPr/>
-        </p:nvSpPr>
-        <p:spPr>
-          <a:xfrm>
-            <a:off x="1401393" y="2119176"/>
-            <a:ext cx="564198" cy="200055"/>
-          </a:xfrm>
-          <a:prstGeom prst="rect">
-            <a:avLst/>
-          </a:prstGeom>
-          <a:noFill/>
-        </p:spPr>
-        <p:txBody>
-          <a:bodyPr wrap="square" rtlCol="0">
-            <a:spAutoFit/>
-          </a:bodyPr>
-          <a:lstStyle/>
-          <a:p>
-            <a:pPr algn="ctr"/>
-            <a:r>
-              <a:rPr lang="en-CN" sz="700" dirty="0">
-                <a:latin typeface="Arial" panose="020B0604020202020204" pitchFamily="34" charset="0"/>
-                <a:ea typeface="JetBrains Mono" panose="02000009000000000000" pitchFamily="49" charset="0"/>
-                <a:cs typeface="Arial" panose="020B0604020202020204" pitchFamily="34" charset="0"/>
-              </a:rPr>
-              <a:t>Classifier</a:t>
-            </a:r>
-          </a:p>
-        </p:txBody>
-      </p:sp>
-      <p:grpSp>
-        <p:nvGrpSpPr>
-          <p:cNvPr id="105" name="Group 104">
-            <a:extLst>
-              <a:ext uri="{FF2B5EF4-FFF2-40B4-BE49-F238E27FC236}">
-                <a16:creationId xmlns:a16="http://schemas.microsoft.com/office/drawing/2014/main" id="{A4B2E32B-1E82-0E92-6F56-BBA6F37F0FB9}"/>
-              </a:ext>
-            </a:extLst>
-          </p:cNvPr>
-          <p:cNvGrpSpPr/>
-          <p:nvPr/>
-        </p:nvGrpSpPr>
-        <p:grpSpPr>
-          <a:xfrm>
-            <a:off x="2365128" y="1967199"/>
-            <a:ext cx="837096" cy="504000"/>
-            <a:chOff x="2397841" y="1196077"/>
-            <a:chExt cx="837096" cy="504000"/>
-          </a:xfrm>
-        </p:grpSpPr>
-        <p:sp>
-          <p:nvSpPr>
-            <p:cNvPr id="96" name="Rectangle 95">
-              <a:extLst>
-                <a:ext uri="{FF2B5EF4-FFF2-40B4-BE49-F238E27FC236}">
-                  <a16:creationId xmlns:a16="http://schemas.microsoft.com/office/drawing/2014/main" id="{99887F3D-723C-B34D-0C50-FB9E8AC7B6AF}"/>
-                </a:ext>
-              </a:extLst>
-            </p:cNvPr>
-            <p:cNvSpPr/>
-            <p:nvPr/>
-          </p:nvSpPr>
-          <p:spPr>
-            <a:xfrm>
-              <a:off x="2550937" y="1196077"/>
-              <a:ext cx="684000" cy="504000"/>
-            </a:xfrm>
-            <a:prstGeom prst="rect">
-              <a:avLst/>
-            </a:prstGeom>
-            <a:noFill/>
-            <a:ln w="6350">
-              <a:solidFill>
-                <a:schemeClr val="tx1"/>
-              </a:solidFill>
-            </a:ln>
-          </p:spPr>
-          <p:style>
-            <a:lnRef idx="2">
-              <a:schemeClr val="accent1">
-                <a:shade val="15000"/>
-              </a:schemeClr>
-            </a:lnRef>
-            <a:fillRef idx="1">
-              <a:schemeClr val="accent1"/>
-            </a:fillRef>
-            <a:effectRef idx="0">
-              <a:schemeClr val="accent1"/>
-            </a:effectRef>
-            <a:fontRef idx="minor">
-              <a:schemeClr val="lt1"/>
-            </a:fontRef>
-          </p:style>
-          <p:txBody>
-            <a:bodyPr rtlCol="0" anchor="ctr"/>
-            <a:lstStyle/>
-            <a:p>
-              <a:pPr algn="ctr"/>
-              <a:endParaRPr lang="en-CN"/>
-            </a:p>
-          </p:txBody>
-        </p:sp>
-        <p:grpSp>
-          <p:nvGrpSpPr>
-            <p:cNvPr id="104" name="Group 103">
-              <a:extLst>
-                <a:ext uri="{FF2B5EF4-FFF2-40B4-BE49-F238E27FC236}">
-                  <a16:creationId xmlns:a16="http://schemas.microsoft.com/office/drawing/2014/main" id="{E10830CC-9886-0B3E-1C70-CC001FF8D11B}"/>
-                </a:ext>
-              </a:extLst>
-            </p:cNvPr>
-            <p:cNvGrpSpPr/>
-            <p:nvPr/>
-          </p:nvGrpSpPr>
-          <p:grpSpPr>
-            <a:xfrm>
-              <a:off x="2397841" y="1261096"/>
-              <a:ext cx="793801" cy="373963"/>
-              <a:chOff x="2397841" y="1289550"/>
-              <a:chExt cx="793801" cy="373963"/>
-            </a:xfrm>
-          </p:grpSpPr>
-          <p:cxnSp>
-            <p:nvCxnSpPr>
-              <p:cNvPr id="100" name="Straight Connector 99">
-                <a:extLst>
-                  <a:ext uri="{FF2B5EF4-FFF2-40B4-BE49-F238E27FC236}">
-                    <a16:creationId xmlns:a16="http://schemas.microsoft.com/office/drawing/2014/main" id="{7D3F3DB5-3399-EF0D-9320-235F0797804B}"/>
-                  </a:ext>
-                </a:extLst>
-              </p:cNvPr>
-              <p:cNvCxnSpPr>
-                <a:cxnSpLocks/>
-              </p:cNvCxnSpPr>
-              <p:nvPr/>
-            </p:nvCxnSpPr>
-            <p:spPr>
-              <a:xfrm flipH="1" flipV="1">
-                <a:off x="2896766" y="1289550"/>
-                <a:ext cx="1" cy="360000"/>
-              </a:xfrm>
-              <a:prstGeom prst="line">
-                <a:avLst/>
-              </a:prstGeom>
-            </p:spPr>
-            <p:style>
-              <a:lnRef idx="1">
-                <a:schemeClr val="accent1"/>
-              </a:lnRef>
-              <a:fillRef idx="0">
-                <a:schemeClr val="accent1"/>
-              </a:fillRef>
-              <a:effectRef idx="0">
-                <a:schemeClr val="accent1"/>
-              </a:effectRef>
-              <a:fontRef idx="minor">
-                <a:schemeClr val="tx1"/>
-              </a:fontRef>
-            </p:style>
-          </p:cxnSp>
-          <p:sp>
-            <p:nvSpPr>
-              <p:cNvPr id="97" name="TextBox 96">
-                <a:extLst>
-                  <a:ext uri="{FF2B5EF4-FFF2-40B4-BE49-F238E27FC236}">
-                    <a16:creationId xmlns:a16="http://schemas.microsoft.com/office/drawing/2014/main" id="{14A2EE2C-FABD-146D-6FA2-7E20EAA632A5}"/>
-                  </a:ext>
-                </a:extLst>
-              </p:cNvPr>
-              <p:cNvSpPr txBox="1"/>
-              <p:nvPr/>
-            </p:nvSpPr>
-            <p:spPr>
-              <a:xfrm>
-                <a:off x="2397841" y="1292780"/>
-                <a:ext cx="539471" cy="200055"/>
-              </a:xfrm>
-              <a:prstGeom prst="rect">
-                <a:avLst/>
-              </a:prstGeom>
-              <a:noFill/>
-            </p:spPr>
-            <p:txBody>
-              <a:bodyPr wrap="square" rtlCol="0">
-                <a:spAutoFit/>
-              </a:bodyPr>
-              <a:lstStyle/>
-              <a:p>
-                <a:pPr algn="r"/>
-                <a:r>
-                  <a:rPr lang="en-CN" sz="700" dirty="0">
-                    <a:latin typeface="Arial" panose="020B0604020202020204" pitchFamily="34" charset="0"/>
-                    <a:ea typeface="JetBrains Mono" panose="02000009000000000000" pitchFamily="49" charset="0"/>
-                    <a:cs typeface="Arial" panose="020B0604020202020204" pitchFamily="34" charset="0"/>
-                  </a:rPr>
-                  <a:t>NSFW</a:t>
-                </a:r>
-              </a:p>
-            </p:txBody>
-          </p:sp>
-          <p:sp>
-            <p:nvSpPr>
-              <p:cNvPr id="98" name="TextBox 97">
-                <a:extLst>
-                  <a:ext uri="{FF2B5EF4-FFF2-40B4-BE49-F238E27FC236}">
-                    <a16:creationId xmlns:a16="http://schemas.microsoft.com/office/drawing/2014/main" id="{DA7A23C5-FA8C-9530-6CEC-5A7DEF1531BB}"/>
-                  </a:ext>
-                </a:extLst>
-              </p:cNvPr>
-              <p:cNvSpPr txBox="1"/>
-              <p:nvPr/>
-            </p:nvSpPr>
-            <p:spPr>
-              <a:xfrm>
-                <a:off x="2397841" y="1463458"/>
-                <a:ext cx="539471" cy="200055"/>
-              </a:xfrm>
-              <a:prstGeom prst="rect">
-                <a:avLst/>
-              </a:prstGeom>
-              <a:noFill/>
-            </p:spPr>
-            <p:txBody>
-              <a:bodyPr wrap="square" rtlCol="0">
-                <a:spAutoFit/>
-              </a:bodyPr>
-              <a:lstStyle/>
-              <a:p>
-                <a:pPr algn="r"/>
-                <a:r>
-                  <a:rPr lang="en-CN" sz="700" dirty="0">
-                    <a:latin typeface="Arial" panose="020B0604020202020204" pitchFamily="34" charset="0"/>
-                    <a:ea typeface="JetBrains Mono" panose="02000009000000000000" pitchFamily="49" charset="0"/>
-                    <a:cs typeface="Arial" panose="020B0604020202020204" pitchFamily="34" charset="0"/>
-                  </a:rPr>
-                  <a:t>SFW</a:t>
-                </a:r>
-              </a:p>
-            </p:txBody>
-          </p:sp>
-          <p:sp>
-            <p:nvSpPr>
-              <p:cNvPr id="101" name="Rectangle 100">
-                <a:extLst>
-                  <a:ext uri="{FF2B5EF4-FFF2-40B4-BE49-F238E27FC236}">
-                    <a16:creationId xmlns:a16="http://schemas.microsoft.com/office/drawing/2014/main" id="{3F552216-32D4-E63A-0650-517021989FDD}"/>
-                  </a:ext>
-                </a:extLst>
-              </p:cNvPr>
-              <p:cNvSpPr/>
-              <p:nvPr/>
-            </p:nvSpPr>
-            <p:spPr>
-              <a:xfrm>
-                <a:off x="2903642" y="1369948"/>
-                <a:ext cx="288000" cy="45719"/>
-              </a:xfrm>
-              <a:prstGeom prst="rect">
-                <a:avLst/>
-              </a:prstGeom>
-              <a:solidFill>
-                <a:srgbClr val="EE7F3E"/>
-              </a:solidFill>
-              <a:ln>
-                <a:solidFill>
-                  <a:srgbClr val="EE7F3E"/>
-                </a:solidFill>
-              </a:ln>
-            </p:spPr>
-            <p:style>
-              <a:lnRef idx="2">
-                <a:schemeClr val="accent1">
-                  <a:shade val="15000"/>
-                </a:schemeClr>
-              </a:lnRef>
-              <a:fillRef idx="1">
-                <a:schemeClr val="accent1"/>
-              </a:fillRef>
-              <a:effectRef idx="0">
-                <a:schemeClr val="accent1"/>
-              </a:effectRef>
-              <a:fontRef idx="minor">
-                <a:schemeClr val="lt1"/>
-              </a:fontRef>
-            </p:style>
-            <p:txBody>
-              <a:bodyPr rtlCol="0" anchor="ctr"/>
-              <a:lstStyle/>
-              <a:p>
-                <a:pPr algn="ctr"/>
-                <a:endParaRPr lang="en-CN"/>
-              </a:p>
-            </p:txBody>
-          </p:sp>
-          <p:sp>
-            <p:nvSpPr>
-              <p:cNvPr id="102" name="Rectangle 101">
-                <a:extLst>
-                  <a:ext uri="{FF2B5EF4-FFF2-40B4-BE49-F238E27FC236}">
-                    <a16:creationId xmlns:a16="http://schemas.microsoft.com/office/drawing/2014/main" id="{5CF74733-1715-E6A3-3E01-5BE3D62FA520}"/>
-                  </a:ext>
-                </a:extLst>
-              </p:cNvPr>
-              <p:cNvSpPr/>
-              <p:nvPr/>
-            </p:nvSpPr>
-            <p:spPr>
-              <a:xfrm>
-                <a:off x="2903642" y="1540626"/>
-                <a:ext cx="144000" cy="45719"/>
-              </a:xfrm>
-              <a:prstGeom prst="rect">
-                <a:avLst/>
-              </a:prstGeom>
-              <a:solidFill>
-                <a:srgbClr val="00B050"/>
-              </a:solidFill>
-              <a:ln>
-                <a:solidFill>
-                  <a:srgbClr val="00B050"/>
-                </a:solidFill>
-              </a:ln>
-            </p:spPr>
-            <p:style>
-              <a:lnRef idx="2">
-                <a:schemeClr val="accent1">
-                  <a:shade val="15000"/>
-                </a:schemeClr>
-              </a:lnRef>
-              <a:fillRef idx="1">
-                <a:schemeClr val="accent1"/>
-              </a:fillRef>
-              <a:effectRef idx="0">
-                <a:schemeClr val="accent1"/>
-              </a:effectRef>
-              <a:fontRef idx="minor">
-                <a:schemeClr val="lt1"/>
-              </a:fontRef>
-            </p:style>
-            <p:txBody>
-              <a:bodyPr rtlCol="0" anchor="ctr"/>
-              <a:lstStyle/>
-              <a:p>
-                <a:pPr algn="ctr"/>
-                <a:endParaRPr lang="en-CN"/>
-              </a:p>
-            </p:txBody>
-          </p:sp>
-        </p:grpSp>
-      </p:grpSp>
-      <p:sp>
-        <p:nvSpPr>
-          <p:cNvPr id="95" name="Rectangle 94">
-            <a:extLst>
-              <a:ext uri="{FF2B5EF4-FFF2-40B4-BE49-F238E27FC236}">
-                <a16:creationId xmlns:a16="http://schemas.microsoft.com/office/drawing/2014/main" id="{59BBB57A-4050-AD1F-F048-8E66BD0BB585}"/>
-              </a:ext>
-            </a:extLst>
-          </p:cNvPr>
-          <p:cNvSpPr/>
-          <p:nvPr/>
-        </p:nvSpPr>
-        <p:spPr>
-          <a:xfrm>
-            <a:off x="1467492" y="2003199"/>
-            <a:ext cx="432000" cy="432000"/>
-          </a:xfrm>
-          <a:prstGeom prst="rect">
-            <a:avLst/>
-          </a:prstGeom>
-          <a:noFill/>
-          <a:ln w="6350">
-            <a:solidFill>
-              <a:schemeClr val="tx1"/>
-            </a:solidFill>
-          </a:ln>
-        </p:spPr>
-        <p:style>
-          <a:lnRef idx="2">
-            <a:schemeClr val="accent1">
-              <a:shade val="15000"/>
-            </a:schemeClr>
-          </a:lnRef>
-          <a:fillRef idx="1">
-            <a:schemeClr val="accent1"/>
-          </a:fillRef>
-          <a:effectRef idx="0">
-            <a:schemeClr val="accent1"/>
-          </a:effectRef>
-          <a:fontRef idx="minor">
-            <a:schemeClr val="lt1"/>
-          </a:fontRef>
-        </p:style>
-        <p:txBody>
-          <a:bodyPr rtlCol="0" anchor="ctr"/>
-          <a:lstStyle/>
-          <a:p>
-            <a:pPr algn="ctr"/>
-            <a:endParaRPr lang="en-CN"/>
-          </a:p>
-        </p:txBody>
-      </p:sp>
-      <p:cxnSp>
-        <p:nvCxnSpPr>
-          <p:cNvPr id="110" name="Straight Arrow Connector 109">
-            <a:extLst>
-              <a:ext uri="{FF2B5EF4-FFF2-40B4-BE49-F238E27FC236}">
-                <a16:creationId xmlns:a16="http://schemas.microsoft.com/office/drawing/2014/main" id="{D7B7FDDC-0E81-006C-4289-ECC1A0A7B940}"/>
-              </a:ext>
-            </a:extLst>
-          </p:cNvPr>
-          <p:cNvCxnSpPr>
-            <a:cxnSpLocks/>
-            <a:stCxn id="99" idx="3"/>
-          </p:cNvCxnSpPr>
-          <p:nvPr/>
-        </p:nvCxnSpPr>
-        <p:spPr>
-          <a:xfrm flipV="1">
-            <a:off x="2301468" y="2219202"/>
-            <a:ext cx="212801" cy="1"/>
-          </a:xfrm>
-          <a:prstGeom prst="straightConnector1">
-            <a:avLst/>
-          </a:prstGeom>
-          <a:ln w="6350">
-            <a:solidFill>
-              <a:schemeClr val="tx1"/>
-            </a:solidFill>
-            <a:tailEnd type="triangle"/>
-          </a:ln>
-        </p:spPr>
-        <p:style>
-          <a:lnRef idx="1">
-            <a:schemeClr val="accent1"/>
-          </a:lnRef>
-          <a:fillRef idx="0">
-            <a:schemeClr val="accent1"/>
-          </a:fillRef>
-          <a:effectRef idx="0">
-            <a:schemeClr val="accent1"/>
-          </a:effectRef>
-          <a:fontRef idx="minor">
-            <a:schemeClr val="tx1"/>
-          </a:fontRef>
-        </p:style>
-      </p:cxnSp>
-      <p:grpSp>
-        <p:nvGrpSpPr>
-          <p:cNvPr id="135" name="Group 134">
-            <a:extLst>
-              <a:ext uri="{FF2B5EF4-FFF2-40B4-BE49-F238E27FC236}">
-                <a16:creationId xmlns:a16="http://schemas.microsoft.com/office/drawing/2014/main" id="{AB996B68-7BDE-1250-2B75-1B5881AA3EBD}"/>
-              </a:ext>
-            </a:extLst>
-          </p:cNvPr>
-          <p:cNvGrpSpPr/>
-          <p:nvPr/>
-        </p:nvGrpSpPr>
-        <p:grpSpPr>
-          <a:xfrm>
-            <a:off x="119733" y="-5990"/>
-            <a:ext cx="3092224" cy="200055"/>
-            <a:chOff x="129055" y="11225"/>
-            <a:chExt cx="3092224" cy="200055"/>
-          </a:xfrm>
-        </p:grpSpPr>
-        <p:sp>
-          <p:nvSpPr>
-            <p:cNvPr id="14" name="TextBox 13">
-              <a:extLst>
-                <a:ext uri="{FF2B5EF4-FFF2-40B4-BE49-F238E27FC236}">
-                  <a16:creationId xmlns:a16="http://schemas.microsoft.com/office/drawing/2014/main" id="{7B2EE884-0B2F-C686-79AA-EE6EE5C2A199}"/>
-                </a:ext>
-              </a:extLst>
-            </p:cNvPr>
-            <p:cNvSpPr txBox="1"/>
-            <p:nvPr/>
-          </p:nvSpPr>
-          <p:spPr>
-            <a:xfrm>
-              <a:off x="738600" y="11225"/>
-              <a:ext cx="577844" cy="200055"/>
-            </a:xfrm>
-            <a:prstGeom prst="rect">
-              <a:avLst/>
-            </a:prstGeom>
-            <a:noFill/>
-          </p:spPr>
-          <p:txBody>
-            <a:bodyPr wrap="square" rtlCol="0">
-              <a:spAutoFit/>
-            </a:bodyPr>
-            <a:lstStyle/>
-            <a:p>
-              <a:r>
-                <a:rPr lang="en-CN" sz="700" dirty="0">
-                  <a:latin typeface="Arial" panose="020B0604020202020204" pitchFamily="34" charset="0"/>
-                  <a:ea typeface="JetBrains Mono" panose="02000009000000000000" pitchFamily="49" charset="0"/>
-                  <a:cs typeface="Arial" panose="020B0604020202020204" pitchFamily="34" charset="0"/>
-                </a:rPr>
-                <a:t>ChatGPT</a:t>
-              </a:r>
-            </a:p>
-          </p:txBody>
-        </p:sp>
-        <p:pic>
-          <p:nvPicPr>
-            <p:cNvPr id="17" name="Graphic 16">
-              <a:extLst>
-                <a:ext uri="{FF2B5EF4-FFF2-40B4-BE49-F238E27FC236}">
-                  <a16:creationId xmlns:a16="http://schemas.microsoft.com/office/drawing/2014/main" id="{D431A92F-3B27-827F-D2F0-517F7492E026}"/>
-                </a:ext>
-              </a:extLst>
-            </p:cNvPr>
-            <p:cNvPicPr>
-              <a:picLocks noChangeAspect="1"/>
-            </p:cNvPicPr>
-            <p:nvPr/>
-          </p:nvPicPr>
-          <p:blipFill>
-            <a:blip r:embed="rId4">
-              <a:extLst>
-                <a:ext uri="{96DAC541-7B7A-43D3-8B79-37D633B846F1}">
-                  <asvg:svgBlip xmlns:asvg="http://schemas.microsoft.com/office/drawing/2016/SVG/main" r:embed="rId5"/>
-                </a:ext>
-              </a:extLst>
-            </a:blip>
-            <a:stretch>
-              <a:fillRect/>
-            </a:stretch>
-          </p:blipFill>
-          <p:spPr>
-            <a:xfrm>
-              <a:off x="661955" y="39252"/>
-              <a:ext cx="144000" cy="144000"/>
-            </a:xfrm>
-            <a:prstGeom prst="rect">
-              <a:avLst/>
-            </a:prstGeom>
-          </p:spPr>
-        </p:pic>
-        <p:pic>
-          <p:nvPicPr>
-            <p:cNvPr id="42" name="Picture 41">
-              <a:extLst>
-                <a:ext uri="{FF2B5EF4-FFF2-40B4-BE49-F238E27FC236}">
-                  <a16:creationId xmlns:a16="http://schemas.microsoft.com/office/drawing/2014/main" id="{36795628-BA68-DB28-EF1F-FE116C5277CF}"/>
-                </a:ext>
-              </a:extLst>
-            </p:cNvPr>
-            <p:cNvPicPr>
-              <a:picLocks noChangeAspect="1"/>
-            </p:cNvPicPr>
-            <p:nvPr/>
-          </p:nvPicPr>
-          <p:blipFill>
-            <a:blip r:embed="rId6"/>
-            <a:stretch>
-              <a:fillRect/>
-            </a:stretch>
-          </p:blipFill>
-          <p:spPr>
-            <a:xfrm>
-              <a:off x="1300775" y="39252"/>
-              <a:ext cx="144000" cy="144000"/>
-            </a:xfrm>
-            <a:prstGeom prst="rect">
-              <a:avLst/>
-            </a:prstGeom>
-          </p:spPr>
-        </p:pic>
-        <p:pic>
-          <p:nvPicPr>
-            <p:cNvPr id="43" name="Picture 42">
-              <a:extLst>
-                <a:ext uri="{FF2B5EF4-FFF2-40B4-BE49-F238E27FC236}">
-                  <a16:creationId xmlns:a16="http://schemas.microsoft.com/office/drawing/2014/main" id="{8DB4B157-6839-46E0-66C7-0215840101B6}"/>
-                </a:ext>
-              </a:extLst>
-            </p:cNvPr>
-            <p:cNvPicPr>
-              <a:picLocks noChangeAspect="1"/>
-            </p:cNvPicPr>
-            <p:nvPr/>
-          </p:nvPicPr>
-          <p:blipFill>
-            <a:blip r:embed="rId3"/>
-            <a:stretch>
-              <a:fillRect/>
-            </a:stretch>
-          </p:blipFill>
-          <p:spPr>
-            <a:xfrm>
-              <a:off x="2207334" y="39252"/>
-              <a:ext cx="144000" cy="144000"/>
-            </a:xfrm>
-            <a:prstGeom prst="rect">
-              <a:avLst/>
-            </a:prstGeom>
-          </p:spPr>
-        </p:pic>
-        <p:sp>
-          <p:nvSpPr>
-            <p:cNvPr id="44" name="TextBox 43">
-              <a:extLst>
-                <a:ext uri="{FF2B5EF4-FFF2-40B4-BE49-F238E27FC236}">
-                  <a16:creationId xmlns:a16="http://schemas.microsoft.com/office/drawing/2014/main" id="{4CCB5489-9050-5904-297A-1F91C52E63AB}"/>
-                </a:ext>
-              </a:extLst>
-            </p:cNvPr>
-            <p:cNvSpPr txBox="1"/>
-            <p:nvPr/>
-          </p:nvSpPr>
-          <p:spPr>
-            <a:xfrm>
-              <a:off x="1367718" y="11225"/>
-              <a:ext cx="828668" cy="200055"/>
-            </a:xfrm>
-            <a:prstGeom prst="rect">
-              <a:avLst/>
-            </a:prstGeom>
-            <a:noFill/>
-          </p:spPr>
-          <p:txBody>
-            <a:bodyPr wrap="square" rtlCol="0">
-              <a:spAutoFit/>
-            </a:bodyPr>
-            <a:lstStyle/>
-            <a:p>
-              <a:r>
-                <a:rPr lang="en-CN" sz="700" dirty="0">
-                  <a:latin typeface="Arial" panose="020B0604020202020204" pitchFamily="34" charset="0"/>
-                  <a:ea typeface="JetBrains Mono" panose="02000009000000000000" pitchFamily="49" charset="0"/>
-                  <a:cs typeface="Arial" panose="020B0604020202020204" pitchFamily="34" charset="0"/>
-                </a:rPr>
-                <a:t>Unlabeled Data</a:t>
-              </a:r>
-            </a:p>
-          </p:txBody>
-        </p:sp>
-        <p:sp>
-          <p:nvSpPr>
-            <p:cNvPr id="45" name="TextBox 44">
-              <a:extLst>
-                <a:ext uri="{FF2B5EF4-FFF2-40B4-BE49-F238E27FC236}">
-                  <a16:creationId xmlns:a16="http://schemas.microsoft.com/office/drawing/2014/main" id="{FEF03D7C-4CED-ADF1-B22F-2CA95C7B7677}"/>
-                </a:ext>
-              </a:extLst>
-            </p:cNvPr>
-            <p:cNvSpPr txBox="1"/>
-            <p:nvPr/>
-          </p:nvSpPr>
-          <p:spPr>
-            <a:xfrm>
-              <a:off x="2275453" y="11225"/>
-              <a:ext cx="945826" cy="200055"/>
-            </a:xfrm>
-            <a:prstGeom prst="rect">
-              <a:avLst/>
-            </a:prstGeom>
-            <a:noFill/>
-          </p:spPr>
-          <p:txBody>
-            <a:bodyPr wrap="square" rtlCol="0">
-              <a:spAutoFit/>
-            </a:bodyPr>
-            <a:lstStyle/>
-            <a:p>
-              <a:r>
-                <a:rPr lang="en-CN" sz="700" dirty="0">
-                  <a:latin typeface="Arial" panose="020B0604020202020204" pitchFamily="34" charset="0"/>
-                  <a:ea typeface="JetBrains Mono" panose="02000009000000000000" pitchFamily="49" charset="0"/>
-                  <a:cs typeface="Arial" panose="020B0604020202020204" pitchFamily="34" charset="0"/>
-                </a:rPr>
-                <a:t>Pseudo-Label Data</a:t>
-              </a:r>
-            </a:p>
-          </p:txBody>
-        </p:sp>
-        <p:pic>
-          <p:nvPicPr>
-            <p:cNvPr id="123" name="Picture 122">
-              <a:extLst>
-                <a:ext uri="{FF2B5EF4-FFF2-40B4-BE49-F238E27FC236}">
-                  <a16:creationId xmlns:a16="http://schemas.microsoft.com/office/drawing/2014/main" id="{2E7FCA1A-3086-7A49-D69C-FD7AC40FE3C2}"/>
-                </a:ext>
-              </a:extLst>
-            </p:cNvPr>
-            <p:cNvPicPr>
-              <a:picLocks noChangeAspect="1"/>
-            </p:cNvPicPr>
-            <p:nvPr/>
-          </p:nvPicPr>
-          <p:blipFill>
-            <a:blip r:embed="rId7"/>
-            <a:stretch>
-              <a:fillRect/>
-            </a:stretch>
-          </p:blipFill>
-          <p:spPr>
-            <a:xfrm>
-              <a:off x="129055" y="39252"/>
-              <a:ext cx="142058" cy="144000"/>
-            </a:xfrm>
-            <a:prstGeom prst="rect">
-              <a:avLst/>
-            </a:prstGeom>
-          </p:spPr>
-        </p:pic>
-        <p:sp>
-          <p:nvSpPr>
-            <p:cNvPr id="125" name="TextBox 124">
-              <a:extLst>
-                <a:ext uri="{FF2B5EF4-FFF2-40B4-BE49-F238E27FC236}">
-                  <a16:creationId xmlns:a16="http://schemas.microsoft.com/office/drawing/2014/main" id="{E67B0E66-E160-7F16-614C-FC60339F445E}"/>
-                </a:ext>
-              </a:extLst>
-            </p:cNvPr>
-            <p:cNvSpPr txBox="1"/>
-            <p:nvPr/>
-          </p:nvSpPr>
-          <p:spPr>
-            <a:xfrm>
-              <a:off x="212805" y="11225"/>
-              <a:ext cx="472775" cy="200055"/>
-            </a:xfrm>
-            <a:prstGeom prst="rect">
-              <a:avLst/>
-            </a:prstGeom>
-            <a:noFill/>
-          </p:spPr>
-          <p:txBody>
-            <a:bodyPr wrap="square" rtlCol="0">
-              <a:spAutoFit/>
-            </a:bodyPr>
-            <a:lstStyle/>
-            <a:p>
-              <a:r>
-                <a:rPr lang="en-CN" sz="700" dirty="0">
-                  <a:latin typeface="Arial" panose="020B0604020202020204" pitchFamily="34" charset="0"/>
-                  <a:ea typeface="JetBrains Mono" panose="02000009000000000000" pitchFamily="49" charset="0"/>
-                  <a:cs typeface="Arial" panose="020B0604020202020204" pitchFamily="34" charset="0"/>
-                </a:rPr>
-                <a:t>GPT-4</a:t>
-              </a:r>
-            </a:p>
-          </p:txBody>
-        </p:sp>
-      </p:grpSp>
-      <p:sp>
-        <p:nvSpPr>
-          <p:cNvPr id="126" name="TextBox 125">
-            <a:extLst>
-              <a:ext uri="{FF2B5EF4-FFF2-40B4-BE49-F238E27FC236}">
-                <a16:creationId xmlns:a16="http://schemas.microsoft.com/office/drawing/2014/main" id="{E1CD5ED1-74D0-63AB-75DB-EDE42DDCDA27}"/>
-              </a:ext>
-            </a:extLst>
-          </p:cNvPr>
-          <p:cNvSpPr txBox="1"/>
-          <p:nvPr/>
-        </p:nvSpPr>
-        <p:spPr>
-          <a:xfrm>
-            <a:off x="19228" y="205853"/>
-            <a:ext cx="1838473" cy="200055"/>
-          </a:xfrm>
-          <a:prstGeom prst="rect">
-            <a:avLst/>
-          </a:prstGeom>
-          <a:noFill/>
-        </p:spPr>
-        <p:txBody>
-          <a:bodyPr wrap="square" rtlCol="0">
-            <a:spAutoFit/>
-          </a:bodyPr>
-          <a:lstStyle/>
-          <a:p>
-            <a:r>
-              <a:rPr lang="en-CN" sz="700" dirty="0">
-                <a:latin typeface="Arial" panose="020B0604020202020204" pitchFamily="34" charset="0"/>
-                <a:ea typeface="JetBrains Mono" panose="02000009000000000000" pitchFamily="49" charset="0"/>
-                <a:cs typeface="Arial" panose="020B0604020202020204" pitchFamily="34" charset="0"/>
-              </a:rPr>
-              <a:t>(a) Knowledge Distillation from ChatGPT</a:t>
-            </a:r>
-          </a:p>
-        </p:txBody>
-      </p:sp>
-      <p:grpSp>
-        <p:nvGrpSpPr>
-          <p:cNvPr id="3" name="Group 2">
-            <a:extLst>
-              <a:ext uri="{FF2B5EF4-FFF2-40B4-BE49-F238E27FC236}">
-                <a16:creationId xmlns:a16="http://schemas.microsoft.com/office/drawing/2014/main" id="{90E24B90-89BA-5C7E-CC1F-6E4AA487B473}"/>
-              </a:ext>
-            </a:extLst>
-          </p:cNvPr>
-          <p:cNvGrpSpPr/>
-          <p:nvPr/>
-        </p:nvGrpSpPr>
-        <p:grpSpPr>
-          <a:xfrm>
-            <a:off x="894686" y="374347"/>
-            <a:ext cx="1858797" cy="200055"/>
-            <a:chOff x="904003" y="793531"/>
-            <a:chExt cx="1858797" cy="200055"/>
-          </a:xfrm>
-        </p:grpSpPr>
-        <p:grpSp>
-          <p:nvGrpSpPr>
-            <p:cNvPr id="118" name="Group 117">
-              <a:extLst>
-                <a:ext uri="{FF2B5EF4-FFF2-40B4-BE49-F238E27FC236}">
-                  <a16:creationId xmlns:a16="http://schemas.microsoft.com/office/drawing/2014/main" id="{D4E1695E-56A2-14FC-E547-7F696CC444B7}"/>
-                </a:ext>
-              </a:extLst>
-            </p:cNvPr>
-            <p:cNvGrpSpPr/>
-            <p:nvPr/>
-          </p:nvGrpSpPr>
-          <p:grpSpPr>
-            <a:xfrm>
-              <a:off x="904003" y="811262"/>
-              <a:ext cx="1435091" cy="180000"/>
-              <a:chOff x="516440" y="519638"/>
-              <a:chExt cx="1435091" cy="180000"/>
-            </a:xfrm>
-          </p:grpSpPr>
-          <p:pic>
-            <p:nvPicPr>
-              <p:cNvPr id="7" name="Graphic 6">
-                <a:extLst>
-                  <a:ext uri="{FF2B5EF4-FFF2-40B4-BE49-F238E27FC236}">
-                    <a16:creationId xmlns:a16="http://schemas.microsoft.com/office/drawing/2014/main" id="{7E9F1E52-A495-0111-8DF1-CF5CD9C6114E}"/>
-                  </a:ext>
-                </a:extLst>
-              </p:cNvPr>
-              <p:cNvPicPr>
-                <a:picLocks noChangeAspect="1"/>
-              </p:cNvPicPr>
-              <p:nvPr/>
-            </p:nvPicPr>
-            <p:blipFill>
-              <a:blip r:embed="rId4">
-                <a:extLst>
-                  <a:ext uri="{96DAC541-7B7A-43D3-8B79-37D633B846F1}">
-                    <asvg:svgBlip xmlns:asvg="http://schemas.microsoft.com/office/drawing/2016/SVG/main" r:embed="rId5"/>
-                  </a:ext>
-                </a:extLst>
-              </a:blip>
-              <a:stretch>
-                <a:fillRect/>
-              </a:stretch>
-            </p:blipFill>
-            <p:spPr>
-              <a:xfrm>
-                <a:off x="1167824" y="519638"/>
-                <a:ext cx="180000" cy="180000"/>
-              </a:xfrm>
-              <a:prstGeom prst="rect">
-                <a:avLst/>
-              </a:prstGeom>
-            </p:spPr>
-          </p:pic>
-          <p:cxnSp>
-            <p:nvCxnSpPr>
-              <p:cNvPr id="20" name="Straight Arrow Connector 19">
-                <a:extLst>
-                  <a:ext uri="{FF2B5EF4-FFF2-40B4-BE49-F238E27FC236}">
-                    <a16:creationId xmlns:a16="http://schemas.microsoft.com/office/drawing/2014/main" id="{D117FCD0-7F4C-5907-F77B-9A0675AD7EE2}"/>
-                  </a:ext>
-                </a:extLst>
-              </p:cNvPr>
-              <p:cNvCxnSpPr>
-                <a:cxnSpLocks/>
-                <a:stCxn id="4" idx="3"/>
-                <a:endCxn id="7" idx="1"/>
-              </p:cNvCxnSpPr>
-              <p:nvPr/>
-            </p:nvCxnSpPr>
-            <p:spPr>
-              <a:xfrm>
-                <a:off x="696440" y="609638"/>
-                <a:ext cx="471384" cy="0"/>
-              </a:xfrm>
-              <a:prstGeom prst="straightConnector1">
-                <a:avLst/>
-              </a:prstGeom>
-              <a:ln w="6350">
-                <a:solidFill>
-                  <a:schemeClr val="tx1"/>
-                </a:solidFill>
-                <a:tailEnd type="triangle"/>
-              </a:ln>
-            </p:spPr>
-            <p:style>
-              <a:lnRef idx="1">
-                <a:schemeClr val="accent1"/>
-              </a:lnRef>
-              <a:fillRef idx="0">
-                <a:schemeClr val="accent1"/>
-              </a:fillRef>
-              <a:effectRef idx="0">
-                <a:schemeClr val="accent1"/>
-              </a:effectRef>
-              <a:fontRef idx="minor">
-                <a:schemeClr val="tx1"/>
-              </a:fontRef>
-            </p:style>
-          </p:cxnSp>
-          <p:cxnSp>
-            <p:nvCxnSpPr>
-              <p:cNvPr id="27" name="Straight Arrow Connector 26">
-                <a:extLst>
-                  <a:ext uri="{FF2B5EF4-FFF2-40B4-BE49-F238E27FC236}">
-                    <a16:creationId xmlns:a16="http://schemas.microsoft.com/office/drawing/2014/main" id="{E5CA9B38-90FF-5DB6-A1C4-F039D02F6F24}"/>
-                  </a:ext>
-                </a:extLst>
-              </p:cNvPr>
-              <p:cNvCxnSpPr>
-                <a:cxnSpLocks/>
-                <a:stCxn id="7" idx="3"/>
-                <a:endCxn id="19" idx="1"/>
-              </p:cNvCxnSpPr>
-              <p:nvPr/>
-            </p:nvCxnSpPr>
-            <p:spPr>
-              <a:xfrm>
-                <a:off x="1347825" y="609638"/>
-                <a:ext cx="423707" cy="0"/>
-              </a:xfrm>
-              <a:prstGeom prst="straightConnector1">
-                <a:avLst/>
-              </a:prstGeom>
-              <a:ln w="6350">
-                <a:solidFill>
-                  <a:schemeClr val="tx1"/>
-                </a:solidFill>
-                <a:tailEnd type="triangle"/>
-              </a:ln>
-            </p:spPr>
-            <p:style>
-              <a:lnRef idx="1">
-                <a:schemeClr val="accent1"/>
-              </a:lnRef>
-              <a:fillRef idx="0">
-                <a:schemeClr val="accent1"/>
-              </a:fillRef>
-              <a:effectRef idx="0">
-                <a:schemeClr val="accent1"/>
-              </a:effectRef>
-              <a:fontRef idx="minor">
-                <a:schemeClr val="tx1"/>
-              </a:fontRef>
-            </p:style>
-          </p:cxnSp>
-          <p:pic>
-            <p:nvPicPr>
-              <p:cNvPr id="4" name="Picture 3">
-                <a:extLst>
-                  <a:ext uri="{FF2B5EF4-FFF2-40B4-BE49-F238E27FC236}">
-                    <a16:creationId xmlns:a16="http://schemas.microsoft.com/office/drawing/2014/main" id="{2D9A06DC-6AE7-FBE6-B915-C9B23EADEDB3}"/>
-                  </a:ext>
-                </a:extLst>
-              </p:cNvPr>
-              <p:cNvPicPr>
-                <a:picLocks noChangeAspect="1"/>
-              </p:cNvPicPr>
-              <p:nvPr/>
-            </p:nvPicPr>
-            <p:blipFill>
-              <a:blip r:embed="rId6"/>
-              <a:stretch>
-                <a:fillRect/>
-              </a:stretch>
-            </p:blipFill>
-            <p:spPr>
-              <a:xfrm>
-                <a:off x="516440" y="519638"/>
-                <a:ext cx="180000" cy="180000"/>
-              </a:xfrm>
-              <a:prstGeom prst="rect">
-                <a:avLst/>
-              </a:prstGeom>
-            </p:spPr>
-          </p:pic>
-          <p:pic>
-            <p:nvPicPr>
-              <p:cNvPr id="19" name="Picture 18">
-                <a:extLst>
-                  <a:ext uri="{FF2B5EF4-FFF2-40B4-BE49-F238E27FC236}">
-                    <a16:creationId xmlns:a16="http://schemas.microsoft.com/office/drawing/2014/main" id="{DE9F74D5-64B4-E933-29A2-9869EB92C798}"/>
-                  </a:ext>
-                </a:extLst>
-              </p:cNvPr>
-              <p:cNvPicPr>
-                <a:picLocks noChangeAspect="1"/>
-              </p:cNvPicPr>
-              <p:nvPr/>
-            </p:nvPicPr>
-            <p:blipFill>
-              <a:blip r:embed="rId3"/>
-              <a:stretch>
-                <a:fillRect/>
-              </a:stretch>
-            </p:blipFill>
-            <p:spPr>
-              <a:xfrm>
-                <a:off x="1771531" y="519638"/>
-                <a:ext cx="180000" cy="180000"/>
-              </a:xfrm>
-              <a:prstGeom prst="rect">
-                <a:avLst/>
-              </a:prstGeom>
-            </p:spPr>
-          </p:pic>
-        </p:grpSp>
-        <p:sp>
-          <p:nvSpPr>
-            <p:cNvPr id="176" name="TextBox 175">
-              <a:extLst>
-                <a:ext uri="{FF2B5EF4-FFF2-40B4-BE49-F238E27FC236}">
-                  <a16:creationId xmlns:a16="http://schemas.microsoft.com/office/drawing/2014/main" id="{3BD36809-6CED-F621-C351-B8961A82F843}"/>
-                </a:ext>
-              </a:extLst>
-            </p:cNvPr>
-            <p:cNvSpPr txBox="1"/>
-            <p:nvPr/>
-          </p:nvSpPr>
-          <p:spPr>
-            <a:xfrm>
-              <a:off x="2321209" y="793531"/>
-              <a:ext cx="441591" cy="200055"/>
-            </a:xfrm>
-            <a:prstGeom prst="rect">
-              <a:avLst/>
-            </a:prstGeom>
-            <a:noFill/>
-          </p:spPr>
-          <p:txBody>
-            <a:bodyPr wrap="square" rtlCol="0">
-              <a:spAutoFit/>
-            </a:bodyPr>
-            <a:lstStyle/>
-            <a:p>
-              <a:r>
-                <a:rPr lang="en-CN" sz="700" dirty="0">
-                  <a:latin typeface="Arial" panose="020B0604020202020204" pitchFamily="34" charset="0"/>
-                  <a:ea typeface="JetBrains Mono" panose="02000009000000000000" pitchFamily="49" charset="0"/>
-                  <a:cs typeface="Arial" panose="020B0604020202020204" pitchFamily="34" charset="0"/>
-                </a:rPr>
-                <a:t>(</a:t>
-              </a:r>
-              <a:r>
-                <a:rPr lang="en-CN" sz="700" i="1" dirty="0">
-                  <a:latin typeface="Times New Roman" panose="02020603050405020304" pitchFamily="18" charset="0"/>
-                  <a:ea typeface="JetBrains Mono" panose="02000009000000000000" pitchFamily="49" charset="0"/>
-                  <a:cs typeface="Times New Roman" panose="02020603050405020304" pitchFamily="18" charset="0"/>
-                </a:rPr>
-                <a:t>D</a:t>
-              </a:r>
-              <a:r>
-                <a:rPr lang="en-CN" sz="700" baseline="-25000" dirty="0">
-                  <a:latin typeface="Arial" panose="020B0604020202020204" pitchFamily="34" charset="0"/>
-                  <a:ea typeface="JetBrains Mono" panose="02000009000000000000" pitchFamily="49" charset="0"/>
-                  <a:cs typeface="Arial" panose="020B0604020202020204" pitchFamily="34" charset="0"/>
-                </a:rPr>
-                <a:t>train</a:t>
-              </a:r>
-              <a:r>
-                <a:rPr lang="en-CN" sz="700" dirty="0">
-                  <a:latin typeface="Arial" panose="020B0604020202020204" pitchFamily="34" charset="0"/>
-                  <a:ea typeface="JetBrains Mono" panose="02000009000000000000" pitchFamily="49" charset="0"/>
-                  <a:cs typeface="Arial" panose="020B0604020202020204" pitchFamily="34" charset="0"/>
-                </a:rPr>
-                <a:t>)</a:t>
-              </a:r>
-            </a:p>
-          </p:txBody>
-        </p:sp>
-      </p:grpSp>
-      <p:cxnSp>
-        <p:nvCxnSpPr>
-          <p:cNvPr id="184" name="Straight Arrow Connector 183">
-            <a:extLst>
-              <a:ext uri="{FF2B5EF4-FFF2-40B4-BE49-F238E27FC236}">
-                <a16:creationId xmlns:a16="http://schemas.microsoft.com/office/drawing/2014/main" id="{6F8E9993-9605-8F18-BB66-A4F500D17FE6}"/>
-              </a:ext>
-            </a:extLst>
-          </p:cNvPr>
-          <p:cNvCxnSpPr>
-            <a:cxnSpLocks/>
-            <a:stCxn id="95" idx="3"/>
-            <a:endCxn id="99" idx="1"/>
-          </p:cNvCxnSpPr>
-          <p:nvPr/>
-        </p:nvCxnSpPr>
-        <p:spPr>
-          <a:xfrm>
-            <a:off x="1899492" y="2219199"/>
-            <a:ext cx="221972" cy="0"/>
-          </a:xfrm>
-          <a:prstGeom prst="straightConnector1">
-            <a:avLst/>
-          </a:prstGeom>
-          <a:ln w="6350">
-            <a:solidFill>
-              <a:schemeClr val="tx1"/>
-            </a:solidFill>
-            <a:tailEnd type="triangle"/>
-          </a:ln>
-        </p:spPr>
-        <p:style>
-          <a:lnRef idx="1">
-            <a:schemeClr val="accent1"/>
-          </a:lnRef>
-          <a:fillRef idx="0">
-            <a:schemeClr val="accent1"/>
-          </a:fillRef>
-          <a:effectRef idx="0">
-            <a:schemeClr val="accent1"/>
-          </a:effectRef>
-          <a:fontRef idx="minor">
-            <a:schemeClr val="tx1"/>
-          </a:fontRef>
-        </p:style>
-      </p:cxnSp>
-      <p:grpSp>
-        <p:nvGrpSpPr>
-          <p:cNvPr id="88" name="Group 87">
-            <a:extLst>
-              <a:ext uri="{FF2B5EF4-FFF2-40B4-BE49-F238E27FC236}">
-                <a16:creationId xmlns:a16="http://schemas.microsoft.com/office/drawing/2014/main" id="{03F002AC-4F6C-EEA6-90EA-6F20E4325122}"/>
-              </a:ext>
-            </a:extLst>
-          </p:cNvPr>
-          <p:cNvGrpSpPr/>
-          <p:nvPr/>
-        </p:nvGrpSpPr>
-        <p:grpSpPr>
-          <a:xfrm>
-            <a:off x="150584" y="796473"/>
-            <a:ext cx="3070285" cy="1008961"/>
-            <a:chOff x="124625" y="794045"/>
-            <a:chExt cx="3070285" cy="1008961"/>
-          </a:xfrm>
-        </p:grpSpPr>
-        <p:pic>
-          <p:nvPicPr>
-            <p:cNvPr id="132" name="Picture 131">
-              <a:extLst>
-                <a:ext uri="{FF2B5EF4-FFF2-40B4-BE49-F238E27FC236}">
-                  <a16:creationId xmlns:a16="http://schemas.microsoft.com/office/drawing/2014/main" id="{71116361-BF4F-F963-109D-E63F8D126C50}"/>
-                </a:ext>
-              </a:extLst>
-            </p:cNvPr>
-            <p:cNvPicPr>
-              <a:picLocks noChangeAspect="1"/>
-            </p:cNvPicPr>
-            <p:nvPr/>
-          </p:nvPicPr>
-          <p:blipFill>
-            <a:blip r:embed="rId6"/>
-            <a:stretch>
-              <a:fillRect/>
-            </a:stretch>
-          </p:blipFill>
-          <p:spPr>
-            <a:xfrm>
-              <a:off x="124625" y="1181734"/>
-              <a:ext cx="180000" cy="180000"/>
-            </a:xfrm>
-            <a:prstGeom prst="rect">
-              <a:avLst/>
-            </a:prstGeom>
-          </p:spPr>
-        </p:pic>
-        <p:sp>
-          <p:nvSpPr>
-            <p:cNvPr id="175" name="TextBox 174">
-              <a:extLst>
-                <a:ext uri="{FF2B5EF4-FFF2-40B4-BE49-F238E27FC236}">
-                  <a16:creationId xmlns:a16="http://schemas.microsoft.com/office/drawing/2014/main" id="{046D044E-1873-BE97-2085-F80F57302B3A}"/>
-                </a:ext>
-              </a:extLst>
-            </p:cNvPr>
-            <p:cNvSpPr txBox="1"/>
-            <p:nvPr/>
-          </p:nvSpPr>
-          <p:spPr>
-            <a:xfrm>
-              <a:off x="2399036" y="1602951"/>
-              <a:ext cx="769215" cy="200055"/>
-            </a:xfrm>
-            <a:prstGeom prst="rect">
-              <a:avLst/>
-            </a:prstGeom>
-            <a:noFill/>
-          </p:spPr>
-          <p:txBody>
-            <a:bodyPr wrap="square" rtlCol="0">
-              <a:spAutoFit/>
-            </a:bodyPr>
-            <a:lstStyle/>
-            <a:p>
-              <a:pPr algn="ctr"/>
-              <a:r>
-                <a:rPr lang="en-CN" sz="700" dirty="0">
-                  <a:latin typeface="Arial" panose="020B0604020202020204" pitchFamily="34" charset="0"/>
-                  <a:ea typeface="JetBrains Mono" panose="02000009000000000000" pitchFamily="49" charset="0"/>
-                  <a:cs typeface="Arial" panose="020B0604020202020204" pitchFamily="34" charset="0"/>
-                </a:rPr>
-                <a:t>(</a:t>
-              </a:r>
-              <a:r>
-                <a:rPr lang="en-CN" sz="700" i="1" dirty="0">
-                  <a:latin typeface="Times New Roman" panose="02020603050405020304" pitchFamily="18" charset="0"/>
-                  <a:ea typeface="JetBrains Mono" panose="02000009000000000000" pitchFamily="49" charset="0"/>
-                  <a:cs typeface="Times New Roman" panose="02020603050405020304" pitchFamily="18" charset="0"/>
-                </a:rPr>
-                <a:t>D</a:t>
-              </a:r>
-              <a:r>
-                <a:rPr lang="en-CN" sz="700" baseline="-25000" dirty="0">
-                  <a:latin typeface="Arial" panose="020B0604020202020204" pitchFamily="34" charset="0"/>
-                  <a:ea typeface="JetBrains Mono" panose="02000009000000000000" pitchFamily="49" charset="0"/>
-                  <a:cs typeface="Arial" panose="020B0604020202020204" pitchFamily="34" charset="0"/>
-                </a:rPr>
-                <a:t>valid</a:t>
-              </a:r>
-              <a:r>
-                <a:rPr lang="en-CN" sz="700" dirty="0">
-                  <a:latin typeface="Arial" panose="020B0604020202020204" pitchFamily="34" charset="0"/>
-                  <a:ea typeface="JetBrains Mono" panose="02000009000000000000" pitchFamily="49" charset="0"/>
-                  <a:cs typeface="Arial" panose="020B0604020202020204" pitchFamily="34" charset="0"/>
-                </a:rPr>
-                <a:t>, </a:t>
-              </a:r>
-              <a:r>
-                <a:rPr lang="en-CN" sz="700" i="1" dirty="0">
-                  <a:latin typeface="Times New Roman" panose="02020603050405020304" pitchFamily="18" charset="0"/>
-                  <a:ea typeface="JetBrains Mono" panose="02000009000000000000" pitchFamily="49" charset="0"/>
-                  <a:cs typeface="Times New Roman" panose="02020603050405020304" pitchFamily="18" charset="0"/>
-                </a:rPr>
-                <a:t>D</a:t>
-              </a:r>
-              <a:r>
-                <a:rPr lang="en-CN" sz="700" baseline="-25000" dirty="0">
-                  <a:latin typeface="Arial" panose="020B0604020202020204" pitchFamily="34" charset="0"/>
-                  <a:ea typeface="JetBrains Mono" panose="02000009000000000000" pitchFamily="49" charset="0"/>
-                  <a:cs typeface="Arial" panose="020B0604020202020204" pitchFamily="34" charset="0"/>
-                </a:rPr>
-                <a:t>test</a:t>
-              </a:r>
-              <a:r>
-                <a:rPr lang="en-CN" sz="700" dirty="0">
-                  <a:latin typeface="Arial" panose="020B0604020202020204" pitchFamily="34" charset="0"/>
-                  <a:ea typeface="JetBrains Mono" panose="02000009000000000000" pitchFamily="49" charset="0"/>
-                  <a:cs typeface="Arial" panose="020B0604020202020204" pitchFamily="34" charset="0"/>
-                </a:rPr>
-                <a:t>)</a:t>
-              </a:r>
-            </a:p>
-          </p:txBody>
-        </p:sp>
-        <p:cxnSp>
-          <p:nvCxnSpPr>
-            <p:cNvPr id="9" name="Elbow Connector 8">
-              <a:extLst>
-                <a:ext uri="{FF2B5EF4-FFF2-40B4-BE49-F238E27FC236}">
-                  <a16:creationId xmlns:a16="http://schemas.microsoft.com/office/drawing/2014/main" id="{6F14884F-1126-81CB-D811-ED8DFAA98034}"/>
-                </a:ext>
-              </a:extLst>
-            </p:cNvPr>
-            <p:cNvCxnSpPr>
-              <a:stCxn id="132" idx="3"/>
-              <a:endCxn id="6" idx="1"/>
-            </p:cNvCxnSpPr>
-            <p:nvPr/>
-          </p:nvCxnSpPr>
-          <p:spPr>
-            <a:xfrm>
-              <a:off x="304625" y="1271734"/>
-              <a:ext cx="249568" cy="157525"/>
-            </a:xfrm>
-            <a:prstGeom prst="bentConnector3">
-              <a:avLst/>
-            </a:prstGeom>
-            <a:ln>
-              <a:solidFill>
-                <a:schemeClr val="tx1"/>
-              </a:solidFill>
-              <a:tailEnd type="triangle"/>
-            </a:ln>
-          </p:spPr>
-          <p:style>
-            <a:lnRef idx="1">
-              <a:schemeClr val="accent1"/>
-            </a:lnRef>
-            <a:fillRef idx="0">
-              <a:schemeClr val="accent1"/>
-            </a:fillRef>
-            <a:effectRef idx="0">
-              <a:schemeClr val="accent1"/>
-            </a:effectRef>
-            <a:fontRef idx="minor">
-              <a:schemeClr val="tx1"/>
-            </a:fontRef>
-          </p:style>
-        </p:cxnSp>
-        <p:cxnSp>
-          <p:nvCxnSpPr>
-            <p:cNvPr id="16" name="Elbow Connector 15">
-              <a:extLst>
-                <a:ext uri="{FF2B5EF4-FFF2-40B4-BE49-F238E27FC236}">
-                  <a16:creationId xmlns:a16="http://schemas.microsoft.com/office/drawing/2014/main" id="{DDD554D0-7F3E-6905-679B-01960D73ABA7}"/>
-                </a:ext>
-              </a:extLst>
-            </p:cNvPr>
-            <p:cNvCxnSpPr>
-              <a:stCxn id="132" idx="3"/>
-              <a:endCxn id="122" idx="1"/>
-            </p:cNvCxnSpPr>
-            <p:nvPr/>
-          </p:nvCxnSpPr>
-          <p:spPr>
-            <a:xfrm flipV="1">
-              <a:off x="304625" y="1114210"/>
-              <a:ext cx="250782" cy="157524"/>
-            </a:xfrm>
-            <a:prstGeom prst="bentConnector3">
-              <a:avLst/>
-            </a:prstGeom>
-            <a:ln>
-              <a:solidFill>
-                <a:schemeClr val="tx1"/>
-              </a:solidFill>
-              <a:tailEnd type="triangle"/>
-            </a:ln>
-          </p:spPr>
-          <p:style>
-            <a:lnRef idx="1">
-              <a:schemeClr val="accent1"/>
-            </a:lnRef>
-            <a:fillRef idx="0">
-              <a:schemeClr val="accent1"/>
-            </a:fillRef>
-            <a:effectRef idx="0">
-              <a:schemeClr val="accent1"/>
-            </a:effectRef>
-            <a:fontRef idx="minor">
-              <a:schemeClr val="tx1"/>
-            </a:fontRef>
-          </p:style>
-        </p:cxnSp>
-        <p:pic>
-          <p:nvPicPr>
-            <p:cNvPr id="29" name="Picture 28">
-              <a:extLst>
-                <a:ext uri="{FF2B5EF4-FFF2-40B4-BE49-F238E27FC236}">
-                  <a16:creationId xmlns:a16="http://schemas.microsoft.com/office/drawing/2014/main" id="{42933283-E907-2E10-064E-E50905AEA57F}"/>
-                </a:ext>
-              </a:extLst>
-            </p:cNvPr>
-            <p:cNvPicPr>
-              <a:picLocks noChangeAspect="1"/>
-            </p:cNvPicPr>
-            <p:nvPr/>
-          </p:nvPicPr>
-          <p:blipFill>
-            <a:blip r:embed="rId3"/>
-            <a:stretch>
-              <a:fillRect/>
-            </a:stretch>
-          </p:blipFill>
-          <p:spPr>
-            <a:xfrm>
-              <a:off x="2693643" y="1453672"/>
-              <a:ext cx="180000" cy="180000"/>
-            </a:xfrm>
-            <a:prstGeom prst="rect">
-              <a:avLst/>
-            </a:prstGeom>
-          </p:spPr>
-        </p:pic>
-        <p:cxnSp>
-          <p:nvCxnSpPr>
-            <p:cNvPr id="32" name="Elbow Connector 31">
-              <a:extLst>
-                <a:ext uri="{FF2B5EF4-FFF2-40B4-BE49-F238E27FC236}">
-                  <a16:creationId xmlns:a16="http://schemas.microsoft.com/office/drawing/2014/main" id="{8B9E277A-1D8E-5DEE-36AB-5DAB88A592E5}"/>
-                </a:ext>
-              </a:extLst>
-            </p:cNvPr>
-            <p:cNvCxnSpPr>
-              <a:cxnSpLocks/>
-              <a:stCxn id="133" idx="3"/>
-              <a:endCxn id="41" idx="1"/>
-            </p:cNvCxnSpPr>
-            <p:nvPr/>
-          </p:nvCxnSpPr>
-          <p:spPr>
-            <a:xfrm>
-              <a:off x="1268456" y="1114210"/>
-              <a:ext cx="328660" cy="157525"/>
-            </a:xfrm>
-            <a:prstGeom prst="bentConnector3">
-              <a:avLst/>
-            </a:prstGeom>
-            <a:ln>
-              <a:solidFill>
-                <a:schemeClr val="tx1"/>
-              </a:solidFill>
-              <a:tailEnd type="triangle"/>
-            </a:ln>
-          </p:spPr>
-          <p:style>
-            <a:lnRef idx="1">
-              <a:schemeClr val="accent1"/>
-            </a:lnRef>
-            <a:fillRef idx="0">
-              <a:schemeClr val="accent1"/>
-            </a:fillRef>
-            <a:effectRef idx="0">
-              <a:schemeClr val="accent1"/>
-            </a:effectRef>
-            <a:fontRef idx="minor">
-              <a:schemeClr val="tx1"/>
-            </a:fontRef>
-          </p:style>
-        </p:cxnSp>
-        <p:cxnSp>
-          <p:nvCxnSpPr>
-            <p:cNvPr id="34" name="Elbow Connector 33">
-              <a:extLst>
-                <a:ext uri="{FF2B5EF4-FFF2-40B4-BE49-F238E27FC236}">
-                  <a16:creationId xmlns:a16="http://schemas.microsoft.com/office/drawing/2014/main" id="{E89E8988-BF3C-EEDF-F45E-D1837BABEEF8}"/>
-                </a:ext>
-              </a:extLst>
-            </p:cNvPr>
-            <p:cNvCxnSpPr>
-              <a:cxnSpLocks/>
-              <a:stCxn id="22" idx="3"/>
-              <a:endCxn id="41" idx="1"/>
-            </p:cNvCxnSpPr>
-            <p:nvPr/>
-          </p:nvCxnSpPr>
-          <p:spPr>
-            <a:xfrm flipV="1">
-              <a:off x="1268456" y="1271735"/>
-              <a:ext cx="328660" cy="157524"/>
-            </a:xfrm>
-            <a:prstGeom prst="bentConnector3">
-              <a:avLst/>
-            </a:prstGeom>
-            <a:ln>
-              <a:solidFill>
-                <a:schemeClr val="tx1"/>
-              </a:solidFill>
-              <a:tailEnd type="triangle"/>
-            </a:ln>
-          </p:spPr>
-          <p:style>
-            <a:lnRef idx="1">
-              <a:schemeClr val="accent1"/>
-            </a:lnRef>
-            <a:fillRef idx="0">
-              <a:schemeClr val="accent1"/>
-            </a:fillRef>
-            <a:effectRef idx="0">
-              <a:schemeClr val="accent1"/>
-            </a:effectRef>
-            <a:fontRef idx="minor">
-              <a:schemeClr val="tx1"/>
-            </a:fontRef>
-          </p:style>
-        </p:cxnSp>
-        <p:grpSp>
-          <p:nvGrpSpPr>
-            <p:cNvPr id="46" name="Group 45">
-              <a:extLst>
-                <a:ext uri="{FF2B5EF4-FFF2-40B4-BE49-F238E27FC236}">
-                  <a16:creationId xmlns:a16="http://schemas.microsoft.com/office/drawing/2014/main" id="{305E0C6C-347B-5DB4-5FEC-E4798E948363}"/>
-                </a:ext>
-              </a:extLst>
-            </p:cNvPr>
-            <p:cNvGrpSpPr/>
-            <p:nvPr/>
-          </p:nvGrpSpPr>
-          <p:grpSpPr>
-            <a:xfrm>
-              <a:off x="554193" y="1024210"/>
-              <a:ext cx="714263" cy="495049"/>
-              <a:chOff x="907213" y="1022119"/>
-              <a:chExt cx="714263" cy="495049"/>
-            </a:xfrm>
-          </p:grpSpPr>
-          <p:pic>
-            <p:nvPicPr>
-              <p:cNvPr id="122" name="Picture 121">
-                <a:extLst>
-                  <a:ext uri="{FF2B5EF4-FFF2-40B4-BE49-F238E27FC236}">
-                    <a16:creationId xmlns:a16="http://schemas.microsoft.com/office/drawing/2014/main" id="{115D5FDE-399F-6AFF-E71E-E4CB39A9DDD2}"/>
-                  </a:ext>
-                </a:extLst>
-              </p:cNvPr>
-              <p:cNvPicPr>
-                <a:picLocks noChangeAspect="1"/>
-              </p:cNvPicPr>
-              <p:nvPr/>
-            </p:nvPicPr>
-            <p:blipFill>
-              <a:blip r:embed="rId7"/>
-              <a:stretch>
-                <a:fillRect/>
-              </a:stretch>
-            </p:blipFill>
-            <p:spPr>
-              <a:xfrm>
-                <a:off x="908427" y="1022119"/>
-                <a:ext cx="177573" cy="180000"/>
-              </a:xfrm>
-              <a:prstGeom prst="rect">
-                <a:avLst/>
-              </a:prstGeom>
-            </p:spPr>
-          </p:pic>
-          <p:cxnSp>
-            <p:nvCxnSpPr>
-              <p:cNvPr id="131" name="Straight Arrow Connector 130">
-                <a:extLst>
-                  <a:ext uri="{FF2B5EF4-FFF2-40B4-BE49-F238E27FC236}">
-                    <a16:creationId xmlns:a16="http://schemas.microsoft.com/office/drawing/2014/main" id="{117218F0-BAC0-CFE9-986F-FA2384ECD934}"/>
-                  </a:ext>
-                </a:extLst>
-              </p:cNvPr>
-              <p:cNvCxnSpPr>
-                <a:cxnSpLocks/>
-                <a:stCxn id="122" idx="3"/>
-                <a:endCxn id="133" idx="1"/>
-              </p:cNvCxnSpPr>
-              <p:nvPr/>
-            </p:nvCxnSpPr>
-            <p:spPr>
-              <a:xfrm>
-                <a:off x="1086000" y="1112119"/>
-                <a:ext cx="355476" cy="0"/>
-              </a:xfrm>
-              <a:prstGeom prst="straightConnector1">
-                <a:avLst/>
-              </a:prstGeom>
-              <a:ln w="6350">
-                <a:solidFill>
-                  <a:schemeClr val="tx1"/>
-                </a:solidFill>
-                <a:tailEnd type="triangle"/>
-              </a:ln>
-            </p:spPr>
-            <p:style>
-              <a:lnRef idx="1">
-                <a:schemeClr val="accent1"/>
-              </a:lnRef>
-              <a:fillRef idx="0">
-                <a:schemeClr val="accent1"/>
-              </a:fillRef>
-              <a:effectRef idx="0">
-                <a:schemeClr val="accent1"/>
-              </a:effectRef>
-              <a:fontRef idx="minor">
-                <a:schemeClr val="tx1"/>
-              </a:fontRef>
-            </p:style>
-          </p:cxnSp>
-          <p:pic>
-            <p:nvPicPr>
-              <p:cNvPr id="133" name="Picture 132">
-                <a:extLst>
-                  <a:ext uri="{FF2B5EF4-FFF2-40B4-BE49-F238E27FC236}">
-                    <a16:creationId xmlns:a16="http://schemas.microsoft.com/office/drawing/2014/main" id="{04508D2E-C15C-1BAE-48AE-46187C1ED331}"/>
-                  </a:ext>
-                </a:extLst>
-              </p:cNvPr>
-              <p:cNvPicPr>
-                <a:picLocks noChangeAspect="1"/>
-              </p:cNvPicPr>
-              <p:nvPr/>
-            </p:nvPicPr>
-            <p:blipFill>
-              <a:blip r:embed="rId3"/>
-              <a:stretch>
-                <a:fillRect/>
-              </a:stretch>
-            </p:blipFill>
-            <p:spPr>
-              <a:xfrm>
-                <a:off x="1441476" y="1022119"/>
-                <a:ext cx="180000" cy="180000"/>
-              </a:xfrm>
-              <a:prstGeom prst="rect">
-                <a:avLst/>
-              </a:prstGeom>
-            </p:spPr>
-          </p:pic>
-          <p:pic>
-            <p:nvPicPr>
-              <p:cNvPr id="6" name="Graphic 5">
-                <a:extLst>
-                  <a:ext uri="{FF2B5EF4-FFF2-40B4-BE49-F238E27FC236}">
-                    <a16:creationId xmlns:a16="http://schemas.microsoft.com/office/drawing/2014/main" id="{BDA5B879-7C35-E7D6-DDF8-DAF76718E90C}"/>
-                  </a:ext>
-                </a:extLst>
-              </p:cNvPr>
-              <p:cNvPicPr>
-                <a:picLocks noChangeAspect="1"/>
-              </p:cNvPicPr>
-              <p:nvPr/>
-            </p:nvPicPr>
-            <p:blipFill>
-              <a:blip r:embed="rId4">
-                <a:extLst>
-                  <a:ext uri="{96DAC541-7B7A-43D3-8B79-37D633B846F1}">
-                    <asvg:svgBlip xmlns:asvg="http://schemas.microsoft.com/office/drawing/2016/SVG/main" r:embed="rId5"/>
-                  </a:ext>
-                </a:extLst>
-              </a:blip>
-              <a:stretch>
-                <a:fillRect/>
-              </a:stretch>
-            </p:blipFill>
-            <p:spPr>
-              <a:xfrm>
-                <a:off x="907213" y="1337168"/>
-                <a:ext cx="180000" cy="180000"/>
-              </a:xfrm>
-              <a:prstGeom prst="rect">
-                <a:avLst/>
-              </a:prstGeom>
-            </p:spPr>
-          </p:pic>
-          <p:pic>
-            <p:nvPicPr>
-              <p:cNvPr id="22" name="Picture 21">
-                <a:extLst>
-                  <a:ext uri="{FF2B5EF4-FFF2-40B4-BE49-F238E27FC236}">
-                    <a16:creationId xmlns:a16="http://schemas.microsoft.com/office/drawing/2014/main" id="{16DAA54F-BB7C-53A6-3A4C-226C7456B5FB}"/>
-                  </a:ext>
-                </a:extLst>
-              </p:cNvPr>
-              <p:cNvPicPr>
-                <a:picLocks noChangeAspect="1"/>
-              </p:cNvPicPr>
-              <p:nvPr/>
-            </p:nvPicPr>
-            <p:blipFill>
-              <a:blip r:embed="rId3"/>
-              <a:stretch>
-                <a:fillRect/>
-              </a:stretch>
-            </p:blipFill>
-            <p:spPr>
-              <a:xfrm>
-                <a:off x="1441476" y="1337168"/>
-                <a:ext cx="180000" cy="180000"/>
-              </a:xfrm>
-              <a:prstGeom prst="rect">
-                <a:avLst/>
-              </a:prstGeom>
-            </p:spPr>
-          </p:pic>
-          <p:cxnSp>
-            <p:nvCxnSpPr>
-              <p:cNvPr id="23" name="Straight Arrow Connector 22">
-                <a:extLst>
-                  <a:ext uri="{FF2B5EF4-FFF2-40B4-BE49-F238E27FC236}">
-                    <a16:creationId xmlns:a16="http://schemas.microsoft.com/office/drawing/2014/main" id="{4E91D754-D469-DFF7-C824-B8CC9C236069}"/>
-                  </a:ext>
-                </a:extLst>
-              </p:cNvPr>
-              <p:cNvCxnSpPr>
-                <a:cxnSpLocks/>
-                <a:stCxn id="6" idx="3"/>
-                <a:endCxn id="22" idx="1"/>
-              </p:cNvCxnSpPr>
-              <p:nvPr/>
-            </p:nvCxnSpPr>
-            <p:spPr>
-              <a:xfrm>
-                <a:off x="1087213" y="1427168"/>
-                <a:ext cx="354263" cy="0"/>
-              </a:xfrm>
-              <a:prstGeom prst="straightConnector1">
-                <a:avLst/>
-              </a:prstGeom>
-              <a:ln w="6350">
-                <a:solidFill>
-                  <a:schemeClr val="tx1"/>
-                </a:solidFill>
-                <a:tailEnd type="triangle"/>
-              </a:ln>
-            </p:spPr>
-            <p:style>
-              <a:lnRef idx="1">
-                <a:schemeClr val="accent1"/>
-              </a:lnRef>
-              <a:fillRef idx="0">
-                <a:schemeClr val="accent1"/>
-              </a:fillRef>
-              <a:effectRef idx="0">
-                <a:schemeClr val="accent1"/>
-              </a:effectRef>
-              <a:fontRef idx="minor">
-                <a:schemeClr val="tx1"/>
-              </a:fontRef>
-            </p:style>
-          </p:cxnSp>
-        </p:grpSp>
-        <p:sp>
-          <p:nvSpPr>
-            <p:cNvPr id="48" name="TextBox 47">
-              <a:extLst>
-                <a:ext uri="{FF2B5EF4-FFF2-40B4-BE49-F238E27FC236}">
-                  <a16:creationId xmlns:a16="http://schemas.microsoft.com/office/drawing/2014/main" id="{7FAA51BB-EB4C-1E6F-0523-D53D1FAA80FB}"/>
-                </a:ext>
-              </a:extLst>
-            </p:cNvPr>
-            <p:cNvSpPr txBox="1"/>
-            <p:nvPr/>
-          </p:nvSpPr>
-          <p:spPr>
-            <a:xfrm>
-              <a:off x="1037420" y="1576757"/>
-              <a:ext cx="769215" cy="200055"/>
-            </a:xfrm>
-            <a:prstGeom prst="rect">
-              <a:avLst/>
-            </a:prstGeom>
-            <a:noFill/>
-          </p:spPr>
-          <p:txBody>
-            <a:bodyPr wrap="square" rtlCol="0">
-              <a:spAutoFit/>
-            </a:bodyPr>
-            <a:lstStyle/>
-            <a:p>
-              <a:pPr algn="ctr"/>
-              <a:r>
-                <a:rPr lang="en-US" sz="700" dirty="0">
-                  <a:latin typeface="Arial" panose="020B0604020202020204" pitchFamily="34" charset="0"/>
-                  <a:ea typeface="JetBrains Mono" panose="02000009000000000000" pitchFamily="49" charset="0"/>
-                  <a:cs typeface="Arial" panose="020B0604020202020204" pitchFamily="34" charset="0"/>
-                </a:rPr>
-                <a:t>Self-Criticism</a:t>
-              </a:r>
-              <a:endParaRPr lang="en-CN" sz="700" baseline="-25000" dirty="0">
-                <a:latin typeface="Arial" panose="020B0604020202020204" pitchFamily="34" charset="0"/>
-                <a:ea typeface="JetBrains Mono" panose="02000009000000000000" pitchFamily="49" charset="0"/>
-                <a:cs typeface="Arial" panose="020B0604020202020204" pitchFamily="34" charset="0"/>
-              </a:endParaRPr>
-            </a:p>
-          </p:txBody>
-        </p:sp>
-        <p:sp>
-          <p:nvSpPr>
-            <p:cNvPr id="50" name="TextBox 49">
-              <a:extLst>
-                <a:ext uri="{FF2B5EF4-FFF2-40B4-BE49-F238E27FC236}">
-                  <a16:creationId xmlns:a16="http://schemas.microsoft.com/office/drawing/2014/main" id="{E29744EC-5BF1-E344-AAAD-6BD8A57C7F50}"/>
-                </a:ext>
-              </a:extLst>
-            </p:cNvPr>
-            <p:cNvSpPr txBox="1"/>
-            <p:nvPr/>
-          </p:nvSpPr>
-          <p:spPr>
-            <a:xfrm>
-              <a:off x="2883841" y="1089264"/>
-              <a:ext cx="311069" cy="200055"/>
-            </a:xfrm>
-            <a:prstGeom prst="rect">
-              <a:avLst/>
-            </a:prstGeom>
-            <a:noFill/>
-          </p:spPr>
-          <p:txBody>
-            <a:bodyPr wrap="square" rtlCol="0">
-              <a:spAutoFit/>
-            </a:bodyPr>
-            <a:lstStyle/>
-            <a:p>
-              <a:r>
-                <a:rPr lang="en-CN" sz="700" b="1" dirty="0">
-                  <a:latin typeface="Arial" panose="020B0604020202020204" pitchFamily="34" charset="0"/>
-                  <a:ea typeface="JetBrains Mono" panose="02000009000000000000" pitchFamily="49" charset="0"/>
-                  <a:cs typeface="Arial" panose="020B0604020202020204" pitchFamily="34" charset="0"/>
-                </a:rPr>
-                <a:t>Y</a:t>
-              </a:r>
-            </a:p>
-          </p:txBody>
-        </p:sp>
-        <p:cxnSp>
-          <p:nvCxnSpPr>
-            <p:cNvPr id="66" name="Elbow Connector 65">
-              <a:extLst>
-                <a:ext uri="{FF2B5EF4-FFF2-40B4-BE49-F238E27FC236}">
-                  <a16:creationId xmlns:a16="http://schemas.microsoft.com/office/drawing/2014/main" id="{7D90F316-1866-FFE6-56D4-CF4773F1C960}"/>
-                </a:ext>
-              </a:extLst>
-            </p:cNvPr>
-            <p:cNvCxnSpPr>
-              <a:stCxn id="41" idx="3"/>
-              <a:endCxn id="29" idx="3"/>
-            </p:cNvCxnSpPr>
-            <p:nvPr/>
-          </p:nvCxnSpPr>
-          <p:spPr>
-            <a:xfrm flipH="1">
-              <a:off x="2873643" y="1271735"/>
-              <a:ext cx="27431" cy="271937"/>
-            </a:xfrm>
-            <a:prstGeom prst="bentConnector3">
-              <a:avLst>
-                <a:gd name="adj1" fmla="val -833364"/>
-              </a:avLst>
-            </a:prstGeom>
-            <a:ln>
-              <a:solidFill>
-                <a:schemeClr val="tx1"/>
-              </a:solidFill>
-              <a:tailEnd type="triangle"/>
-            </a:ln>
-          </p:spPr>
-          <p:style>
-            <a:lnRef idx="1">
-              <a:schemeClr val="accent1"/>
-            </a:lnRef>
-            <a:fillRef idx="0">
-              <a:schemeClr val="accent1"/>
-            </a:fillRef>
-            <a:effectRef idx="0">
-              <a:schemeClr val="accent1"/>
-            </a:effectRef>
-            <a:fontRef idx="minor">
-              <a:schemeClr val="tx1"/>
-            </a:fontRef>
-          </p:style>
-        </p:cxnSp>
-        <p:grpSp>
-          <p:nvGrpSpPr>
-            <p:cNvPr id="71" name="Group 70">
-              <a:extLst>
-                <a:ext uri="{FF2B5EF4-FFF2-40B4-BE49-F238E27FC236}">
-                  <a16:creationId xmlns:a16="http://schemas.microsoft.com/office/drawing/2014/main" id="{2FF427C3-43CC-65FD-17F5-B0D241F7FE31}"/>
-                </a:ext>
-              </a:extLst>
-            </p:cNvPr>
-            <p:cNvGrpSpPr/>
-            <p:nvPr/>
-          </p:nvGrpSpPr>
-          <p:grpSpPr>
-            <a:xfrm>
-              <a:off x="1597116" y="794045"/>
-              <a:ext cx="1303958" cy="955379"/>
-              <a:chOff x="1597116" y="794045"/>
-              <a:chExt cx="1303958" cy="955379"/>
-            </a:xfrm>
-          </p:grpSpPr>
-          <p:sp>
-            <p:nvSpPr>
-              <p:cNvPr id="41" name="TextBox 40">
-                <a:extLst>
-                  <a:ext uri="{FF2B5EF4-FFF2-40B4-BE49-F238E27FC236}">
-                    <a16:creationId xmlns:a16="http://schemas.microsoft.com/office/drawing/2014/main" id="{E766387F-B502-0510-F5C6-963FDC812F47}"/>
-                  </a:ext>
-                </a:extLst>
-              </p:cNvPr>
-              <p:cNvSpPr txBox="1"/>
-              <p:nvPr/>
-            </p:nvSpPr>
-            <p:spPr>
-              <a:xfrm>
-                <a:off x="1597116" y="1171707"/>
-                <a:ext cx="1303958" cy="200055"/>
-              </a:xfrm>
-              <a:prstGeom prst="rect">
-                <a:avLst/>
-              </a:prstGeom>
-              <a:noFill/>
-              <a:ln w="6350">
-                <a:solidFill>
-                  <a:schemeClr val="tx1"/>
-                </a:solidFill>
-              </a:ln>
-            </p:spPr>
-            <p:txBody>
-              <a:bodyPr wrap="square" rtlCol="0">
-                <a:spAutoFit/>
-              </a:bodyPr>
-              <a:lstStyle/>
-              <a:p>
-                <a:pPr algn="ctr"/>
-                <a:r>
-                  <a:rPr lang="en-US" sz="700" dirty="0">
-                    <a:latin typeface="Arial" panose="020B0604020202020204" pitchFamily="34" charset="0"/>
-                    <a:ea typeface="JetBrains Mono" panose="02000009000000000000" pitchFamily="49" charset="0"/>
-                    <a:cs typeface="Arial" panose="020B0604020202020204" pitchFamily="34" charset="0"/>
-                  </a:rPr>
-                  <a:t>IF </a:t>
-                </a:r>
-                <a:r>
-                  <a:rPr lang="en-US" sz="700" dirty="0" err="1">
-                    <a:latin typeface="Arial" panose="020B0604020202020204" pitchFamily="34" charset="0"/>
-                    <a:ea typeface="JetBrains Mono" panose="02000009000000000000" pitchFamily="49" charset="0"/>
-                    <a:cs typeface="Arial" panose="020B0604020202020204" pitchFamily="34" charset="0"/>
-                  </a:rPr>
-                  <a:t>label</a:t>
-                </a:r>
-                <a:r>
-                  <a:rPr lang="en-US" sz="700" baseline="-25000" dirty="0" err="1">
-                    <a:latin typeface="Arial" panose="020B0604020202020204" pitchFamily="34" charset="0"/>
-                    <a:ea typeface="JetBrains Mono" panose="02000009000000000000" pitchFamily="49" charset="0"/>
-                    <a:cs typeface="Arial" panose="020B0604020202020204" pitchFamily="34" charset="0"/>
-                  </a:rPr>
-                  <a:t>ChatGPT</a:t>
-                </a:r>
-                <a:r>
-                  <a:rPr lang="en-US" sz="700" dirty="0">
-                    <a:latin typeface="Arial" panose="020B0604020202020204" pitchFamily="34" charset="0"/>
-                    <a:ea typeface="JetBrains Mono" panose="02000009000000000000" pitchFamily="49" charset="0"/>
-                    <a:cs typeface="Arial" panose="020B0604020202020204" pitchFamily="34" charset="0"/>
-                  </a:rPr>
-                  <a:t> == label</a:t>
-                </a:r>
-                <a:r>
-                  <a:rPr lang="en-US" sz="700" baseline="-25000" dirty="0">
-                    <a:latin typeface="Arial" panose="020B0604020202020204" pitchFamily="34" charset="0"/>
-                    <a:ea typeface="JetBrains Mono" panose="02000009000000000000" pitchFamily="49" charset="0"/>
-                    <a:cs typeface="Arial" panose="020B0604020202020204" pitchFamily="34" charset="0"/>
-                  </a:rPr>
-                  <a:t>GPT-4</a:t>
-                </a:r>
-                <a:endParaRPr lang="en-CN" sz="700" baseline="-25000" dirty="0">
-                  <a:latin typeface="Arial" panose="020B0604020202020204" pitchFamily="34" charset="0"/>
-                  <a:ea typeface="JetBrains Mono" panose="02000009000000000000" pitchFamily="49" charset="0"/>
-                  <a:cs typeface="Arial" panose="020B0604020202020204" pitchFamily="34" charset="0"/>
-                </a:endParaRPr>
-              </a:p>
-            </p:txBody>
-          </p:sp>
-          <p:sp>
-            <p:nvSpPr>
-              <p:cNvPr id="69" name="TextBox 68">
-                <a:extLst>
-                  <a:ext uri="{FF2B5EF4-FFF2-40B4-BE49-F238E27FC236}">
-                    <a16:creationId xmlns:a16="http://schemas.microsoft.com/office/drawing/2014/main" id="{86175B73-77BC-08FC-72B2-5980EEE78FBC}"/>
-                  </a:ext>
-                </a:extLst>
-              </p:cNvPr>
-              <p:cNvSpPr txBox="1"/>
-              <p:nvPr/>
-            </p:nvSpPr>
-            <p:spPr>
-              <a:xfrm>
-                <a:off x="2060291" y="1549369"/>
-                <a:ext cx="311069" cy="200055"/>
-              </a:xfrm>
-              <a:prstGeom prst="rect">
-                <a:avLst/>
-              </a:prstGeom>
-              <a:noFill/>
-            </p:spPr>
-            <p:txBody>
-              <a:bodyPr wrap="square" rtlCol="0">
-                <a:spAutoFit/>
-              </a:bodyPr>
-              <a:lstStyle/>
-              <a:p>
-                <a:r>
-                  <a:rPr lang="en-CN" sz="700" b="1" dirty="0">
-                    <a:latin typeface="Arial" panose="020B0604020202020204" pitchFamily="34" charset="0"/>
-                    <a:ea typeface="JetBrains Mono" panose="02000009000000000000" pitchFamily="49" charset="0"/>
-                    <a:cs typeface="Arial" panose="020B0604020202020204" pitchFamily="34" charset="0"/>
-                  </a:rPr>
-                  <a:t>N</a:t>
-                </a:r>
-              </a:p>
-            </p:txBody>
-          </p:sp>
-          <p:sp>
-            <p:nvSpPr>
-              <p:cNvPr id="70" name="TextBox 69">
-                <a:extLst>
-                  <a:ext uri="{FF2B5EF4-FFF2-40B4-BE49-F238E27FC236}">
-                    <a16:creationId xmlns:a16="http://schemas.microsoft.com/office/drawing/2014/main" id="{4B4625ED-DF97-AF93-BA23-17D5F6F40B2A}"/>
-                  </a:ext>
-                </a:extLst>
-              </p:cNvPr>
-              <p:cNvSpPr txBox="1"/>
-              <p:nvPr/>
-            </p:nvSpPr>
-            <p:spPr>
-              <a:xfrm>
-                <a:off x="2060291" y="794045"/>
-                <a:ext cx="311069" cy="200055"/>
-              </a:xfrm>
-              <a:prstGeom prst="rect">
-                <a:avLst/>
-              </a:prstGeom>
-              <a:noFill/>
-            </p:spPr>
-            <p:txBody>
-              <a:bodyPr wrap="square" rtlCol="0">
-                <a:spAutoFit/>
-              </a:bodyPr>
-              <a:lstStyle/>
-              <a:p>
-                <a:r>
-                  <a:rPr lang="en-CN" sz="700" b="1" dirty="0">
-                    <a:latin typeface="Arial" panose="020B0604020202020204" pitchFamily="34" charset="0"/>
-                    <a:ea typeface="JetBrains Mono" panose="02000009000000000000" pitchFamily="49" charset="0"/>
-                    <a:cs typeface="Arial" panose="020B0604020202020204" pitchFamily="34" charset="0"/>
-                  </a:rPr>
-                  <a:t>N</a:t>
-                </a:r>
-              </a:p>
-            </p:txBody>
-          </p:sp>
-        </p:grpSp>
-      </p:grpSp>
-      <p:pic>
-        <p:nvPicPr>
-          <p:cNvPr id="99" name="Picture 98">
-            <a:extLst>
-              <a:ext uri="{FF2B5EF4-FFF2-40B4-BE49-F238E27FC236}">
-                <a16:creationId xmlns:a16="http://schemas.microsoft.com/office/drawing/2014/main" id="{60D656E5-1F42-AA6D-DFE3-7C74E93B3BC3}"/>
+                <a16:creationId xmlns:a16="http://schemas.microsoft.com/office/drawing/2014/main" id="{2D9A06DC-6AE7-FBE6-B915-C9B23EADEDB3}"/>
               </a:ext>
             </a:extLst>
           </p:cNvPr>
@@ -5946,7 +3745,7 @@
         </p:blipFill>
         <p:spPr>
           <a:xfrm>
-            <a:off x="2121464" y="2129199"/>
+            <a:off x="233671" y="535562"/>
             <a:ext cx="180000" cy="180000"/>
           </a:xfrm>
           <a:prstGeom prst="rect">
@@ -5954,12 +3753,42 @@
           </a:prstGeom>
         </p:spPr>
       </p:pic>
-      <p:sp>
-        <p:nvSpPr>
-          <p:cNvPr id="108" name="TextBox 107">
+      <p:pic>
+        <p:nvPicPr>
+          <p:cNvPr id="19" name="Picture 18">
             <a:extLst>
               <a:ext uri="{FF2B5EF4-FFF2-40B4-BE49-F238E27FC236}">
-                <a16:creationId xmlns:a16="http://schemas.microsoft.com/office/drawing/2014/main" id="{BCA61F29-F8AC-651D-6227-33F03762F130}"/>
+                <a16:creationId xmlns:a16="http://schemas.microsoft.com/office/drawing/2014/main" id="{DE9F74D5-64B4-E933-29A2-9869EB92C798}"/>
+              </a:ext>
+            </a:extLst>
+          </p:cNvPr>
+          <p:cNvPicPr>
+            <a:picLocks noChangeAspect="1"/>
+          </p:cNvPicPr>
+          <p:nvPr/>
+        </p:nvPicPr>
+        <p:blipFill>
+          <a:blip r:embed="rId7"/>
+          <a:stretch>
+            <a:fillRect/>
+          </a:stretch>
+        </p:blipFill>
+        <p:spPr>
+          <a:xfrm>
+            <a:off x="2465432" y="535562"/>
+            <a:ext cx="180000" cy="180000"/>
+          </a:xfrm>
+          <a:prstGeom prst="rect">
+            <a:avLst/>
+          </a:prstGeom>
+        </p:spPr>
+      </p:pic>
+      <p:sp>
+        <p:nvSpPr>
+          <p:cNvPr id="176" name="TextBox 175">
+            <a:extLst>
+              <a:ext uri="{FF2B5EF4-FFF2-40B4-BE49-F238E27FC236}">
+                <a16:creationId xmlns:a16="http://schemas.microsoft.com/office/drawing/2014/main" id="{3BD36809-6CED-F621-C351-B8961A82F843}"/>
               </a:ext>
             </a:extLst>
           </p:cNvPr>
@@ -5968,8 +3797,8 @@
         </p:nvSpPr>
         <p:spPr>
           <a:xfrm>
-            <a:off x="1130280" y="791358"/>
-            <a:ext cx="769215" cy="200055"/>
+            <a:off x="2562446" y="525535"/>
+            <a:ext cx="422711" cy="200055"/>
           </a:xfrm>
           <a:prstGeom prst="rect">
             <a:avLst/>
@@ -5984,47 +3813,186 @@
           <a:p>
             <a:pPr algn="ctr"/>
             <a:r>
-              <a:rPr lang="en-US" sz="700" dirty="0">
+              <a:rPr lang="en-CN" sz="700" dirty="0">
                 <a:latin typeface="Arial" panose="020B0604020202020204" pitchFamily="34" charset="0"/>
                 <a:ea typeface="JetBrains Mono" panose="02000009000000000000" pitchFamily="49" charset="0"/>
                 <a:cs typeface="Arial" panose="020B0604020202020204" pitchFamily="34" charset="0"/>
               </a:rPr>
-              <a:t>Self-Criticism</a:t>
-            </a:r>
-            <a:endParaRPr lang="en-CN" sz="700" baseline="-25000" dirty="0">
-              <a:latin typeface="Arial" panose="020B0604020202020204" pitchFamily="34" charset="0"/>
-              <a:ea typeface="JetBrains Mono" panose="02000009000000000000" pitchFamily="49" charset="0"/>
-              <a:cs typeface="Arial" panose="020B0604020202020204" pitchFamily="34" charset="0"/>
-            </a:endParaRPr>
-          </a:p>
-        </p:txBody>
-      </p:sp>
+              <a:t>(</a:t>
+            </a:r>
+            <a:r>
+              <a:rPr lang="en-CN" sz="700" i="1" dirty="0">
+                <a:latin typeface="Times New Roman" panose="02020603050405020304" pitchFamily="18" charset="0"/>
+                <a:ea typeface="JetBrains Mono" panose="02000009000000000000" pitchFamily="49" charset="0"/>
+                <a:cs typeface="Times New Roman" panose="02020603050405020304" pitchFamily="18" charset="0"/>
+              </a:rPr>
+              <a:t>D</a:t>
+            </a:r>
+            <a:r>
+              <a:rPr lang="en-CN" sz="700" baseline="-25000" dirty="0">
+                <a:latin typeface="Arial" panose="020B0604020202020204" pitchFamily="34" charset="0"/>
+                <a:ea typeface="JetBrains Mono" panose="02000009000000000000" pitchFamily="49" charset="0"/>
+                <a:cs typeface="Arial" panose="020B0604020202020204" pitchFamily="34" charset="0"/>
+              </a:rPr>
+              <a:t>all</a:t>
+            </a:r>
+            <a:r>
+              <a:rPr lang="en-CN" sz="700" dirty="0">
+                <a:latin typeface="Arial" panose="020B0604020202020204" pitchFamily="34" charset="0"/>
+                <a:ea typeface="JetBrains Mono" panose="02000009000000000000" pitchFamily="49" charset="0"/>
+                <a:cs typeface="Arial" panose="020B0604020202020204" pitchFamily="34" charset="0"/>
+              </a:rPr>
+              <a:t>)</a:t>
+            </a:r>
+          </a:p>
+        </p:txBody>
+      </p:sp>
+      <p:sp>
+        <p:nvSpPr>
+          <p:cNvPr id="175" name="TextBox 174">
+            <a:extLst>
+              <a:ext uri="{FF2B5EF4-FFF2-40B4-BE49-F238E27FC236}">
+                <a16:creationId xmlns:a16="http://schemas.microsoft.com/office/drawing/2014/main" id="{046D044E-1873-BE97-2085-F80F57302B3A}"/>
+              </a:ext>
+            </a:extLst>
+          </p:cNvPr>
+          <p:cNvSpPr txBox="1"/>
+          <p:nvPr/>
+        </p:nvSpPr>
+        <p:spPr>
+          <a:xfrm>
+            <a:off x="2681264" y="2171859"/>
+            <a:ext cx="650313" cy="200055"/>
+          </a:xfrm>
+          <a:prstGeom prst="rect">
+            <a:avLst/>
+          </a:prstGeom>
+          <a:noFill/>
+        </p:spPr>
+        <p:txBody>
+          <a:bodyPr wrap="square" rtlCol="0">
+            <a:spAutoFit/>
+          </a:bodyPr>
+          <a:lstStyle/>
+          <a:p>
+            <a:pPr algn="ctr"/>
+            <a:r>
+              <a:rPr lang="en-CN" sz="700" dirty="0">
+                <a:latin typeface="Arial" panose="020B0604020202020204" pitchFamily="34" charset="0"/>
+                <a:ea typeface="JetBrains Mono" panose="02000009000000000000" pitchFamily="49" charset="0"/>
+                <a:cs typeface="Arial" panose="020B0604020202020204" pitchFamily="34" charset="0"/>
+              </a:rPr>
+              <a:t>(</a:t>
+            </a:r>
+            <a:r>
+              <a:rPr lang="en-CN" sz="700" i="1" dirty="0">
+                <a:latin typeface="Times New Roman" panose="02020603050405020304" pitchFamily="18" charset="0"/>
+                <a:ea typeface="JetBrains Mono" panose="02000009000000000000" pitchFamily="49" charset="0"/>
+                <a:cs typeface="Times New Roman" panose="02020603050405020304" pitchFamily="18" charset="0"/>
+              </a:rPr>
+              <a:t>D</a:t>
+            </a:r>
+            <a:r>
+              <a:rPr lang="en-CN" sz="700" baseline="-25000" dirty="0">
+                <a:latin typeface="Arial" panose="020B0604020202020204" pitchFamily="34" charset="0"/>
+                <a:ea typeface="JetBrains Mono" panose="02000009000000000000" pitchFamily="49" charset="0"/>
+                <a:cs typeface="Arial" panose="020B0604020202020204" pitchFamily="34" charset="0"/>
+              </a:rPr>
+              <a:t>valid</a:t>
+            </a:r>
+            <a:r>
+              <a:rPr lang="en-CN" sz="700" dirty="0">
+                <a:latin typeface="Arial" panose="020B0604020202020204" pitchFamily="34" charset="0"/>
+                <a:ea typeface="JetBrains Mono" panose="02000009000000000000" pitchFamily="49" charset="0"/>
+                <a:cs typeface="Arial" panose="020B0604020202020204" pitchFamily="34" charset="0"/>
+              </a:rPr>
+              <a:t>, </a:t>
+            </a:r>
+            <a:r>
+              <a:rPr lang="en-CN" sz="700" i="1" dirty="0">
+                <a:latin typeface="Times New Roman" panose="02020603050405020304" pitchFamily="18" charset="0"/>
+                <a:ea typeface="JetBrains Mono" panose="02000009000000000000" pitchFamily="49" charset="0"/>
+                <a:cs typeface="Times New Roman" panose="02020603050405020304" pitchFamily="18" charset="0"/>
+              </a:rPr>
+              <a:t>D</a:t>
+            </a:r>
+            <a:r>
+              <a:rPr lang="en-CN" sz="700" baseline="-25000" dirty="0">
+                <a:latin typeface="Arial" panose="020B0604020202020204" pitchFamily="34" charset="0"/>
+                <a:ea typeface="JetBrains Mono" panose="02000009000000000000" pitchFamily="49" charset="0"/>
+                <a:cs typeface="Arial" panose="020B0604020202020204" pitchFamily="34" charset="0"/>
+              </a:rPr>
+              <a:t>test</a:t>
+            </a:r>
+            <a:r>
+              <a:rPr lang="en-CN" sz="700" dirty="0">
+                <a:latin typeface="Arial" panose="020B0604020202020204" pitchFamily="34" charset="0"/>
+                <a:ea typeface="JetBrains Mono" panose="02000009000000000000" pitchFamily="49" charset="0"/>
+                <a:cs typeface="Arial" panose="020B0604020202020204" pitchFamily="34" charset="0"/>
+              </a:rPr>
+              <a:t>)</a:t>
+            </a:r>
+          </a:p>
+        </p:txBody>
+      </p:sp>
+      <p:pic>
+        <p:nvPicPr>
+          <p:cNvPr id="29" name="Picture 28">
+            <a:extLst>
+              <a:ext uri="{FF2B5EF4-FFF2-40B4-BE49-F238E27FC236}">
+                <a16:creationId xmlns:a16="http://schemas.microsoft.com/office/drawing/2014/main" id="{42933283-E907-2E10-064E-E50905AEA57F}"/>
+              </a:ext>
+            </a:extLst>
+          </p:cNvPr>
+          <p:cNvPicPr>
+            <a:picLocks noChangeAspect="1"/>
+          </p:cNvPicPr>
+          <p:nvPr/>
+        </p:nvPicPr>
+        <p:blipFill>
+          <a:blip r:embed="rId7"/>
+          <a:stretch>
+            <a:fillRect/>
+          </a:stretch>
+        </p:blipFill>
+        <p:spPr>
+          <a:xfrm>
+            <a:off x="2934471" y="2377022"/>
+            <a:ext cx="180000" cy="180000"/>
+          </a:xfrm>
+          <a:prstGeom prst="rect">
+            <a:avLst/>
+          </a:prstGeom>
+        </p:spPr>
+      </p:pic>
       <p:cxnSp>
         <p:nvCxnSpPr>
-          <p:cNvPr id="111" name="Elbow Connector 110">
+          <p:cNvPr id="32" name="Elbow Connector 31">
             <a:extLst>
               <a:ext uri="{FF2B5EF4-FFF2-40B4-BE49-F238E27FC236}">
-                <a16:creationId xmlns:a16="http://schemas.microsoft.com/office/drawing/2014/main" id="{0C05D63D-995F-1C9C-D7F4-3F60166EF6F8}"/>
+                <a16:creationId xmlns:a16="http://schemas.microsoft.com/office/drawing/2014/main" id="{8B9E277A-1D8E-5DEE-36AB-5DAB88A592E5}"/>
               </a:ext>
             </a:extLst>
           </p:cNvPr>
           <p:cNvCxnSpPr>
-            <a:stCxn id="41" idx="2"/>
-            <a:endCxn id="6" idx="2"/>
+            <a:cxnSpLocks/>
+            <a:stCxn id="116" idx="3"/>
+            <a:endCxn id="133" idx="1"/>
           </p:cNvCxnSpPr>
           <p:nvPr/>
         </p:nvCxnSpPr>
         <p:spPr>
-          <a:xfrm rot="5400000">
-            <a:off x="1398855" y="645487"/>
-            <a:ext cx="147497" cy="1604902"/>
+          <a:xfrm flipV="1">
+            <a:off x="206249" y="1971072"/>
+            <a:ext cx="229834" cy="331494"/>
           </a:xfrm>
           <a:prstGeom prst="bentConnector3">
-            <a:avLst>
-              <a:gd name="adj1" fmla="val 254986"/>
-            </a:avLst>
-          </a:prstGeom>
-          <a:ln w="9525">
+            <a:avLst/>
+          </a:prstGeom>
+          <a:ln>
+            <a:solidFill>
+              <a:schemeClr val="tx1"/>
+            </a:solidFill>
             <a:tailEnd type="triangle"/>
           </a:ln>
         </p:spPr>
@@ -6045,30 +4013,34 @@
       </p:cxnSp>
       <p:cxnSp>
         <p:nvCxnSpPr>
-          <p:cNvPr id="113" name="Elbow Connector 112">
+          <p:cNvPr id="34" name="Elbow Connector 33">
             <a:extLst>
               <a:ext uri="{FF2B5EF4-FFF2-40B4-BE49-F238E27FC236}">
-                <a16:creationId xmlns:a16="http://schemas.microsoft.com/office/drawing/2014/main" id="{D49DDEC7-2DD3-1D22-B5E9-1A544C71F5A1}"/>
+                <a16:creationId xmlns:a16="http://schemas.microsoft.com/office/drawing/2014/main" id="{E89E8988-BF3C-EEDF-F45E-D1837BABEEF8}"/>
               </a:ext>
             </a:extLst>
           </p:cNvPr>
           <p:cNvCxnSpPr>
-            <a:stCxn id="41" idx="0"/>
-            <a:endCxn id="122" idx="0"/>
+            <a:cxnSpLocks/>
+            <a:stCxn id="116" idx="3"/>
+            <a:endCxn id="22" idx="1"/>
           </p:cNvCxnSpPr>
           <p:nvPr/>
         </p:nvCxnSpPr>
         <p:spPr>
-          <a:xfrm rot="16200000" flipV="1">
-            <a:off x="1398856" y="297939"/>
-            <a:ext cx="147497" cy="1604901"/>
+          <a:xfrm>
+            <a:off x="206249" y="2302566"/>
+            <a:ext cx="229834" cy="328914"/>
           </a:xfrm>
           <a:prstGeom prst="bentConnector3">
             <a:avLst>
-              <a:gd name="adj1" fmla="val 254986"/>
+              <a:gd name="adj1" fmla="val 50000"/>
             </a:avLst>
           </a:prstGeom>
-          <a:ln w="9525">
+          <a:ln>
+            <a:solidFill>
+              <a:schemeClr val="tx1"/>
+            </a:solidFill>
             <a:tailEnd type="triangle"/>
           </a:ln>
         </p:spPr>
@@ -6087,6 +4059,2082 @@
           </a:fontRef>
         </p:style>
       </p:cxnSp>
+      <p:pic>
+        <p:nvPicPr>
+          <p:cNvPr id="122" name="Picture 121">
+            <a:extLst>
+              <a:ext uri="{FF2B5EF4-FFF2-40B4-BE49-F238E27FC236}">
+                <a16:creationId xmlns:a16="http://schemas.microsoft.com/office/drawing/2014/main" id="{115D5FDE-399F-6AFF-E71E-E4CB39A9DDD2}"/>
+              </a:ext>
+            </a:extLst>
+          </p:cNvPr>
+          <p:cNvPicPr>
+            <a:picLocks noChangeAspect="1"/>
+          </p:cNvPicPr>
+          <p:nvPr/>
+        </p:nvPicPr>
+        <p:blipFill>
+          <a:blip r:embed="rId5"/>
+          <a:stretch>
+            <a:fillRect/>
+          </a:stretch>
+        </p:blipFill>
+        <p:spPr>
+          <a:xfrm>
+            <a:off x="1057864" y="2377022"/>
+            <a:ext cx="177573" cy="180000"/>
+          </a:xfrm>
+          <a:prstGeom prst="rect">
+            <a:avLst/>
+          </a:prstGeom>
+        </p:spPr>
+      </p:pic>
+      <p:cxnSp>
+        <p:nvCxnSpPr>
+          <p:cNvPr id="131" name="Straight Arrow Connector 130">
+            <a:extLst>
+              <a:ext uri="{FF2B5EF4-FFF2-40B4-BE49-F238E27FC236}">
+                <a16:creationId xmlns:a16="http://schemas.microsoft.com/office/drawing/2014/main" id="{117218F0-BAC0-CFE9-986F-FA2384ECD934}"/>
+              </a:ext>
+            </a:extLst>
+          </p:cNvPr>
+          <p:cNvCxnSpPr>
+            <a:cxnSpLocks/>
+            <a:stCxn id="41" idx="3"/>
+            <a:endCxn id="29" idx="1"/>
+          </p:cNvCxnSpPr>
+          <p:nvPr/>
+        </p:nvCxnSpPr>
+        <p:spPr>
+          <a:xfrm flipV="1">
+            <a:off x="2669191" y="2467022"/>
+            <a:ext cx="265281" cy="4"/>
+          </a:xfrm>
+          <a:prstGeom prst="straightConnector1">
+            <a:avLst/>
+          </a:prstGeom>
+          <a:ln w="6350">
+            <a:solidFill>
+              <a:schemeClr val="tx1"/>
+            </a:solidFill>
+            <a:tailEnd type="triangle"/>
+          </a:ln>
+        </p:spPr>
+        <p:style>
+          <a:lnRef idx="1">
+            <a:schemeClr val="accent1"/>
+          </a:lnRef>
+          <a:fillRef idx="0">
+            <a:schemeClr val="accent1"/>
+          </a:fillRef>
+          <a:effectRef idx="0">
+            <a:schemeClr val="accent1"/>
+          </a:effectRef>
+          <a:fontRef idx="minor">
+            <a:schemeClr val="tx1"/>
+          </a:fontRef>
+        </p:style>
+      </p:cxnSp>
+      <p:pic>
+        <p:nvPicPr>
+          <p:cNvPr id="133" name="Picture 132">
+            <a:extLst>
+              <a:ext uri="{FF2B5EF4-FFF2-40B4-BE49-F238E27FC236}">
+                <a16:creationId xmlns:a16="http://schemas.microsoft.com/office/drawing/2014/main" id="{04508D2E-C15C-1BAE-48AE-46187C1ED331}"/>
+              </a:ext>
+            </a:extLst>
+          </p:cNvPr>
+          <p:cNvPicPr>
+            <a:picLocks noChangeAspect="1"/>
+          </p:cNvPicPr>
+          <p:nvPr/>
+        </p:nvPicPr>
+        <p:blipFill>
+          <a:blip r:embed="rId7"/>
+          <a:stretch>
+            <a:fillRect/>
+          </a:stretch>
+        </p:blipFill>
+        <p:spPr>
+          <a:xfrm>
+            <a:off x="436083" y="1881072"/>
+            <a:ext cx="180000" cy="180000"/>
+          </a:xfrm>
+          <a:prstGeom prst="rect">
+            <a:avLst/>
+          </a:prstGeom>
+        </p:spPr>
+      </p:pic>
+      <p:cxnSp>
+        <p:nvCxnSpPr>
+          <p:cNvPr id="23" name="Straight Arrow Connector 22">
+            <a:extLst>
+              <a:ext uri="{FF2B5EF4-FFF2-40B4-BE49-F238E27FC236}">
+                <a16:creationId xmlns:a16="http://schemas.microsoft.com/office/drawing/2014/main" id="{4E91D754-D469-DFF7-C824-B8CC9C236069}"/>
+              </a:ext>
+            </a:extLst>
+          </p:cNvPr>
+          <p:cNvCxnSpPr>
+            <a:cxnSpLocks/>
+            <a:stCxn id="116" idx="3"/>
+            <a:endCxn id="144" idx="1"/>
+          </p:cNvCxnSpPr>
+          <p:nvPr/>
+        </p:nvCxnSpPr>
+        <p:spPr>
+          <a:xfrm>
+            <a:off x="206249" y="2302566"/>
+            <a:ext cx="229834" cy="0"/>
+          </a:xfrm>
+          <a:prstGeom prst="straightConnector1">
+            <a:avLst/>
+          </a:prstGeom>
+          <a:ln w="6350">
+            <a:solidFill>
+              <a:schemeClr val="tx1"/>
+            </a:solidFill>
+            <a:tailEnd type="triangle"/>
+          </a:ln>
+        </p:spPr>
+        <p:style>
+          <a:lnRef idx="1">
+            <a:schemeClr val="accent1"/>
+          </a:lnRef>
+          <a:fillRef idx="0">
+            <a:schemeClr val="accent1"/>
+          </a:fillRef>
+          <a:effectRef idx="0">
+            <a:schemeClr val="accent1"/>
+          </a:effectRef>
+          <a:fontRef idx="minor">
+            <a:schemeClr val="tx1"/>
+          </a:fontRef>
+        </p:style>
+      </p:cxnSp>
+      <p:sp>
+        <p:nvSpPr>
+          <p:cNvPr id="50" name="TextBox 49">
+            <a:extLst>
+              <a:ext uri="{FF2B5EF4-FFF2-40B4-BE49-F238E27FC236}">
+                <a16:creationId xmlns:a16="http://schemas.microsoft.com/office/drawing/2014/main" id="{E29744EC-5BF1-E344-AAAD-6BD8A57C7F50}"/>
+              </a:ext>
+            </a:extLst>
+          </p:cNvPr>
+          <p:cNvSpPr txBox="1"/>
+          <p:nvPr/>
+        </p:nvSpPr>
+        <p:spPr>
+          <a:xfrm>
+            <a:off x="2617834" y="2301754"/>
+            <a:ext cx="311069" cy="200055"/>
+          </a:xfrm>
+          <a:prstGeom prst="rect">
+            <a:avLst/>
+          </a:prstGeom>
+          <a:noFill/>
+        </p:spPr>
+        <p:txBody>
+          <a:bodyPr wrap="square" rtlCol="0">
+            <a:spAutoFit/>
+          </a:bodyPr>
+          <a:lstStyle/>
+          <a:p>
+            <a:r>
+              <a:rPr lang="en-CN" sz="700" b="1" dirty="0">
+                <a:latin typeface="Arial" panose="020B0604020202020204" pitchFamily="34" charset="0"/>
+                <a:ea typeface="JetBrains Mono" panose="02000009000000000000" pitchFamily="49" charset="0"/>
+                <a:cs typeface="Arial" panose="020B0604020202020204" pitchFamily="34" charset="0"/>
+              </a:rPr>
+              <a:t>Y</a:t>
+            </a:r>
+          </a:p>
+        </p:txBody>
+      </p:sp>
+      <p:cxnSp>
+        <p:nvCxnSpPr>
+          <p:cNvPr id="66" name="Elbow Connector 65">
+            <a:extLst>
+              <a:ext uri="{FF2B5EF4-FFF2-40B4-BE49-F238E27FC236}">
+                <a16:creationId xmlns:a16="http://schemas.microsoft.com/office/drawing/2014/main" id="{7D90F316-1866-FFE6-56D4-CF4773F1C960}"/>
+              </a:ext>
+            </a:extLst>
+          </p:cNvPr>
+          <p:cNvCxnSpPr>
+            <a:cxnSpLocks/>
+            <a:stCxn id="144" idx="3"/>
+            <a:endCxn id="122" idx="1"/>
+          </p:cNvCxnSpPr>
+          <p:nvPr/>
+        </p:nvCxnSpPr>
+        <p:spPr>
+          <a:xfrm>
+            <a:off x="616087" y="2302566"/>
+            <a:ext cx="441777" cy="164456"/>
+          </a:xfrm>
+          <a:prstGeom prst="bentConnector3">
+            <a:avLst>
+              <a:gd name="adj1" fmla="val 50000"/>
+            </a:avLst>
+          </a:prstGeom>
+          <a:ln>
+            <a:solidFill>
+              <a:schemeClr val="tx1"/>
+            </a:solidFill>
+            <a:tailEnd type="triangle"/>
+          </a:ln>
+        </p:spPr>
+        <p:style>
+          <a:lnRef idx="1">
+            <a:schemeClr val="accent1"/>
+          </a:lnRef>
+          <a:fillRef idx="0">
+            <a:schemeClr val="accent1"/>
+          </a:fillRef>
+          <a:effectRef idx="0">
+            <a:schemeClr val="accent1"/>
+          </a:effectRef>
+          <a:fontRef idx="minor">
+            <a:schemeClr val="tx1"/>
+          </a:fontRef>
+        </p:style>
+      </p:cxnSp>
+      <p:sp>
+        <p:nvSpPr>
+          <p:cNvPr id="41" name="TextBox 40">
+            <a:extLst>
+              <a:ext uri="{FF2B5EF4-FFF2-40B4-BE49-F238E27FC236}">
+                <a16:creationId xmlns:a16="http://schemas.microsoft.com/office/drawing/2014/main" id="{E766387F-B502-0510-F5C6-963FDC812F47}"/>
+              </a:ext>
+            </a:extLst>
+          </p:cNvPr>
+          <p:cNvSpPr txBox="1"/>
+          <p:nvPr/>
+        </p:nvSpPr>
+        <p:spPr>
+          <a:xfrm>
+            <a:off x="1487256" y="2366999"/>
+            <a:ext cx="1181935" cy="200055"/>
+          </a:xfrm>
+          <a:prstGeom prst="rect">
+            <a:avLst/>
+          </a:prstGeom>
+          <a:noFill/>
+          <a:ln w="6350">
+            <a:solidFill>
+              <a:schemeClr val="tx1"/>
+            </a:solidFill>
+          </a:ln>
+        </p:spPr>
+        <p:txBody>
+          <a:bodyPr wrap="square" rtlCol="0">
+            <a:spAutoFit/>
+          </a:bodyPr>
+          <a:lstStyle/>
+          <a:p>
+            <a:pPr algn="ctr"/>
+            <a:r>
+              <a:rPr lang="en-US" sz="700" b="1" dirty="0">
+                <a:latin typeface="Arial" panose="020B0604020202020204" pitchFamily="34" charset="0"/>
+                <a:ea typeface="JetBrains Mono" panose="02000009000000000000" pitchFamily="49" charset="0"/>
+                <a:cs typeface="Arial" panose="020B0604020202020204" pitchFamily="34" charset="0"/>
+              </a:rPr>
+              <a:t>IF</a:t>
+            </a:r>
+            <a:r>
+              <a:rPr lang="en-US" sz="700" dirty="0">
+                <a:latin typeface="Arial" panose="020B0604020202020204" pitchFamily="34" charset="0"/>
+                <a:ea typeface="JetBrains Mono" panose="02000009000000000000" pitchFamily="49" charset="0"/>
+                <a:cs typeface="Arial" panose="020B0604020202020204" pitchFamily="34" charset="0"/>
+              </a:rPr>
+              <a:t> </a:t>
+            </a:r>
+            <a:r>
+              <a:rPr lang="en-US" sz="700" dirty="0" err="1">
+                <a:latin typeface="Arial" panose="020B0604020202020204" pitchFamily="34" charset="0"/>
+                <a:ea typeface="JetBrains Mono" panose="02000009000000000000" pitchFamily="49" charset="0"/>
+                <a:cs typeface="Arial" panose="020B0604020202020204" pitchFamily="34" charset="0"/>
+              </a:rPr>
+              <a:t>label</a:t>
+            </a:r>
+            <a:r>
+              <a:rPr lang="en-US" sz="700" baseline="-25000" dirty="0" err="1">
+                <a:latin typeface="Arial" panose="020B0604020202020204" pitchFamily="34" charset="0"/>
+                <a:ea typeface="JetBrains Mono" panose="02000009000000000000" pitchFamily="49" charset="0"/>
+                <a:cs typeface="Arial" panose="020B0604020202020204" pitchFamily="34" charset="0"/>
+              </a:rPr>
+              <a:t>current</a:t>
+            </a:r>
+            <a:r>
+              <a:rPr lang="en-US" sz="700" dirty="0">
+                <a:latin typeface="Arial" panose="020B0604020202020204" pitchFamily="34" charset="0"/>
+                <a:ea typeface="JetBrains Mono" panose="02000009000000000000" pitchFamily="49" charset="0"/>
+                <a:cs typeface="Arial" panose="020B0604020202020204" pitchFamily="34" charset="0"/>
+              </a:rPr>
+              <a:t> == label</a:t>
+            </a:r>
+            <a:r>
+              <a:rPr lang="en-US" sz="700" baseline="-25000" dirty="0">
+                <a:latin typeface="Arial" panose="020B0604020202020204" pitchFamily="34" charset="0"/>
+                <a:ea typeface="JetBrains Mono" panose="02000009000000000000" pitchFamily="49" charset="0"/>
+                <a:cs typeface="Arial" panose="020B0604020202020204" pitchFamily="34" charset="0"/>
+              </a:rPr>
+              <a:t>GPT-4</a:t>
+            </a:r>
+            <a:endParaRPr lang="en-CN" sz="700" baseline="-25000" dirty="0">
+              <a:latin typeface="Arial" panose="020B0604020202020204" pitchFamily="34" charset="0"/>
+              <a:ea typeface="JetBrains Mono" panose="02000009000000000000" pitchFamily="49" charset="0"/>
+              <a:cs typeface="Arial" panose="020B0604020202020204" pitchFamily="34" charset="0"/>
+            </a:endParaRPr>
+          </a:p>
+        </p:txBody>
+      </p:sp>
+      <p:sp>
+        <p:nvSpPr>
+          <p:cNvPr id="70" name="TextBox 69">
+            <a:extLst>
+              <a:ext uri="{FF2B5EF4-FFF2-40B4-BE49-F238E27FC236}">
+                <a16:creationId xmlns:a16="http://schemas.microsoft.com/office/drawing/2014/main" id="{4B4625ED-DF97-AF93-BA23-17D5F6F40B2A}"/>
+              </a:ext>
+            </a:extLst>
+          </p:cNvPr>
+          <p:cNvSpPr txBox="1"/>
+          <p:nvPr/>
+        </p:nvSpPr>
+        <p:spPr>
+          <a:xfrm>
+            <a:off x="1865456" y="2163699"/>
+            <a:ext cx="311069" cy="200055"/>
+          </a:xfrm>
+          <a:prstGeom prst="rect">
+            <a:avLst/>
+          </a:prstGeom>
+          <a:noFill/>
+        </p:spPr>
+        <p:txBody>
+          <a:bodyPr wrap="square" rtlCol="0">
+            <a:spAutoFit/>
+          </a:bodyPr>
+          <a:lstStyle/>
+          <a:p>
+            <a:r>
+              <a:rPr lang="en-CN" sz="700" b="1" dirty="0">
+                <a:latin typeface="Arial" panose="020B0604020202020204" pitchFamily="34" charset="0"/>
+                <a:ea typeface="JetBrains Mono" panose="02000009000000000000" pitchFamily="49" charset="0"/>
+                <a:cs typeface="Arial" panose="020B0604020202020204" pitchFamily="34" charset="0"/>
+              </a:rPr>
+              <a:t>N</a:t>
+            </a:r>
+          </a:p>
+        </p:txBody>
+      </p:sp>
+      <p:sp>
+        <p:nvSpPr>
+          <p:cNvPr id="108" name="TextBox 107">
+            <a:extLst>
+              <a:ext uri="{FF2B5EF4-FFF2-40B4-BE49-F238E27FC236}">
+                <a16:creationId xmlns:a16="http://schemas.microsoft.com/office/drawing/2014/main" id="{BCA61F29-F8AC-651D-6227-33F03762F130}"/>
+              </a:ext>
+            </a:extLst>
+          </p:cNvPr>
+          <p:cNvSpPr txBox="1"/>
+          <p:nvPr/>
+        </p:nvSpPr>
+        <p:spPr>
+          <a:xfrm>
+            <a:off x="1214563" y="1949526"/>
+            <a:ext cx="769215" cy="200055"/>
+          </a:xfrm>
+          <a:prstGeom prst="rect">
+            <a:avLst/>
+          </a:prstGeom>
+          <a:noFill/>
+        </p:spPr>
+        <p:txBody>
+          <a:bodyPr wrap="square" rtlCol="0">
+            <a:spAutoFit/>
+          </a:bodyPr>
+          <a:lstStyle/>
+          <a:p>
+            <a:pPr algn="ctr"/>
+            <a:r>
+              <a:rPr lang="en-US" sz="700" dirty="0">
+                <a:latin typeface="Arial" panose="020B0604020202020204" pitchFamily="34" charset="0"/>
+                <a:ea typeface="JetBrains Mono" panose="02000009000000000000" pitchFamily="49" charset="0"/>
+                <a:cs typeface="Arial" panose="020B0604020202020204" pitchFamily="34" charset="0"/>
+              </a:rPr>
+              <a:t>Self-Criticism</a:t>
+            </a:r>
+            <a:endParaRPr lang="en-CN" sz="700" baseline="-25000" dirty="0">
+              <a:latin typeface="Arial" panose="020B0604020202020204" pitchFamily="34" charset="0"/>
+              <a:ea typeface="JetBrains Mono" panose="02000009000000000000" pitchFamily="49" charset="0"/>
+              <a:cs typeface="Arial" panose="020B0604020202020204" pitchFamily="34" charset="0"/>
+            </a:endParaRPr>
+          </a:p>
+        </p:txBody>
+      </p:sp>
+      <p:pic>
+        <p:nvPicPr>
+          <p:cNvPr id="8" name="Picture 7">
+            <a:extLst>
+              <a:ext uri="{FF2B5EF4-FFF2-40B4-BE49-F238E27FC236}">
+                <a16:creationId xmlns:a16="http://schemas.microsoft.com/office/drawing/2014/main" id="{CD39C81A-78A3-B149-5E16-C8D92B7D4168}"/>
+              </a:ext>
+            </a:extLst>
+          </p:cNvPr>
+          <p:cNvPicPr>
+            <a:picLocks noChangeAspect="1"/>
+          </p:cNvPicPr>
+          <p:nvPr/>
+        </p:nvPicPr>
+        <p:blipFill>
+          <a:blip r:embed="rId8"/>
+          <a:stretch>
+            <a:fillRect/>
+          </a:stretch>
+        </p:blipFill>
+        <p:spPr>
+          <a:xfrm>
+            <a:off x="746832" y="535562"/>
+            <a:ext cx="180000" cy="180000"/>
+          </a:xfrm>
+          <a:prstGeom prst="rect">
+            <a:avLst/>
+          </a:prstGeom>
+        </p:spPr>
+      </p:pic>
+      <p:pic>
+        <p:nvPicPr>
+          <p:cNvPr id="13" name="Picture 12">
+            <a:extLst>
+              <a:ext uri="{FF2B5EF4-FFF2-40B4-BE49-F238E27FC236}">
+                <a16:creationId xmlns:a16="http://schemas.microsoft.com/office/drawing/2014/main" id="{BB5D382D-596E-81C8-B07E-0853260B1203}"/>
+              </a:ext>
+            </a:extLst>
+          </p:cNvPr>
+          <p:cNvPicPr>
+            <a:picLocks noChangeAspect="1"/>
+          </p:cNvPicPr>
+          <p:nvPr/>
+        </p:nvPicPr>
+        <p:blipFill>
+          <a:blip r:embed="rId8"/>
+          <a:stretch>
+            <a:fillRect/>
+          </a:stretch>
+        </p:blipFill>
+        <p:spPr>
+          <a:xfrm>
+            <a:off x="43607" y="30746"/>
+            <a:ext cx="144000" cy="144000"/>
+          </a:xfrm>
+          <a:prstGeom prst="rect">
+            <a:avLst/>
+          </a:prstGeom>
+        </p:spPr>
+      </p:pic>
+      <p:sp>
+        <p:nvSpPr>
+          <p:cNvPr id="15" name="TextBox 14">
+            <a:extLst>
+              <a:ext uri="{FF2B5EF4-FFF2-40B4-BE49-F238E27FC236}">
+                <a16:creationId xmlns:a16="http://schemas.microsoft.com/office/drawing/2014/main" id="{B61F81FB-E64B-8C5B-7126-667D116ED721}"/>
+              </a:ext>
+            </a:extLst>
+          </p:cNvPr>
+          <p:cNvSpPr txBox="1"/>
+          <p:nvPr/>
+        </p:nvSpPr>
+        <p:spPr>
+          <a:xfrm>
+            <a:off x="158829" y="-35750"/>
+            <a:ext cx="1813075" cy="276999"/>
+          </a:xfrm>
+          <a:prstGeom prst="rect">
+            <a:avLst/>
+          </a:prstGeom>
+          <a:noFill/>
+        </p:spPr>
+        <p:txBody>
+          <a:bodyPr wrap="square" rtlCol="0">
+            <a:spAutoFit/>
+          </a:bodyPr>
+          <a:lstStyle/>
+          <a:p>
+            <a:r>
+              <a:rPr lang="en-CN" sz="600" dirty="0">
+                <a:latin typeface="Arial" panose="020B0604020202020204" pitchFamily="34" charset="0"/>
+                <a:ea typeface="JetBrains Mono" panose="02000009000000000000" pitchFamily="49" charset="0"/>
+                <a:cs typeface="Arial" panose="020B0604020202020204" pitchFamily="34" charset="0"/>
+              </a:rPr>
+              <a:t>Large Language Models (ChatGLM2-6B, Gemma-2b-it, Gemma-7b-it, Qwen1.5-7B-Chat)</a:t>
+            </a:r>
+          </a:p>
+        </p:txBody>
+      </p:sp>
+      <p:pic>
+        <p:nvPicPr>
+          <p:cNvPr id="25" name="Picture 24">
+            <a:extLst>
+              <a:ext uri="{FF2B5EF4-FFF2-40B4-BE49-F238E27FC236}">
+                <a16:creationId xmlns:a16="http://schemas.microsoft.com/office/drawing/2014/main" id="{7EABFE6A-E9CC-1ECC-3910-0515788CF6C9}"/>
+              </a:ext>
+            </a:extLst>
+          </p:cNvPr>
+          <p:cNvPicPr>
+            <a:picLocks noChangeAspect="1"/>
+          </p:cNvPicPr>
+          <p:nvPr/>
+        </p:nvPicPr>
+        <p:blipFill>
+          <a:blip r:embed="rId9"/>
+          <a:stretch>
+            <a:fillRect/>
+          </a:stretch>
+        </p:blipFill>
+        <p:spPr>
+          <a:xfrm>
+            <a:off x="1305039" y="535562"/>
+            <a:ext cx="180000" cy="180000"/>
+          </a:xfrm>
+          <a:prstGeom prst="rect">
+            <a:avLst/>
+          </a:prstGeom>
+        </p:spPr>
+      </p:pic>
+      <p:pic>
+        <p:nvPicPr>
+          <p:cNvPr id="28" name="Picture 27">
+            <a:extLst>
+              <a:ext uri="{FF2B5EF4-FFF2-40B4-BE49-F238E27FC236}">
+                <a16:creationId xmlns:a16="http://schemas.microsoft.com/office/drawing/2014/main" id="{B17F0232-6C5E-40A5-5914-C41CC66867FB}"/>
+              </a:ext>
+            </a:extLst>
+          </p:cNvPr>
+          <p:cNvPicPr>
+            <a:picLocks noChangeAspect="1"/>
+          </p:cNvPicPr>
+          <p:nvPr/>
+        </p:nvPicPr>
+        <p:blipFill>
+          <a:blip r:embed="rId10"/>
+          <a:stretch>
+            <a:fillRect/>
+          </a:stretch>
+        </p:blipFill>
+        <p:spPr>
+          <a:xfrm>
+            <a:off x="1920478" y="535562"/>
+            <a:ext cx="180000" cy="180000"/>
+          </a:xfrm>
+          <a:prstGeom prst="rect">
+            <a:avLst/>
+          </a:prstGeom>
+        </p:spPr>
+      </p:pic>
+      <p:cxnSp>
+        <p:nvCxnSpPr>
+          <p:cNvPr id="33" name="Straight Arrow Connector 32">
+            <a:extLst>
+              <a:ext uri="{FF2B5EF4-FFF2-40B4-BE49-F238E27FC236}">
+                <a16:creationId xmlns:a16="http://schemas.microsoft.com/office/drawing/2014/main" id="{8990EA93-F02D-BD0D-ABB0-CA70B768618A}"/>
+              </a:ext>
+            </a:extLst>
+          </p:cNvPr>
+          <p:cNvCxnSpPr>
+            <a:cxnSpLocks/>
+          </p:cNvCxnSpPr>
+          <p:nvPr/>
+        </p:nvCxnSpPr>
+        <p:spPr>
+          <a:xfrm>
+            <a:off x="1485039" y="625562"/>
+            <a:ext cx="435439" cy="0"/>
+          </a:xfrm>
+          <a:prstGeom prst="straightConnector1">
+            <a:avLst/>
+          </a:prstGeom>
+          <a:ln w="6350">
+            <a:solidFill>
+              <a:schemeClr val="tx1"/>
+            </a:solidFill>
+            <a:tailEnd type="triangle"/>
+          </a:ln>
+        </p:spPr>
+        <p:style>
+          <a:lnRef idx="1">
+            <a:schemeClr val="accent1"/>
+          </a:lnRef>
+          <a:fillRef idx="0">
+            <a:schemeClr val="accent1"/>
+          </a:fillRef>
+          <a:effectRef idx="0">
+            <a:schemeClr val="accent1"/>
+          </a:effectRef>
+          <a:fontRef idx="minor">
+            <a:schemeClr val="tx1"/>
+          </a:fontRef>
+        </p:style>
+      </p:cxnSp>
+      <p:cxnSp>
+        <p:nvCxnSpPr>
+          <p:cNvPr id="35" name="Straight Arrow Connector 34">
+            <a:extLst>
+              <a:ext uri="{FF2B5EF4-FFF2-40B4-BE49-F238E27FC236}">
+                <a16:creationId xmlns:a16="http://schemas.microsoft.com/office/drawing/2014/main" id="{AA517FFF-602B-B3D0-7ACF-04EB5E1C64B9}"/>
+              </a:ext>
+            </a:extLst>
+          </p:cNvPr>
+          <p:cNvCxnSpPr>
+            <a:cxnSpLocks/>
+          </p:cNvCxnSpPr>
+          <p:nvPr/>
+        </p:nvCxnSpPr>
+        <p:spPr>
+          <a:xfrm>
+            <a:off x="2100478" y="625562"/>
+            <a:ext cx="364954" cy="0"/>
+          </a:xfrm>
+          <a:prstGeom prst="straightConnector1">
+            <a:avLst/>
+          </a:prstGeom>
+          <a:ln w="6350">
+            <a:solidFill>
+              <a:schemeClr val="tx1"/>
+            </a:solidFill>
+            <a:tailEnd type="triangle"/>
+          </a:ln>
+        </p:spPr>
+        <p:style>
+          <a:lnRef idx="1">
+            <a:schemeClr val="accent1"/>
+          </a:lnRef>
+          <a:fillRef idx="0">
+            <a:schemeClr val="accent1"/>
+          </a:fillRef>
+          <a:effectRef idx="0">
+            <a:schemeClr val="accent1"/>
+          </a:effectRef>
+          <a:fontRef idx="minor">
+            <a:schemeClr val="tx1"/>
+          </a:fontRef>
+        </p:style>
+      </p:cxnSp>
+      <p:sp>
+        <p:nvSpPr>
+          <p:cNvPr id="53" name="TextBox 52">
+            <a:extLst>
+              <a:ext uri="{FF2B5EF4-FFF2-40B4-BE49-F238E27FC236}">
+                <a16:creationId xmlns:a16="http://schemas.microsoft.com/office/drawing/2014/main" id="{D15A5AAA-4FA0-AB7A-B4B2-E708229B63BA}"/>
+              </a:ext>
+            </a:extLst>
+          </p:cNvPr>
+          <p:cNvSpPr txBox="1"/>
+          <p:nvPr/>
+        </p:nvSpPr>
+        <p:spPr>
+          <a:xfrm>
+            <a:off x="1048222" y="693867"/>
+            <a:ext cx="693634" cy="184666"/>
+          </a:xfrm>
+          <a:prstGeom prst="rect">
+            <a:avLst/>
+          </a:prstGeom>
+          <a:noFill/>
+        </p:spPr>
+        <p:txBody>
+          <a:bodyPr wrap="square" rtlCol="0">
+            <a:spAutoFit/>
+          </a:bodyPr>
+          <a:lstStyle/>
+          <a:p>
+            <a:pPr algn="ctr"/>
+            <a:r>
+              <a:rPr lang="en-CN" sz="600" dirty="0">
+                <a:latin typeface="Arial" panose="020B0604020202020204" pitchFamily="34" charset="0"/>
+                <a:ea typeface="JetBrains Mono" panose="02000009000000000000" pitchFamily="49" charset="0"/>
+                <a:cs typeface="Arial" panose="020B0604020202020204" pitchFamily="34" charset="0"/>
+              </a:rPr>
+              <a:t>Pseudo-Label</a:t>
+            </a:r>
+          </a:p>
+        </p:txBody>
+      </p:sp>
+      <p:sp>
+        <p:nvSpPr>
+          <p:cNvPr id="54" name="TextBox 53">
+            <a:extLst>
+              <a:ext uri="{FF2B5EF4-FFF2-40B4-BE49-F238E27FC236}">
+                <a16:creationId xmlns:a16="http://schemas.microsoft.com/office/drawing/2014/main" id="{DCBB8342-CB22-13B5-7249-EF8127C235D0}"/>
+              </a:ext>
+            </a:extLst>
+          </p:cNvPr>
+          <p:cNvSpPr txBox="1"/>
+          <p:nvPr/>
+        </p:nvSpPr>
+        <p:spPr>
+          <a:xfrm>
+            <a:off x="1663661" y="693867"/>
+            <a:ext cx="693634" cy="184666"/>
+          </a:xfrm>
+          <a:prstGeom prst="rect">
+            <a:avLst/>
+          </a:prstGeom>
+          <a:noFill/>
+        </p:spPr>
+        <p:txBody>
+          <a:bodyPr wrap="square" rtlCol="0">
+            <a:spAutoFit/>
+          </a:bodyPr>
+          <a:lstStyle/>
+          <a:p>
+            <a:pPr algn="ctr"/>
+            <a:r>
+              <a:rPr lang="en-CN" sz="600" dirty="0">
+                <a:latin typeface="Arial" panose="020B0604020202020204" pitchFamily="34" charset="0"/>
+                <a:ea typeface="JetBrains Mono" panose="02000009000000000000" pitchFamily="49" charset="0"/>
+                <a:cs typeface="Arial" panose="020B0604020202020204" pitchFamily="34" charset="0"/>
+              </a:rPr>
+              <a:t>Majority Vote</a:t>
+            </a:r>
+          </a:p>
+        </p:txBody>
+      </p:sp>
+      <p:sp>
+        <p:nvSpPr>
+          <p:cNvPr id="56" name="TextBox 55">
+            <a:extLst>
+              <a:ext uri="{FF2B5EF4-FFF2-40B4-BE49-F238E27FC236}">
+                <a16:creationId xmlns:a16="http://schemas.microsoft.com/office/drawing/2014/main" id="{45AAFCFB-4368-64B9-DC9B-EBA939A802D2}"/>
+              </a:ext>
+            </a:extLst>
+          </p:cNvPr>
+          <p:cNvSpPr txBox="1"/>
+          <p:nvPr/>
+        </p:nvSpPr>
+        <p:spPr>
+          <a:xfrm>
+            <a:off x="112690" y="1207806"/>
+            <a:ext cx="422711" cy="200055"/>
+          </a:xfrm>
+          <a:prstGeom prst="rect">
+            <a:avLst/>
+          </a:prstGeom>
+          <a:noFill/>
+        </p:spPr>
+        <p:txBody>
+          <a:bodyPr wrap="square" rtlCol="0">
+            <a:spAutoFit/>
+          </a:bodyPr>
+          <a:lstStyle/>
+          <a:p>
+            <a:pPr algn="ctr"/>
+            <a:r>
+              <a:rPr lang="en-CN" sz="700" dirty="0">
+                <a:latin typeface="Arial" panose="020B0604020202020204" pitchFamily="34" charset="0"/>
+                <a:ea typeface="JetBrains Mono" panose="02000009000000000000" pitchFamily="49" charset="0"/>
+                <a:cs typeface="Arial" panose="020B0604020202020204" pitchFamily="34" charset="0"/>
+              </a:rPr>
+              <a:t>(</a:t>
+            </a:r>
+            <a:r>
+              <a:rPr lang="en-CN" sz="700" i="1" dirty="0">
+                <a:latin typeface="Times New Roman" panose="02020603050405020304" pitchFamily="18" charset="0"/>
+                <a:ea typeface="JetBrains Mono" panose="02000009000000000000" pitchFamily="49" charset="0"/>
+                <a:cs typeface="Times New Roman" panose="02020603050405020304" pitchFamily="18" charset="0"/>
+              </a:rPr>
+              <a:t>D</a:t>
+            </a:r>
+            <a:r>
+              <a:rPr lang="en-CN" sz="700" baseline="-25000" dirty="0">
+                <a:latin typeface="Arial" panose="020B0604020202020204" pitchFamily="34" charset="0"/>
+                <a:ea typeface="JetBrains Mono" panose="02000009000000000000" pitchFamily="49" charset="0"/>
+                <a:cs typeface="Arial" panose="020B0604020202020204" pitchFamily="34" charset="0"/>
+              </a:rPr>
+              <a:t>all</a:t>
+            </a:r>
+            <a:r>
+              <a:rPr lang="en-CN" sz="700" dirty="0">
+                <a:latin typeface="Arial" panose="020B0604020202020204" pitchFamily="34" charset="0"/>
+                <a:ea typeface="JetBrains Mono" panose="02000009000000000000" pitchFamily="49" charset="0"/>
+                <a:cs typeface="Arial" panose="020B0604020202020204" pitchFamily="34" charset="0"/>
+              </a:rPr>
+              <a:t>)</a:t>
+            </a:r>
+          </a:p>
+        </p:txBody>
+      </p:sp>
+      <p:sp>
+        <p:nvSpPr>
+          <p:cNvPr id="57" name="TextBox 56">
+            <a:extLst>
+              <a:ext uri="{FF2B5EF4-FFF2-40B4-BE49-F238E27FC236}">
+                <a16:creationId xmlns:a16="http://schemas.microsoft.com/office/drawing/2014/main" id="{5DACA691-5067-EC46-708A-472BCB09409A}"/>
+              </a:ext>
+            </a:extLst>
+          </p:cNvPr>
+          <p:cNvSpPr txBox="1"/>
+          <p:nvPr/>
+        </p:nvSpPr>
+        <p:spPr>
+          <a:xfrm>
+            <a:off x="6828" y="897360"/>
+            <a:ext cx="2246906" cy="200055"/>
+          </a:xfrm>
+          <a:prstGeom prst="rect">
+            <a:avLst/>
+          </a:prstGeom>
+          <a:noFill/>
+        </p:spPr>
+        <p:txBody>
+          <a:bodyPr wrap="square" rtlCol="0">
+            <a:spAutoFit/>
+          </a:bodyPr>
+          <a:lstStyle/>
+          <a:p>
+            <a:r>
+              <a:rPr lang="en-CN" sz="700" dirty="0">
+                <a:latin typeface="Arial" panose="020B0604020202020204" pitchFamily="34" charset="0"/>
+                <a:ea typeface="JetBrains Mono" panose="02000009000000000000" pitchFamily="49" charset="0"/>
+                <a:cs typeface="Arial" panose="020B0604020202020204" pitchFamily="34" charset="0"/>
+              </a:rPr>
+              <a:t>(b) Knowledge Distillation of ChatGPT</a:t>
+            </a:r>
+          </a:p>
+        </p:txBody>
+      </p:sp>
+      <p:sp>
+        <p:nvSpPr>
+          <p:cNvPr id="58" name="TextBox 57">
+            <a:extLst>
+              <a:ext uri="{FF2B5EF4-FFF2-40B4-BE49-F238E27FC236}">
+                <a16:creationId xmlns:a16="http://schemas.microsoft.com/office/drawing/2014/main" id="{495BAE52-E386-D807-DC34-5FFF9CBC0825}"/>
+              </a:ext>
+            </a:extLst>
+          </p:cNvPr>
+          <p:cNvSpPr txBox="1"/>
+          <p:nvPr/>
+        </p:nvSpPr>
+        <p:spPr>
+          <a:xfrm>
+            <a:off x="767896" y="1078693"/>
+            <a:ext cx="1380157" cy="276999"/>
+          </a:xfrm>
+          <a:prstGeom prst="rect">
+            <a:avLst/>
+          </a:prstGeom>
+          <a:noFill/>
+        </p:spPr>
+        <p:txBody>
+          <a:bodyPr wrap="square" rtlCol="0">
+            <a:spAutoFit/>
+          </a:bodyPr>
+          <a:lstStyle/>
+          <a:p>
+            <a:r>
+              <a:rPr lang="en-CN" sz="600" b="1" dirty="0">
+                <a:latin typeface="Arial" panose="020B0604020202020204" pitchFamily="34" charset="0"/>
+                <a:ea typeface="JetBrains Mono" panose="02000009000000000000" pitchFamily="49" charset="0"/>
+                <a:cs typeface="Arial" panose="020B0604020202020204" pitchFamily="34" charset="0"/>
+              </a:rPr>
+              <a:t>FOR</a:t>
+            </a:r>
+            <a:r>
+              <a:rPr lang="en-CN" sz="600" dirty="0">
+                <a:latin typeface="Arial" panose="020B0604020202020204" pitchFamily="34" charset="0"/>
+                <a:ea typeface="JetBrains Mono" panose="02000009000000000000" pitchFamily="49" charset="0"/>
+                <a:cs typeface="Arial" panose="020B0604020202020204" pitchFamily="34" charset="0"/>
+              </a:rPr>
+              <a:t> each item in </a:t>
+            </a:r>
+            <a:r>
+              <a:rPr lang="en-CN" sz="600" i="1" dirty="0">
+                <a:latin typeface="Times New Roman" panose="02020603050405020304" pitchFamily="18" charset="0"/>
+                <a:ea typeface="JetBrains Mono" panose="02000009000000000000" pitchFamily="49" charset="0"/>
+                <a:cs typeface="Times New Roman" panose="02020603050405020304" pitchFamily="18" charset="0"/>
+              </a:rPr>
+              <a:t>D</a:t>
+            </a:r>
+            <a:r>
+              <a:rPr lang="en-CN" sz="600" baseline="-25000" dirty="0">
+                <a:latin typeface="Arial" panose="020B0604020202020204" pitchFamily="34" charset="0"/>
+                <a:ea typeface="JetBrains Mono" panose="02000009000000000000" pitchFamily="49" charset="0"/>
+                <a:cs typeface="Arial" panose="020B0604020202020204" pitchFamily="34" charset="0"/>
+              </a:rPr>
+              <a:t>all</a:t>
+            </a:r>
+            <a:r>
+              <a:rPr lang="en-CN" sz="600" dirty="0">
+                <a:latin typeface="Arial" panose="020B0604020202020204" pitchFamily="34" charset="0"/>
+                <a:ea typeface="JetBrains Mono" panose="02000009000000000000" pitchFamily="49" charset="0"/>
+                <a:cs typeface="Arial" panose="020B0604020202020204" pitchFamily="34" charset="0"/>
+              </a:rPr>
+              <a:t> </a:t>
+            </a:r>
+          </a:p>
+          <a:p>
+            <a:r>
+              <a:rPr lang="en-CN" sz="600" dirty="0">
+                <a:latin typeface="Arial" panose="020B0604020202020204" pitchFamily="34" charset="0"/>
+                <a:ea typeface="JetBrains Mono" panose="02000009000000000000" pitchFamily="49" charset="0"/>
+                <a:cs typeface="Arial" panose="020B0604020202020204" pitchFamily="34" charset="0"/>
+              </a:rPr>
+              <a:t>  </a:t>
+            </a:r>
+            <a:r>
+              <a:rPr lang="en-CN" sz="600" b="1" dirty="0">
+                <a:latin typeface="Arial" panose="020B0604020202020204" pitchFamily="34" charset="0"/>
+                <a:ea typeface="JetBrains Mono" panose="02000009000000000000" pitchFamily="49" charset="0"/>
+                <a:cs typeface="Arial" panose="020B0604020202020204" pitchFamily="34" charset="0"/>
+              </a:rPr>
+              <a:t>WHILE</a:t>
+            </a:r>
+            <a:r>
+              <a:rPr lang="en-CN" sz="600" dirty="0">
+                <a:latin typeface="Arial" panose="020B0604020202020204" pitchFamily="34" charset="0"/>
+                <a:ea typeface="JetBrains Mono" panose="02000009000000000000" pitchFamily="49" charset="0"/>
+                <a:cs typeface="Arial" panose="020B0604020202020204" pitchFamily="34" charset="0"/>
+              </a:rPr>
+              <a:t> Pseudo-Label is None </a:t>
+            </a:r>
+          </a:p>
+        </p:txBody>
+      </p:sp>
+      <p:pic>
+        <p:nvPicPr>
+          <p:cNvPr id="59" name="Graphic 58">
+            <a:extLst>
+              <a:ext uri="{FF2B5EF4-FFF2-40B4-BE49-F238E27FC236}">
+                <a16:creationId xmlns:a16="http://schemas.microsoft.com/office/drawing/2014/main" id="{20198611-AB9E-B3C0-4180-7AAAD792238E}"/>
+              </a:ext>
+            </a:extLst>
+          </p:cNvPr>
+          <p:cNvPicPr>
+            <a:picLocks noChangeAspect="1"/>
+          </p:cNvPicPr>
+          <p:nvPr/>
+        </p:nvPicPr>
+        <p:blipFill>
+          <a:blip r:embed="rId3">
+            <a:extLst>
+              <a:ext uri="{96DAC541-7B7A-43D3-8B79-37D633B846F1}">
+                <asvg:svgBlip xmlns:asvg="http://schemas.microsoft.com/office/drawing/2016/SVG/main" r:embed="rId4"/>
+              </a:ext>
+            </a:extLst>
+          </a:blip>
+          <a:stretch>
+            <a:fillRect/>
+          </a:stretch>
+        </p:blipFill>
+        <p:spPr>
+          <a:xfrm>
+            <a:off x="2179643" y="1243154"/>
+            <a:ext cx="180000" cy="180000"/>
+          </a:xfrm>
+          <a:prstGeom prst="rect">
+            <a:avLst/>
+          </a:prstGeom>
+        </p:spPr>
+      </p:pic>
+      <p:cxnSp>
+        <p:nvCxnSpPr>
+          <p:cNvPr id="60" name="Straight Arrow Connector 59">
+            <a:extLst>
+              <a:ext uri="{FF2B5EF4-FFF2-40B4-BE49-F238E27FC236}">
+                <a16:creationId xmlns:a16="http://schemas.microsoft.com/office/drawing/2014/main" id="{FC8C001F-D85E-F495-25CF-8744700E780F}"/>
+              </a:ext>
+            </a:extLst>
+          </p:cNvPr>
+          <p:cNvCxnSpPr>
+            <a:cxnSpLocks/>
+            <a:stCxn id="55" idx="3"/>
+            <a:endCxn id="59" idx="1"/>
+          </p:cNvCxnSpPr>
+          <p:nvPr/>
+        </p:nvCxnSpPr>
+        <p:spPr>
+          <a:xfrm>
+            <a:off x="643191" y="1333154"/>
+            <a:ext cx="1536452" cy="0"/>
+          </a:xfrm>
+          <a:prstGeom prst="straightConnector1">
+            <a:avLst/>
+          </a:prstGeom>
+          <a:ln w="6350">
+            <a:solidFill>
+              <a:schemeClr val="tx1"/>
+            </a:solidFill>
+            <a:tailEnd type="triangle"/>
+          </a:ln>
+        </p:spPr>
+        <p:style>
+          <a:lnRef idx="1">
+            <a:schemeClr val="accent1"/>
+          </a:lnRef>
+          <a:fillRef idx="0">
+            <a:schemeClr val="accent1"/>
+          </a:fillRef>
+          <a:effectRef idx="0">
+            <a:schemeClr val="accent1"/>
+          </a:effectRef>
+          <a:fontRef idx="minor">
+            <a:schemeClr val="tx1"/>
+          </a:fontRef>
+        </p:style>
+      </p:cxnSp>
+      <p:pic>
+        <p:nvPicPr>
+          <p:cNvPr id="72" name="Picture 71">
+            <a:extLst>
+              <a:ext uri="{FF2B5EF4-FFF2-40B4-BE49-F238E27FC236}">
+                <a16:creationId xmlns:a16="http://schemas.microsoft.com/office/drawing/2014/main" id="{C81CCAF3-E689-E848-8FAE-01F346F90D0B}"/>
+              </a:ext>
+            </a:extLst>
+          </p:cNvPr>
+          <p:cNvPicPr>
+            <a:picLocks noChangeAspect="1"/>
+          </p:cNvPicPr>
+          <p:nvPr/>
+        </p:nvPicPr>
+        <p:blipFill>
+          <a:blip r:embed="rId9"/>
+          <a:stretch>
+            <a:fillRect/>
+          </a:stretch>
+        </p:blipFill>
+        <p:spPr>
+          <a:xfrm>
+            <a:off x="2730833" y="1243154"/>
+            <a:ext cx="180000" cy="180000"/>
+          </a:xfrm>
+          <a:prstGeom prst="rect">
+            <a:avLst/>
+          </a:prstGeom>
+        </p:spPr>
+      </p:pic>
+      <p:sp>
+        <p:nvSpPr>
+          <p:cNvPr id="73" name="TextBox 72">
+            <a:extLst>
+              <a:ext uri="{FF2B5EF4-FFF2-40B4-BE49-F238E27FC236}">
+                <a16:creationId xmlns:a16="http://schemas.microsoft.com/office/drawing/2014/main" id="{53FBCC47-67A6-92BF-8BFA-715319272D77}"/>
+              </a:ext>
+            </a:extLst>
+          </p:cNvPr>
+          <p:cNvSpPr txBox="1"/>
+          <p:nvPr/>
+        </p:nvSpPr>
+        <p:spPr>
+          <a:xfrm>
+            <a:off x="2474016" y="1045980"/>
+            <a:ext cx="693634" cy="184666"/>
+          </a:xfrm>
+          <a:prstGeom prst="rect">
+            <a:avLst/>
+          </a:prstGeom>
+          <a:noFill/>
+        </p:spPr>
+        <p:txBody>
+          <a:bodyPr wrap="square" rtlCol="0">
+            <a:spAutoFit/>
+          </a:bodyPr>
+          <a:lstStyle/>
+          <a:p>
+            <a:pPr algn="ctr"/>
+            <a:r>
+              <a:rPr lang="en-CN" sz="600" dirty="0">
+                <a:latin typeface="Arial" panose="020B0604020202020204" pitchFamily="34" charset="0"/>
+                <a:ea typeface="JetBrains Mono" panose="02000009000000000000" pitchFamily="49" charset="0"/>
+                <a:cs typeface="Arial" panose="020B0604020202020204" pitchFamily="34" charset="0"/>
+              </a:rPr>
+              <a:t>Pseudo-Label</a:t>
+            </a:r>
+          </a:p>
+        </p:txBody>
+      </p:sp>
+      <p:cxnSp>
+        <p:nvCxnSpPr>
+          <p:cNvPr id="74" name="Straight Arrow Connector 73">
+            <a:extLst>
+              <a:ext uri="{FF2B5EF4-FFF2-40B4-BE49-F238E27FC236}">
+                <a16:creationId xmlns:a16="http://schemas.microsoft.com/office/drawing/2014/main" id="{0166C378-76F8-3933-236B-D6A0862D5526}"/>
+              </a:ext>
+            </a:extLst>
+          </p:cNvPr>
+          <p:cNvCxnSpPr>
+            <a:cxnSpLocks/>
+            <a:stCxn id="59" idx="3"/>
+            <a:endCxn id="72" idx="1"/>
+          </p:cNvCxnSpPr>
+          <p:nvPr/>
+        </p:nvCxnSpPr>
+        <p:spPr>
+          <a:xfrm>
+            <a:off x="2359643" y="1333154"/>
+            <a:ext cx="371190" cy="0"/>
+          </a:xfrm>
+          <a:prstGeom prst="straightConnector1">
+            <a:avLst/>
+          </a:prstGeom>
+          <a:ln w="6350">
+            <a:solidFill>
+              <a:schemeClr val="tx1"/>
+            </a:solidFill>
+            <a:tailEnd type="triangle"/>
+          </a:ln>
+        </p:spPr>
+        <p:style>
+          <a:lnRef idx="1">
+            <a:schemeClr val="accent1"/>
+          </a:lnRef>
+          <a:fillRef idx="0">
+            <a:schemeClr val="accent1"/>
+          </a:fillRef>
+          <a:effectRef idx="0">
+            <a:schemeClr val="accent1"/>
+          </a:effectRef>
+          <a:fontRef idx="minor">
+            <a:schemeClr val="tx1"/>
+          </a:fontRef>
+        </p:style>
+      </p:cxnSp>
+      <p:cxnSp>
+        <p:nvCxnSpPr>
+          <p:cNvPr id="78" name="Elbow Connector 77">
+            <a:extLst>
+              <a:ext uri="{FF2B5EF4-FFF2-40B4-BE49-F238E27FC236}">
+                <a16:creationId xmlns:a16="http://schemas.microsoft.com/office/drawing/2014/main" id="{DD41D6DF-1802-D1C2-2A7D-86A4FC15A3EA}"/>
+              </a:ext>
+            </a:extLst>
+          </p:cNvPr>
+          <p:cNvCxnSpPr>
+            <a:cxnSpLocks/>
+            <a:stCxn id="72" idx="2"/>
+            <a:endCxn id="55" idx="2"/>
+          </p:cNvCxnSpPr>
+          <p:nvPr/>
+        </p:nvCxnSpPr>
+        <p:spPr>
+          <a:xfrm rot="5400000">
+            <a:off x="1687012" y="289333"/>
+            <a:ext cx="12700" cy="2267642"/>
+          </a:xfrm>
+          <a:prstGeom prst="bentConnector3">
+            <a:avLst>
+              <a:gd name="adj1" fmla="val 1800000"/>
+            </a:avLst>
+          </a:prstGeom>
+          <a:ln>
+            <a:solidFill>
+              <a:schemeClr val="tx1"/>
+            </a:solidFill>
+            <a:tailEnd type="triangle"/>
+          </a:ln>
+        </p:spPr>
+        <p:style>
+          <a:lnRef idx="1">
+            <a:schemeClr val="accent1"/>
+          </a:lnRef>
+          <a:fillRef idx="0">
+            <a:schemeClr val="accent1"/>
+          </a:fillRef>
+          <a:effectRef idx="0">
+            <a:schemeClr val="accent1"/>
+          </a:effectRef>
+          <a:fontRef idx="minor">
+            <a:schemeClr val="tx1"/>
+          </a:fontRef>
+        </p:style>
+      </p:cxnSp>
+      <p:pic>
+        <p:nvPicPr>
+          <p:cNvPr id="55" name="Picture 54">
+            <a:extLst>
+              <a:ext uri="{FF2B5EF4-FFF2-40B4-BE49-F238E27FC236}">
+                <a16:creationId xmlns:a16="http://schemas.microsoft.com/office/drawing/2014/main" id="{E1727E92-0C56-FC8C-56D1-3F0D35BA8884}"/>
+              </a:ext>
+            </a:extLst>
+          </p:cNvPr>
+          <p:cNvPicPr>
+            <a:picLocks noChangeAspect="1"/>
+          </p:cNvPicPr>
+          <p:nvPr/>
+        </p:nvPicPr>
+        <p:blipFill>
+          <a:blip r:embed="rId7"/>
+          <a:stretch>
+            <a:fillRect/>
+          </a:stretch>
+        </p:blipFill>
+        <p:spPr>
+          <a:xfrm>
+            <a:off x="463191" y="1243154"/>
+            <a:ext cx="180000" cy="180000"/>
+          </a:xfrm>
+          <a:prstGeom prst="rect">
+            <a:avLst/>
+          </a:prstGeom>
+        </p:spPr>
+      </p:pic>
+      <p:sp>
+        <p:nvSpPr>
+          <p:cNvPr id="106" name="TextBox 105">
+            <a:extLst>
+              <a:ext uri="{FF2B5EF4-FFF2-40B4-BE49-F238E27FC236}">
+                <a16:creationId xmlns:a16="http://schemas.microsoft.com/office/drawing/2014/main" id="{4E5F7D60-83E1-BCE8-E12E-CB00925CC5F4}"/>
+              </a:ext>
+            </a:extLst>
+          </p:cNvPr>
+          <p:cNvSpPr txBox="1"/>
+          <p:nvPr/>
+        </p:nvSpPr>
+        <p:spPr>
+          <a:xfrm>
+            <a:off x="1039710" y="1464862"/>
+            <a:ext cx="1020401" cy="184666"/>
+          </a:xfrm>
+          <a:prstGeom prst="rect">
+            <a:avLst/>
+          </a:prstGeom>
+          <a:noFill/>
+        </p:spPr>
+        <p:txBody>
+          <a:bodyPr wrap="square" rtlCol="0">
+            <a:spAutoFit/>
+          </a:bodyPr>
+          <a:lstStyle/>
+          <a:p>
+            <a:r>
+              <a:rPr lang="en-CN" sz="600" b="1" dirty="0">
+                <a:latin typeface="Arial" panose="020B0604020202020204" pitchFamily="34" charset="0"/>
+                <a:ea typeface="JetBrains Mono" panose="02000009000000000000" pitchFamily="49" charset="0"/>
+                <a:cs typeface="Arial" panose="020B0604020202020204" pitchFamily="34" charset="0"/>
+              </a:rPr>
+              <a:t>UPDATE</a:t>
+            </a:r>
+            <a:r>
+              <a:rPr lang="en-CN" sz="600" dirty="0">
+                <a:latin typeface="Arial" panose="020B0604020202020204" pitchFamily="34" charset="0"/>
+                <a:ea typeface="JetBrains Mono" panose="02000009000000000000" pitchFamily="49" charset="0"/>
+                <a:cs typeface="Arial" panose="020B0604020202020204" pitchFamily="34" charset="0"/>
+              </a:rPr>
+              <a:t> the label in </a:t>
+            </a:r>
+            <a:r>
+              <a:rPr lang="en-CN" sz="600" i="1" dirty="0">
+                <a:latin typeface="Times New Roman" panose="02020603050405020304" pitchFamily="18" charset="0"/>
+                <a:ea typeface="JetBrains Mono" panose="02000009000000000000" pitchFamily="49" charset="0"/>
+                <a:cs typeface="Times New Roman" panose="02020603050405020304" pitchFamily="18" charset="0"/>
+              </a:rPr>
+              <a:t>D</a:t>
+            </a:r>
+            <a:r>
+              <a:rPr lang="en-CN" sz="600" baseline="-25000" dirty="0">
+                <a:latin typeface="Arial" panose="020B0604020202020204" pitchFamily="34" charset="0"/>
+                <a:ea typeface="JetBrains Mono" panose="02000009000000000000" pitchFamily="49" charset="0"/>
+                <a:cs typeface="Arial" panose="020B0604020202020204" pitchFamily="34" charset="0"/>
+              </a:rPr>
+              <a:t>all</a:t>
+            </a:r>
+            <a:endParaRPr lang="en-CN" sz="600" dirty="0">
+              <a:latin typeface="Arial" panose="020B0604020202020204" pitchFamily="34" charset="0"/>
+              <a:ea typeface="JetBrains Mono" panose="02000009000000000000" pitchFamily="49" charset="0"/>
+              <a:cs typeface="Arial" panose="020B0604020202020204" pitchFamily="34" charset="0"/>
+            </a:endParaRPr>
+          </a:p>
+        </p:txBody>
+      </p:sp>
+      <p:pic>
+        <p:nvPicPr>
+          <p:cNvPr id="116" name="Picture 115">
+            <a:extLst>
+              <a:ext uri="{FF2B5EF4-FFF2-40B4-BE49-F238E27FC236}">
+                <a16:creationId xmlns:a16="http://schemas.microsoft.com/office/drawing/2014/main" id="{80F2E6C8-1E05-A263-E465-28D0E51BF35D}"/>
+              </a:ext>
+            </a:extLst>
+          </p:cNvPr>
+          <p:cNvPicPr>
+            <a:picLocks noChangeAspect="1"/>
+          </p:cNvPicPr>
+          <p:nvPr/>
+        </p:nvPicPr>
+        <p:blipFill>
+          <a:blip r:embed="rId7"/>
+          <a:stretch>
+            <a:fillRect/>
+          </a:stretch>
+        </p:blipFill>
+        <p:spPr>
+          <a:xfrm>
+            <a:off x="26249" y="2212566"/>
+            <a:ext cx="180000" cy="180000"/>
+          </a:xfrm>
+          <a:prstGeom prst="rect">
+            <a:avLst/>
+          </a:prstGeom>
+        </p:spPr>
+      </p:pic>
+      <p:sp>
+        <p:nvSpPr>
+          <p:cNvPr id="142" name="TextBox 141">
+            <a:extLst>
+              <a:ext uri="{FF2B5EF4-FFF2-40B4-BE49-F238E27FC236}">
+                <a16:creationId xmlns:a16="http://schemas.microsoft.com/office/drawing/2014/main" id="{45935C03-9426-D6FD-037E-65D61D0C7061}"/>
+              </a:ext>
+            </a:extLst>
+          </p:cNvPr>
+          <p:cNvSpPr txBox="1"/>
+          <p:nvPr/>
+        </p:nvSpPr>
+        <p:spPr>
+          <a:xfrm>
+            <a:off x="-95106" y="2352811"/>
+            <a:ext cx="422711" cy="200055"/>
+          </a:xfrm>
+          <a:prstGeom prst="rect">
+            <a:avLst/>
+          </a:prstGeom>
+          <a:noFill/>
+        </p:spPr>
+        <p:txBody>
+          <a:bodyPr wrap="square" rtlCol="0">
+            <a:spAutoFit/>
+          </a:bodyPr>
+          <a:lstStyle/>
+          <a:p>
+            <a:pPr algn="ctr"/>
+            <a:r>
+              <a:rPr lang="en-CN" sz="700" dirty="0">
+                <a:latin typeface="Arial" panose="020B0604020202020204" pitchFamily="34" charset="0"/>
+                <a:ea typeface="JetBrains Mono" panose="02000009000000000000" pitchFamily="49" charset="0"/>
+                <a:cs typeface="Arial" panose="020B0604020202020204" pitchFamily="34" charset="0"/>
+              </a:rPr>
+              <a:t>(</a:t>
+            </a:r>
+            <a:r>
+              <a:rPr lang="en-CN" sz="700" i="1" dirty="0">
+                <a:latin typeface="Times New Roman" panose="02020603050405020304" pitchFamily="18" charset="0"/>
+                <a:ea typeface="JetBrains Mono" panose="02000009000000000000" pitchFamily="49" charset="0"/>
+                <a:cs typeface="Times New Roman" panose="02020603050405020304" pitchFamily="18" charset="0"/>
+              </a:rPr>
+              <a:t>D</a:t>
+            </a:r>
+            <a:r>
+              <a:rPr lang="en-CN" sz="700" baseline="-25000" dirty="0">
+                <a:latin typeface="Arial" panose="020B0604020202020204" pitchFamily="34" charset="0"/>
+                <a:ea typeface="JetBrains Mono" panose="02000009000000000000" pitchFamily="49" charset="0"/>
+                <a:cs typeface="Arial" panose="020B0604020202020204" pitchFamily="34" charset="0"/>
+              </a:rPr>
+              <a:t>all</a:t>
+            </a:r>
+            <a:r>
+              <a:rPr lang="en-CN" sz="700" dirty="0">
+                <a:latin typeface="Arial" panose="020B0604020202020204" pitchFamily="34" charset="0"/>
+                <a:ea typeface="JetBrains Mono" panose="02000009000000000000" pitchFamily="49" charset="0"/>
+                <a:cs typeface="Arial" panose="020B0604020202020204" pitchFamily="34" charset="0"/>
+              </a:rPr>
+              <a:t>)</a:t>
+            </a:r>
+          </a:p>
+        </p:txBody>
+      </p:sp>
+      <p:sp>
+        <p:nvSpPr>
+          <p:cNvPr id="148" name="TextBox 147">
+            <a:extLst>
+              <a:ext uri="{FF2B5EF4-FFF2-40B4-BE49-F238E27FC236}">
+                <a16:creationId xmlns:a16="http://schemas.microsoft.com/office/drawing/2014/main" id="{E1782F94-0776-DC64-548C-9AF438552193}"/>
+              </a:ext>
+            </a:extLst>
+          </p:cNvPr>
+          <p:cNvSpPr txBox="1"/>
+          <p:nvPr/>
+        </p:nvSpPr>
+        <p:spPr>
+          <a:xfrm>
+            <a:off x="314732" y="2001262"/>
+            <a:ext cx="422711" cy="200055"/>
+          </a:xfrm>
+          <a:prstGeom prst="rect">
+            <a:avLst/>
+          </a:prstGeom>
+          <a:noFill/>
+        </p:spPr>
+        <p:txBody>
+          <a:bodyPr wrap="square" rtlCol="0">
+            <a:spAutoFit/>
+          </a:bodyPr>
+          <a:lstStyle/>
+          <a:p>
+            <a:pPr algn="ctr"/>
+            <a:r>
+              <a:rPr lang="en-CN" sz="700" dirty="0">
+                <a:latin typeface="Arial" panose="020B0604020202020204" pitchFamily="34" charset="0"/>
+                <a:ea typeface="JetBrains Mono" panose="02000009000000000000" pitchFamily="49" charset="0"/>
+                <a:cs typeface="Arial" panose="020B0604020202020204" pitchFamily="34" charset="0"/>
+              </a:rPr>
+              <a:t>(</a:t>
+            </a:r>
+            <a:r>
+              <a:rPr lang="en-CN" sz="700" i="1" dirty="0">
+                <a:latin typeface="Times New Roman" panose="02020603050405020304" pitchFamily="18" charset="0"/>
+                <a:ea typeface="JetBrains Mono" panose="02000009000000000000" pitchFamily="49" charset="0"/>
+                <a:cs typeface="Times New Roman" panose="02020603050405020304" pitchFamily="18" charset="0"/>
+              </a:rPr>
+              <a:t>D</a:t>
+            </a:r>
+            <a:r>
+              <a:rPr lang="en-CN" sz="700" baseline="-25000" dirty="0">
+                <a:latin typeface="Arial" panose="020B0604020202020204" pitchFamily="34" charset="0"/>
+                <a:ea typeface="JetBrains Mono" panose="02000009000000000000" pitchFamily="49" charset="0"/>
+                <a:cs typeface="Arial" panose="020B0604020202020204" pitchFamily="34" charset="0"/>
+              </a:rPr>
+              <a:t>train</a:t>
+            </a:r>
+            <a:r>
+              <a:rPr lang="en-CN" sz="700" dirty="0">
+                <a:latin typeface="Arial" panose="020B0604020202020204" pitchFamily="34" charset="0"/>
+                <a:ea typeface="JetBrains Mono" panose="02000009000000000000" pitchFamily="49" charset="0"/>
+                <a:cs typeface="Arial" panose="020B0604020202020204" pitchFamily="34" charset="0"/>
+              </a:rPr>
+              <a:t>)</a:t>
+            </a:r>
+          </a:p>
+        </p:txBody>
+      </p:sp>
+      <p:sp>
+        <p:nvSpPr>
+          <p:cNvPr id="149" name="TextBox 148">
+            <a:extLst>
+              <a:ext uri="{FF2B5EF4-FFF2-40B4-BE49-F238E27FC236}">
+                <a16:creationId xmlns:a16="http://schemas.microsoft.com/office/drawing/2014/main" id="{34ADBB54-1AB0-EE4E-8B75-ADE6113B0437}"/>
+              </a:ext>
+            </a:extLst>
+          </p:cNvPr>
+          <p:cNvSpPr txBox="1"/>
+          <p:nvPr/>
+        </p:nvSpPr>
+        <p:spPr>
+          <a:xfrm>
+            <a:off x="296080" y="2348162"/>
+            <a:ext cx="460006" cy="200055"/>
+          </a:xfrm>
+          <a:prstGeom prst="rect">
+            <a:avLst/>
+          </a:prstGeom>
+          <a:noFill/>
+        </p:spPr>
+        <p:txBody>
+          <a:bodyPr wrap="square" rtlCol="0">
+            <a:spAutoFit/>
+          </a:bodyPr>
+          <a:lstStyle/>
+          <a:p>
+            <a:r>
+              <a:rPr lang="en-CN" sz="700" dirty="0">
+                <a:latin typeface="Arial" panose="020B0604020202020204" pitchFamily="34" charset="0"/>
+                <a:ea typeface="JetBrains Mono" panose="02000009000000000000" pitchFamily="49" charset="0"/>
+                <a:cs typeface="Arial" panose="020B0604020202020204" pitchFamily="34" charset="0"/>
+              </a:rPr>
+              <a:t>(</a:t>
+            </a:r>
+            <a:r>
+              <a:rPr lang="en-CN" sz="700" i="1" dirty="0">
+                <a:latin typeface="Times New Roman" panose="02020603050405020304" pitchFamily="18" charset="0"/>
+                <a:ea typeface="JetBrains Mono" panose="02000009000000000000" pitchFamily="49" charset="0"/>
+                <a:cs typeface="Times New Roman" panose="02020603050405020304" pitchFamily="18" charset="0"/>
+              </a:rPr>
+              <a:t>D</a:t>
+            </a:r>
+            <a:r>
+              <a:rPr lang="en-CN" sz="700" baseline="-25000" dirty="0">
+                <a:latin typeface="Arial" panose="020B0604020202020204" pitchFamily="34" charset="0"/>
+                <a:ea typeface="JetBrains Mono" panose="02000009000000000000" pitchFamily="49" charset="0"/>
+                <a:cs typeface="Arial" panose="020B0604020202020204" pitchFamily="34" charset="0"/>
+              </a:rPr>
+              <a:t>valid</a:t>
+            </a:r>
+            <a:r>
+              <a:rPr lang="en-CN" sz="700" dirty="0">
+                <a:latin typeface="Arial" panose="020B0604020202020204" pitchFamily="34" charset="0"/>
+                <a:ea typeface="JetBrains Mono" panose="02000009000000000000" pitchFamily="49" charset="0"/>
+                <a:cs typeface="Arial" panose="020B0604020202020204" pitchFamily="34" charset="0"/>
+              </a:rPr>
+              <a:t>)</a:t>
+            </a:r>
+          </a:p>
+        </p:txBody>
+      </p:sp>
+      <p:sp>
+        <p:nvSpPr>
+          <p:cNvPr id="150" name="TextBox 149">
+            <a:extLst>
+              <a:ext uri="{FF2B5EF4-FFF2-40B4-BE49-F238E27FC236}">
+                <a16:creationId xmlns:a16="http://schemas.microsoft.com/office/drawing/2014/main" id="{98F3E0C9-09A4-CDE6-4CE5-3B3BC3AEB0A3}"/>
+              </a:ext>
+            </a:extLst>
+          </p:cNvPr>
+          <p:cNvSpPr txBox="1"/>
+          <p:nvPr/>
+        </p:nvSpPr>
+        <p:spPr>
+          <a:xfrm>
+            <a:off x="308178" y="2672554"/>
+            <a:ext cx="435810" cy="200055"/>
+          </a:xfrm>
+          <a:prstGeom prst="rect">
+            <a:avLst/>
+          </a:prstGeom>
+          <a:noFill/>
+        </p:spPr>
+        <p:txBody>
+          <a:bodyPr wrap="square" rtlCol="0">
+            <a:spAutoFit/>
+          </a:bodyPr>
+          <a:lstStyle/>
+          <a:p>
+            <a:r>
+              <a:rPr lang="en-CN" sz="700" dirty="0">
+                <a:latin typeface="Arial" panose="020B0604020202020204" pitchFamily="34" charset="0"/>
+                <a:ea typeface="JetBrains Mono" panose="02000009000000000000" pitchFamily="49" charset="0"/>
+                <a:cs typeface="Arial" panose="020B0604020202020204" pitchFamily="34" charset="0"/>
+              </a:rPr>
+              <a:t>(</a:t>
+            </a:r>
+            <a:r>
+              <a:rPr lang="en-CN" sz="700" i="1" dirty="0">
+                <a:latin typeface="Times New Roman" panose="02020603050405020304" pitchFamily="18" charset="0"/>
+                <a:ea typeface="JetBrains Mono" panose="02000009000000000000" pitchFamily="49" charset="0"/>
+                <a:cs typeface="Times New Roman" panose="02020603050405020304" pitchFamily="18" charset="0"/>
+              </a:rPr>
+              <a:t>D</a:t>
+            </a:r>
+            <a:r>
+              <a:rPr lang="en-CN" sz="700" baseline="-25000" dirty="0">
+                <a:latin typeface="Arial" panose="020B0604020202020204" pitchFamily="34" charset="0"/>
+                <a:ea typeface="JetBrains Mono" panose="02000009000000000000" pitchFamily="49" charset="0"/>
+                <a:cs typeface="Arial" panose="020B0604020202020204" pitchFamily="34" charset="0"/>
+              </a:rPr>
+              <a:t>test</a:t>
+            </a:r>
+            <a:r>
+              <a:rPr lang="en-CN" sz="700" dirty="0">
+                <a:latin typeface="Arial" panose="020B0604020202020204" pitchFamily="34" charset="0"/>
+                <a:ea typeface="JetBrains Mono" panose="02000009000000000000" pitchFamily="49" charset="0"/>
+                <a:cs typeface="Arial" panose="020B0604020202020204" pitchFamily="34" charset="0"/>
+              </a:rPr>
+              <a:t>)</a:t>
+            </a:r>
+          </a:p>
+        </p:txBody>
+      </p:sp>
+      <p:pic>
+        <p:nvPicPr>
+          <p:cNvPr id="144" name="Picture 143">
+            <a:extLst>
+              <a:ext uri="{FF2B5EF4-FFF2-40B4-BE49-F238E27FC236}">
+                <a16:creationId xmlns:a16="http://schemas.microsoft.com/office/drawing/2014/main" id="{85082FA9-24DD-0F7C-A3F4-83840B96FF17}"/>
+              </a:ext>
+            </a:extLst>
+          </p:cNvPr>
+          <p:cNvPicPr>
+            <a:picLocks noChangeAspect="1"/>
+          </p:cNvPicPr>
+          <p:nvPr/>
+        </p:nvPicPr>
+        <p:blipFill>
+          <a:blip r:embed="rId7"/>
+          <a:stretch>
+            <a:fillRect/>
+          </a:stretch>
+        </p:blipFill>
+        <p:spPr>
+          <a:xfrm>
+            <a:off x="436083" y="2212566"/>
+            <a:ext cx="180000" cy="180000"/>
+          </a:xfrm>
+          <a:prstGeom prst="rect">
+            <a:avLst/>
+          </a:prstGeom>
+        </p:spPr>
+      </p:pic>
+      <p:pic>
+        <p:nvPicPr>
+          <p:cNvPr id="22" name="Picture 21">
+            <a:extLst>
+              <a:ext uri="{FF2B5EF4-FFF2-40B4-BE49-F238E27FC236}">
+                <a16:creationId xmlns:a16="http://schemas.microsoft.com/office/drawing/2014/main" id="{16DAA54F-BB7C-53A6-3A4C-226C7456B5FB}"/>
+              </a:ext>
+            </a:extLst>
+          </p:cNvPr>
+          <p:cNvPicPr>
+            <a:picLocks noChangeAspect="1"/>
+          </p:cNvPicPr>
+          <p:nvPr/>
+        </p:nvPicPr>
+        <p:blipFill>
+          <a:blip r:embed="rId7"/>
+          <a:stretch>
+            <a:fillRect/>
+          </a:stretch>
+        </p:blipFill>
+        <p:spPr>
+          <a:xfrm>
+            <a:off x="436083" y="2541480"/>
+            <a:ext cx="180000" cy="180000"/>
+          </a:xfrm>
+          <a:prstGeom prst="rect">
+            <a:avLst/>
+          </a:prstGeom>
+        </p:spPr>
+      </p:pic>
+      <p:cxnSp>
+        <p:nvCxnSpPr>
+          <p:cNvPr id="157" name="Elbow Connector 156">
+            <a:extLst>
+              <a:ext uri="{FF2B5EF4-FFF2-40B4-BE49-F238E27FC236}">
+                <a16:creationId xmlns:a16="http://schemas.microsoft.com/office/drawing/2014/main" id="{6F647EF3-03D3-18A8-80FB-C52E3068EB2A}"/>
+              </a:ext>
+            </a:extLst>
+          </p:cNvPr>
+          <p:cNvCxnSpPr>
+            <a:cxnSpLocks/>
+            <a:stCxn id="22" idx="3"/>
+            <a:endCxn id="122" idx="1"/>
+          </p:cNvCxnSpPr>
+          <p:nvPr/>
+        </p:nvCxnSpPr>
+        <p:spPr>
+          <a:xfrm flipV="1">
+            <a:off x="616087" y="2467022"/>
+            <a:ext cx="441777" cy="164458"/>
+          </a:xfrm>
+          <a:prstGeom prst="bentConnector3">
+            <a:avLst>
+              <a:gd name="adj1" fmla="val 50000"/>
+            </a:avLst>
+          </a:prstGeom>
+          <a:ln>
+            <a:solidFill>
+              <a:schemeClr val="tx1"/>
+            </a:solidFill>
+            <a:tailEnd type="triangle"/>
+          </a:ln>
+        </p:spPr>
+        <p:style>
+          <a:lnRef idx="1">
+            <a:schemeClr val="accent1"/>
+          </a:lnRef>
+          <a:fillRef idx="0">
+            <a:schemeClr val="accent1"/>
+          </a:fillRef>
+          <a:effectRef idx="0">
+            <a:schemeClr val="accent1"/>
+          </a:effectRef>
+          <a:fontRef idx="minor">
+            <a:schemeClr val="tx1"/>
+          </a:fontRef>
+        </p:style>
+      </p:cxnSp>
+      <p:cxnSp>
+        <p:nvCxnSpPr>
+          <p:cNvPr id="164" name="Elbow Connector 163">
+            <a:extLst>
+              <a:ext uri="{FF2B5EF4-FFF2-40B4-BE49-F238E27FC236}">
+                <a16:creationId xmlns:a16="http://schemas.microsoft.com/office/drawing/2014/main" id="{7F74857F-BAB9-347A-85BF-4A95A77CC489}"/>
+              </a:ext>
+            </a:extLst>
+          </p:cNvPr>
+          <p:cNvCxnSpPr>
+            <a:cxnSpLocks/>
+            <a:stCxn id="41" idx="0"/>
+            <a:endCxn id="122" idx="0"/>
+          </p:cNvCxnSpPr>
+          <p:nvPr/>
+        </p:nvCxnSpPr>
+        <p:spPr>
+          <a:xfrm rot="16200000" flipH="1" flipV="1">
+            <a:off x="1607425" y="1906224"/>
+            <a:ext cx="10024" cy="931573"/>
+          </a:xfrm>
+          <a:prstGeom prst="bentConnector3">
+            <a:avLst>
+              <a:gd name="adj1" fmla="val -2280527"/>
+            </a:avLst>
+          </a:prstGeom>
+          <a:ln>
+            <a:solidFill>
+              <a:schemeClr val="tx1"/>
+            </a:solidFill>
+            <a:prstDash val="dash"/>
+            <a:tailEnd type="triangle"/>
+          </a:ln>
+        </p:spPr>
+        <p:style>
+          <a:lnRef idx="1">
+            <a:schemeClr val="accent1"/>
+          </a:lnRef>
+          <a:fillRef idx="0">
+            <a:schemeClr val="accent1"/>
+          </a:fillRef>
+          <a:effectRef idx="0">
+            <a:schemeClr val="accent1"/>
+          </a:effectRef>
+          <a:fontRef idx="minor">
+            <a:schemeClr val="tx1"/>
+          </a:fontRef>
+        </p:style>
+      </p:cxnSp>
+      <p:cxnSp>
+        <p:nvCxnSpPr>
+          <p:cNvPr id="167" name="Straight Arrow Connector 166">
+            <a:extLst>
+              <a:ext uri="{FF2B5EF4-FFF2-40B4-BE49-F238E27FC236}">
+                <a16:creationId xmlns:a16="http://schemas.microsoft.com/office/drawing/2014/main" id="{1DE47DF4-CF7B-FEE2-946B-1EA6F009B6EA}"/>
+              </a:ext>
+            </a:extLst>
+          </p:cNvPr>
+          <p:cNvCxnSpPr>
+            <a:cxnSpLocks/>
+            <a:stCxn id="122" idx="3"/>
+            <a:endCxn id="41" idx="1"/>
+          </p:cNvCxnSpPr>
+          <p:nvPr/>
+        </p:nvCxnSpPr>
+        <p:spPr>
+          <a:xfrm>
+            <a:off x="1235437" y="2467022"/>
+            <a:ext cx="251819" cy="4"/>
+          </a:xfrm>
+          <a:prstGeom prst="straightConnector1">
+            <a:avLst/>
+          </a:prstGeom>
+          <a:ln w="6350">
+            <a:solidFill>
+              <a:schemeClr val="tx1"/>
+            </a:solidFill>
+            <a:prstDash val="dash"/>
+            <a:tailEnd type="triangle"/>
+          </a:ln>
+        </p:spPr>
+        <p:style>
+          <a:lnRef idx="1">
+            <a:schemeClr val="accent1"/>
+          </a:lnRef>
+          <a:fillRef idx="0">
+            <a:schemeClr val="accent1"/>
+          </a:fillRef>
+          <a:effectRef idx="0">
+            <a:schemeClr val="accent1"/>
+          </a:effectRef>
+          <a:fontRef idx="minor">
+            <a:schemeClr val="tx1"/>
+          </a:fontRef>
+        </p:style>
+      </p:cxnSp>
+      <p:cxnSp>
+        <p:nvCxnSpPr>
+          <p:cNvPr id="170" name="Elbow Connector 169">
+            <a:extLst>
+              <a:ext uri="{FF2B5EF4-FFF2-40B4-BE49-F238E27FC236}">
+                <a16:creationId xmlns:a16="http://schemas.microsoft.com/office/drawing/2014/main" id="{9A57FC9F-D185-539E-D741-A2E12AFCA044}"/>
+              </a:ext>
+            </a:extLst>
+          </p:cNvPr>
+          <p:cNvCxnSpPr>
+            <a:cxnSpLocks/>
+            <a:stCxn id="122" idx="2"/>
+            <a:endCxn id="29" idx="2"/>
+          </p:cNvCxnSpPr>
+          <p:nvPr/>
+        </p:nvCxnSpPr>
+        <p:spPr>
+          <a:xfrm rot="16200000" flipH="1">
+            <a:off x="2085559" y="1618110"/>
+            <a:ext cx="12700" cy="1877824"/>
+          </a:xfrm>
+          <a:prstGeom prst="bentConnector3">
+            <a:avLst>
+              <a:gd name="adj1" fmla="val 1800000"/>
+            </a:avLst>
+          </a:prstGeom>
+          <a:ln>
+            <a:solidFill>
+              <a:schemeClr val="tx1"/>
+            </a:solidFill>
+            <a:prstDash val="dash"/>
+            <a:tailEnd type="triangle"/>
+          </a:ln>
+        </p:spPr>
+        <p:style>
+          <a:lnRef idx="1">
+            <a:schemeClr val="accent1"/>
+          </a:lnRef>
+          <a:fillRef idx="0">
+            <a:schemeClr val="accent1"/>
+          </a:fillRef>
+          <a:effectRef idx="0">
+            <a:schemeClr val="accent1"/>
+          </a:effectRef>
+          <a:fontRef idx="minor">
+            <a:schemeClr val="tx1"/>
+          </a:fontRef>
+        </p:style>
+      </p:cxnSp>
+      <p:sp>
+        <p:nvSpPr>
+          <p:cNvPr id="178" name="TextBox 177">
+            <a:extLst>
+              <a:ext uri="{FF2B5EF4-FFF2-40B4-BE49-F238E27FC236}">
+                <a16:creationId xmlns:a16="http://schemas.microsoft.com/office/drawing/2014/main" id="{4307F397-FDE6-B2A4-31FE-A462E75B099F}"/>
+              </a:ext>
+            </a:extLst>
+          </p:cNvPr>
+          <p:cNvSpPr txBox="1"/>
+          <p:nvPr/>
+        </p:nvSpPr>
+        <p:spPr>
+          <a:xfrm>
+            <a:off x="1190866" y="2624308"/>
+            <a:ext cx="1830159" cy="184666"/>
+          </a:xfrm>
+          <a:prstGeom prst="rect">
+            <a:avLst/>
+          </a:prstGeom>
+          <a:noFill/>
+        </p:spPr>
+        <p:txBody>
+          <a:bodyPr wrap="square" rtlCol="0">
+            <a:spAutoFit/>
+          </a:bodyPr>
+          <a:lstStyle/>
+          <a:p>
+            <a:r>
+              <a:rPr lang="en-CN" sz="600" b="1" dirty="0">
+                <a:latin typeface="Arial" panose="020B0604020202020204" pitchFamily="34" charset="0"/>
+                <a:ea typeface="JetBrains Mono" panose="02000009000000000000" pitchFamily="49" charset="0"/>
+                <a:cs typeface="Arial" panose="020B0604020202020204" pitchFamily="34" charset="0"/>
+              </a:rPr>
+              <a:t>UPDATE</a:t>
+            </a:r>
+            <a:r>
+              <a:rPr lang="en-CN" sz="600" dirty="0">
+                <a:latin typeface="Arial" panose="020B0604020202020204" pitchFamily="34" charset="0"/>
+                <a:ea typeface="JetBrains Mono" panose="02000009000000000000" pitchFamily="49" charset="0"/>
+                <a:cs typeface="Arial" panose="020B0604020202020204" pitchFamily="34" charset="0"/>
+              </a:rPr>
+              <a:t> the label with a self-criticism strategy</a:t>
+            </a:r>
+          </a:p>
+        </p:txBody>
+      </p:sp>
+      <p:sp>
+        <p:nvSpPr>
+          <p:cNvPr id="179" name="TextBox 178">
+            <a:extLst>
+              <a:ext uri="{FF2B5EF4-FFF2-40B4-BE49-F238E27FC236}">
+                <a16:creationId xmlns:a16="http://schemas.microsoft.com/office/drawing/2014/main" id="{A1A00E84-BB73-CE41-D31F-9D204C942D9A}"/>
+              </a:ext>
+            </a:extLst>
+          </p:cNvPr>
+          <p:cNvSpPr txBox="1"/>
+          <p:nvPr/>
+        </p:nvSpPr>
+        <p:spPr>
+          <a:xfrm>
+            <a:off x="1154998" y="2276998"/>
+            <a:ext cx="314182" cy="200055"/>
+          </a:xfrm>
+          <a:prstGeom prst="rect">
+            <a:avLst/>
+          </a:prstGeom>
+          <a:noFill/>
+        </p:spPr>
+        <p:txBody>
+          <a:bodyPr wrap="square" rtlCol="0">
+            <a:spAutoFit/>
+          </a:bodyPr>
+          <a:lstStyle/>
+          <a:p>
+            <a:pPr algn="ctr"/>
+            <a:r>
+              <a:rPr lang="en-CN" sz="700" dirty="0">
+                <a:latin typeface="Arial" panose="020B0604020202020204" pitchFamily="34" charset="0"/>
+                <a:ea typeface="JetBrains Mono" panose="02000009000000000000" pitchFamily="49" charset="0"/>
+                <a:cs typeface="Arial" panose="020B0604020202020204" pitchFamily="34" charset="0"/>
+              </a:rPr>
+              <a:t>(</a:t>
+            </a:r>
+            <a:r>
+              <a:rPr lang="en-CN" sz="700" dirty="0">
+                <a:latin typeface="Times New Roman" panose="02020603050405020304" pitchFamily="18" charset="0"/>
+                <a:ea typeface="JetBrains Mono" panose="02000009000000000000" pitchFamily="49" charset="0"/>
+                <a:cs typeface="Times New Roman" panose="02020603050405020304" pitchFamily="18" charset="0"/>
+              </a:rPr>
+              <a:t>1</a:t>
+            </a:r>
+            <a:r>
+              <a:rPr lang="en-CN" sz="700" dirty="0">
+                <a:latin typeface="Arial" panose="020B0604020202020204" pitchFamily="34" charset="0"/>
+                <a:ea typeface="JetBrains Mono" panose="02000009000000000000" pitchFamily="49" charset="0"/>
+                <a:cs typeface="Arial" panose="020B0604020202020204" pitchFamily="34" charset="0"/>
+              </a:rPr>
+              <a:t>)</a:t>
+            </a:r>
+          </a:p>
+        </p:txBody>
+      </p:sp>
+      <p:sp>
+        <p:nvSpPr>
+          <p:cNvPr id="180" name="TextBox 179">
+            <a:extLst>
+              <a:ext uri="{FF2B5EF4-FFF2-40B4-BE49-F238E27FC236}">
+                <a16:creationId xmlns:a16="http://schemas.microsoft.com/office/drawing/2014/main" id="{4BAF124D-7455-D304-B2A9-B4FB0658155E}"/>
+              </a:ext>
+            </a:extLst>
+          </p:cNvPr>
+          <p:cNvSpPr txBox="1"/>
+          <p:nvPr/>
+        </p:nvSpPr>
+        <p:spPr>
+          <a:xfrm>
+            <a:off x="2008119" y="2163699"/>
+            <a:ext cx="314182" cy="200055"/>
+          </a:xfrm>
+          <a:prstGeom prst="rect">
+            <a:avLst/>
+          </a:prstGeom>
+          <a:noFill/>
+        </p:spPr>
+        <p:txBody>
+          <a:bodyPr wrap="square" rtlCol="0">
+            <a:spAutoFit/>
+          </a:bodyPr>
+          <a:lstStyle/>
+          <a:p>
+            <a:pPr algn="ctr"/>
+            <a:r>
+              <a:rPr lang="en-CN" sz="700" dirty="0">
+                <a:latin typeface="Arial" panose="020B0604020202020204" pitchFamily="34" charset="0"/>
+                <a:ea typeface="JetBrains Mono" panose="02000009000000000000" pitchFamily="49" charset="0"/>
+                <a:cs typeface="Arial" panose="020B0604020202020204" pitchFamily="34" charset="0"/>
+              </a:rPr>
+              <a:t>(</a:t>
+            </a:r>
+            <a:r>
+              <a:rPr lang="en-CN" sz="700" dirty="0">
+                <a:latin typeface="Times New Roman" panose="02020603050405020304" pitchFamily="18" charset="0"/>
+                <a:ea typeface="JetBrains Mono" panose="02000009000000000000" pitchFamily="49" charset="0"/>
+                <a:cs typeface="Times New Roman" panose="02020603050405020304" pitchFamily="18" charset="0"/>
+              </a:rPr>
+              <a:t>2</a:t>
+            </a:r>
+            <a:r>
+              <a:rPr lang="en-CN" sz="700" dirty="0">
+                <a:latin typeface="Arial" panose="020B0604020202020204" pitchFamily="34" charset="0"/>
+                <a:ea typeface="JetBrains Mono" panose="02000009000000000000" pitchFamily="49" charset="0"/>
+                <a:cs typeface="Arial" panose="020B0604020202020204" pitchFamily="34" charset="0"/>
+              </a:rPr>
+              <a:t>)</a:t>
+            </a:r>
+          </a:p>
+        </p:txBody>
+      </p:sp>
+      <p:sp>
+        <p:nvSpPr>
+          <p:cNvPr id="181" name="TextBox 180">
+            <a:extLst>
+              <a:ext uri="{FF2B5EF4-FFF2-40B4-BE49-F238E27FC236}">
+                <a16:creationId xmlns:a16="http://schemas.microsoft.com/office/drawing/2014/main" id="{67A3512E-B0A9-5DFF-9118-DB5B91411042}"/>
+              </a:ext>
+            </a:extLst>
+          </p:cNvPr>
+          <p:cNvSpPr txBox="1"/>
+          <p:nvPr/>
+        </p:nvSpPr>
+        <p:spPr>
+          <a:xfrm>
+            <a:off x="921643" y="2566856"/>
+            <a:ext cx="314182" cy="200055"/>
+          </a:xfrm>
+          <a:prstGeom prst="rect">
+            <a:avLst/>
+          </a:prstGeom>
+          <a:noFill/>
+        </p:spPr>
+        <p:txBody>
+          <a:bodyPr wrap="square" rtlCol="0">
+            <a:spAutoFit/>
+          </a:bodyPr>
+          <a:lstStyle/>
+          <a:p>
+            <a:pPr algn="ctr"/>
+            <a:r>
+              <a:rPr lang="en-CN" sz="700" dirty="0">
+                <a:latin typeface="Arial" panose="020B0604020202020204" pitchFamily="34" charset="0"/>
+                <a:ea typeface="JetBrains Mono" panose="02000009000000000000" pitchFamily="49" charset="0"/>
+                <a:cs typeface="Arial" panose="020B0604020202020204" pitchFamily="34" charset="0"/>
+              </a:rPr>
+              <a:t>(</a:t>
+            </a:r>
+            <a:r>
+              <a:rPr lang="en-CN" sz="700" dirty="0">
+                <a:latin typeface="Times New Roman" panose="02020603050405020304" pitchFamily="18" charset="0"/>
+                <a:ea typeface="JetBrains Mono" panose="02000009000000000000" pitchFamily="49" charset="0"/>
+                <a:cs typeface="Times New Roman" panose="02020603050405020304" pitchFamily="18" charset="0"/>
+              </a:rPr>
+              <a:t>3</a:t>
+            </a:r>
+            <a:r>
+              <a:rPr lang="en-CN" sz="700" dirty="0">
+                <a:latin typeface="Arial" panose="020B0604020202020204" pitchFamily="34" charset="0"/>
+                <a:ea typeface="JetBrains Mono" panose="02000009000000000000" pitchFamily="49" charset="0"/>
+                <a:cs typeface="Arial" panose="020B0604020202020204" pitchFamily="34" charset="0"/>
+              </a:rPr>
+              <a:t>)</a:t>
+            </a:r>
+          </a:p>
+        </p:txBody>
+      </p:sp>
+      <p:sp>
+        <p:nvSpPr>
+          <p:cNvPr id="182" name="TextBox 181">
+            <a:extLst>
+              <a:ext uri="{FF2B5EF4-FFF2-40B4-BE49-F238E27FC236}">
+                <a16:creationId xmlns:a16="http://schemas.microsoft.com/office/drawing/2014/main" id="{1616C98F-9F45-8666-EADD-3B1A39A6F8CD}"/>
+              </a:ext>
+            </a:extLst>
+          </p:cNvPr>
+          <p:cNvSpPr txBox="1"/>
+          <p:nvPr/>
+        </p:nvSpPr>
+        <p:spPr>
+          <a:xfrm>
+            <a:off x="-38639" y="696949"/>
+            <a:ext cx="721908" cy="184666"/>
+          </a:xfrm>
+          <a:prstGeom prst="rect">
+            <a:avLst/>
+          </a:prstGeom>
+          <a:noFill/>
+        </p:spPr>
+        <p:txBody>
+          <a:bodyPr wrap="square" rtlCol="0">
+            <a:spAutoFit/>
+          </a:bodyPr>
+          <a:lstStyle/>
+          <a:p>
+            <a:pPr algn="ctr"/>
+            <a:r>
+              <a:rPr lang="en-CN" sz="600" dirty="0">
+                <a:latin typeface="Arial" panose="020B0604020202020204" pitchFamily="34" charset="0"/>
+                <a:ea typeface="JetBrains Mono" panose="02000009000000000000" pitchFamily="49" charset="0"/>
+                <a:cs typeface="Arial" panose="020B0604020202020204" pitchFamily="34" charset="0"/>
+              </a:rPr>
+              <a:t>Unlabeled Data</a:t>
+            </a:r>
+          </a:p>
+        </p:txBody>
+      </p:sp>
     </p:spTree>
     <p:extLst>
       <p:ext uri="{BB962C8B-B14F-4D97-AF65-F5344CB8AC3E}">
